--- a/20260319_filesbygoogle-crash-analyse/FilesByGoogle_Crash_RCA.pptx
+++ b/20260319_filesbygoogle-crash-analyse/FilesByGoogle_Crash_RCA.pptx
@@ -2609,23 +2609,23 @@
         <p:spPr>
           <a:xfrm>
             <a:off x="731520" y="1234440"/>
-            <a:ext cx="1371600" cy="274320"/>
-          </a:xfrm>
-          <a:prstGeom prst="rect">
-            <a:avLst/>
-          </a:prstGeom>
-          <a:noFill/>
-          <a:ln/>
-        </p:spPr>
-        <p:txBody>
-          <a:bodyPr wrap="square" rtlCol="0" anchor="ctr"/>
-          <a:lstStyle/>
-          <a:p>
-            <a:pPr indent="0" marL="0">
-              <a:buNone/>
-            </a:pPr>
-            <a:r>
-              <a:rPr lang="en-US" sz="1000" b="1" dirty="0">
+            <a:ext cx="640080" cy="228600"/>
+          </a:xfrm>
+          <a:prstGeom prst="rect">
+            <a:avLst/>
+          </a:prstGeom>
+          <a:noFill/>
+          <a:ln/>
+        </p:spPr>
+        <p:txBody>
+          <a:bodyPr wrap="square" rtlCol="0" anchor="ctr"/>
+          <a:lstStyle/>
+          <a:p>
+            <a:pPr indent="0" marL="0">
+              <a:buNone/>
+            </a:pPr>
+            <a:r>
+              <a:rPr lang="en-US" sz="900" b="1" dirty="0">
                 <a:solidFill>
                   <a:srgbClr val="8B8FA3"/>
                 </a:solidFill>
@@ -2633,9 +2633,9 @@
                 <a:ea typeface="Microsoft JhengHei" pitchFamily="34" charset="-122"/>
                 <a:cs typeface="Microsoft JhengHei" pitchFamily="34" charset="-120"/>
               </a:rPr>
-              <a:t>時間</a:t>
-            </a:r>
-            <a:endParaRPr lang="en-US" sz="1000" dirty="0"/>
+              <a:t>行號</a:t>
+            </a:r>
+            <a:endParaRPr lang="en-US" sz="900" dirty="0"/>
           </a:p>
         </p:txBody>
       </p:sp>
@@ -2647,24 +2647,24 @@
         </p:nvSpPr>
         <p:spPr>
           <a:xfrm>
-            <a:off x="2103120" y="1234440"/>
-            <a:ext cx="640080" cy="274320"/>
-          </a:xfrm>
-          <a:prstGeom prst="rect">
-            <a:avLst/>
-          </a:prstGeom>
-          <a:noFill/>
-          <a:ln/>
-        </p:spPr>
-        <p:txBody>
-          <a:bodyPr wrap="square" rtlCol="0" anchor="ctr"/>
-          <a:lstStyle/>
-          <a:p>
-            <a:pPr indent="0" marL="0">
-              <a:buNone/>
-            </a:pPr>
-            <a:r>
-              <a:rPr lang="en-US" sz="1000" b="1" dirty="0">
+            <a:off x="1371600" y="1234440"/>
+            <a:ext cx="1371600" cy="228600"/>
+          </a:xfrm>
+          <a:prstGeom prst="rect">
+            <a:avLst/>
+          </a:prstGeom>
+          <a:noFill/>
+          <a:ln/>
+        </p:spPr>
+        <p:txBody>
+          <a:bodyPr wrap="square" rtlCol="0" anchor="ctr"/>
+          <a:lstStyle/>
+          <a:p>
+            <a:pPr indent="0" marL="0">
+              <a:buNone/>
+            </a:pPr>
+            <a:r>
+              <a:rPr lang="en-US" sz="900" b="1" dirty="0">
                 <a:solidFill>
                   <a:srgbClr val="8B8FA3"/>
                 </a:solidFill>
@@ -2672,9 +2672,9 @@
                 <a:ea typeface="Microsoft JhengHei" pitchFamily="34" charset="-122"/>
                 <a:cs typeface="Microsoft JhengHei" pitchFamily="34" charset="-120"/>
               </a:rPr>
-              <a:t>行號</a:t>
-            </a:r>
-            <a:endParaRPr lang="en-US" sz="1000" dirty="0"/>
+              <a:t>關鍵字</a:t>
+            </a:r>
+            <a:endParaRPr lang="en-US" sz="900" dirty="0"/>
           </a:p>
         </p:txBody>
       </p:sp>
@@ -2687,23 +2687,23 @@
         <p:spPr>
           <a:xfrm>
             <a:off x="2743200" y="1234440"/>
-            <a:ext cx="2743200" cy="274320"/>
-          </a:xfrm>
-          <a:prstGeom prst="rect">
-            <a:avLst/>
-          </a:prstGeom>
-          <a:noFill/>
-          <a:ln/>
-        </p:spPr>
-        <p:txBody>
-          <a:bodyPr wrap="square" rtlCol="0" anchor="ctr"/>
-          <a:lstStyle/>
-          <a:p>
-            <a:pPr indent="0" marL="0">
-              <a:buNone/>
-            </a:pPr>
-            <a:r>
-              <a:rPr lang="en-US" sz="1000" b="1" dirty="0">
+            <a:ext cx="2560320" cy="228600"/>
+          </a:xfrm>
+          <a:prstGeom prst="rect">
+            <a:avLst/>
+          </a:prstGeom>
+          <a:noFill/>
+          <a:ln/>
+        </p:spPr>
+        <p:txBody>
+          <a:bodyPr wrap="square" rtlCol="0" anchor="ctr"/>
+          <a:lstStyle/>
+          <a:p>
+            <a:pPr indent="0" marL="0">
+              <a:buNone/>
+            </a:pPr>
+            <a:r>
+              <a:rPr lang="en-US" sz="900" b="1" dirty="0">
                 <a:solidFill>
                   <a:srgbClr val="8B8FA3"/>
                 </a:solidFill>
@@ -2713,7 +2713,7 @@
               </a:rPr>
               <a:t>被殺進程</a:t>
             </a:r>
-            <a:endParaRPr lang="en-US" sz="1000" dirty="0"/>
+            <a:endParaRPr lang="en-US" sz="900" dirty="0"/>
           </a:p>
         </p:txBody>
       </p:sp>
@@ -2725,24 +2725,24 @@
         </p:nvSpPr>
         <p:spPr>
           <a:xfrm>
-            <a:off x="5486400" y="1234440"/>
-            <a:ext cx="731520" cy="274320"/>
-          </a:xfrm>
-          <a:prstGeom prst="rect">
-            <a:avLst/>
-          </a:prstGeom>
-          <a:noFill/>
-          <a:ln/>
-        </p:spPr>
-        <p:txBody>
-          <a:bodyPr wrap="square" rtlCol="0" anchor="ctr"/>
-          <a:lstStyle/>
-          <a:p>
-            <a:pPr indent="0" marL="0">
-              <a:buNone/>
-            </a:pPr>
-            <a:r>
-              <a:rPr lang="en-US" sz="1000" b="1" dirty="0">
+            <a:off x="5303520" y="1234440"/>
+            <a:ext cx="914400" cy="228600"/>
+          </a:xfrm>
+          <a:prstGeom prst="rect">
+            <a:avLst/>
+          </a:prstGeom>
+          <a:noFill/>
+          <a:ln/>
+        </p:spPr>
+        <p:txBody>
+          <a:bodyPr wrap="square" rtlCol="0" anchor="ctr"/>
+          <a:lstStyle/>
+          <a:p>
+            <a:pPr indent="0" marL="0">
+              <a:buNone/>
+            </a:pPr>
+            <a:r>
+              <a:rPr lang="en-US" sz="900" b="1" dirty="0">
                 <a:solidFill>
                   <a:srgbClr val="8B8FA3"/>
                 </a:solidFill>
@@ -2752,7 +2752,7 @@
               </a:rPr>
               <a:t>狀態</a:t>
             </a:r>
-            <a:endParaRPr lang="en-US" sz="1000" dirty="0"/>
+            <a:endParaRPr lang="en-US" sz="900" dirty="0"/>
           </a:p>
         </p:txBody>
       </p:sp>
@@ -2764,24 +2764,24 @@
         </p:nvSpPr>
         <p:spPr>
           <a:xfrm>
-            <a:off x="6400800" y="1234440"/>
-            <a:ext cx="5029200" cy="274320"/>
-          </a:xfrm>
-          <a:prstGeom prst="rect">
-            <a:avLst/>
-          </a:prstGeom>
-          <a:noFill/>
-          <a:ln/>
-        </p:spPr>
-        <p:txBody>
-          <a:bodyPr wrap="square" rtlCol="0" anchor="ctr"/>
-          <a:lstStyle/>
-          <a:p>
-            <a:pPr indent="0" marL="0">
-              <a:buNone/>
-            </a:pPr>
-            <a:r>
-              <a:rPr lang="en-US" sz="1000" b="1" dirty="0">
+            <a:off x="6309360" y="1234440"/>
+            <a:ext cx="5029200" cy="228600"/>
+          </a:xfrm>
+          <a:prstGeom prst="rect">
+            <a:avLst/>
+          </a:prstGeom>
+          <a:noFill/>
+          <a:ln/>
+        </p:spPr>
+        <p:txBody>
+          <a:bodyPr wrap="square" rtlCol="0" anchor="ctr"/>
+          <a:lstStyle/>
+          <a:p>
+            <a:pPr indent="0" marL="0">
+              <a:buNone/>
+            </a:pPr>
+            <a:r>
+              <a:rPr lang="en-US" sz="900" b="1" dirty="0">
                 <a:solidFill>
                   <a:srgbClr val="8B8FA3"/>
                 </a:solidFill>
@@ -2791,7 +2791,7 @@
               </a:rPr>
               <a:t>意義</a:t>
             </a:r>
-            <a:endParaRPr lang="en-US" sz="1000" dirty="0"/>
+            <a:endParaRPr lang="en-US" sz="900" dirty="0"/>
           </a:p>
         </p:txBody>
       </p:sp>
@@ -2803,34 +2803,34 @@
         </p:nvSpPr>
         <p:spPr>
           <a:xfrm>
-            <a:off x="731520" y="1645920"/>
-            <a:ext cx="1371600" cy="365760"/>
-          </a:xfrm>
-          <a:prstGeom prst="rect">
-            <a:avLst/>
-          </a:prstGeom>
-          <a:noFill/>
-          <a:ln/>
-        </p:spPr>
-        <p:txBody>
-          <a:bodyPr wrap="square" rtlCol="0" anchor="ctr"/>
-          <a:lstStyle/>
-          <a:p>
-            <a:pPr indent="0" marL="0">
-              <a:buNone/>
-            </a:pPr>
-            <a:r>
-              <a:rPr lang="en-US" sz="1000" dirty="0">
-                <a:solidFill>
-                  <a:srgbClr val="FFD644"/>
+            <a:off x="731520" y="1508760"/>
+            <a:ext cx="640080" cy="274320"/>
+          </a:xfrm>
+          <a:prstGeom prst="rect">
+            <a:avLst/>
+          </a:prstGeom>
+          <a:noFill/>
+          <a:ln/>
+        </p:spPr>
+        <p:txBody>
+          <a:bodyPr wrap="square" rtlCol="0" anchor="ctr"/>
+          <a:lstStyle/>
+          <a:p>
+            <a:pPr indent="0" marL="0">
+              <a:buNone/>
+            </a:pPr>
+            <a:r>
+              <a:rPr lang="en-US" sz="800" dirty="0">
+                <a:solidFill>
+                  <a:srgbClr val="8B8FA3"/>
                 </a:solidFill>
                 <a:latin typeface="Consolas" pitchFamily="34" charset="0"/>
                 <a:ea typeface="Consolas" pitchFamily="34" charset="-122"/>
                 <a:cs typeface="Consolas" pitchFamily="34" charset="-120"/>
               </a:rPr>
-              <a:t>15:44:47.503</a:t>
-            </a:r>
-            <a:endParaRPr lang="en-US" sz="1000" dirty="0"/>
+              <a:t>14561</a:t>
+            </a:r>
+            <a:endParaRPr lang="en-US" sz="800" dirty="0"/>
           </a:p>
         </p:txBody>
       </p:sp>
@@ -2842,24 +2842,24 @@
         </p:nvSpPr>
         <p:spPr>
           <a:xfrm>
-            <a:off x="2103120" y="1645920"/>
-            <a:ext cx="640080" cy="365760"/>
-          </a:xfrm>
-          <a:prstGeom prst="rect">
-            <a:avLst/>
-          </a:prstGeom>
-          <a:noFill/>
-          <a:ln/>
-        </p:spPr>
-        <p:txBody>
-          <a:bodyPr wrap="square" rtlCol="0" anchor="ctr"/>
-          <a:lstStyle/>
-          <a:p>
-            <a:pPr indent="0" marL="0">
-              <a:buNone/>
-            </a:pPr>
-            <a:r>
-              <a:rPr lang="en-US" sz="1000" dirty="0">
+            <a:off x="1371600" y="1508760"/>
+            <a:ext cx="1371600" cy="274320"/>
+          </a:xfrm>
+          <a:prstGeom prst="rect">
+            <a:avLst/>
+          </a:prstGeom>
+          <a:noFill/>
+          <a:ln/>
+        </p:spPr>
+        <p:txBody>
+          <a:bodyPr wrap="square" rtlCol="0" anchor="ctr"/>
+          <a:lstStyle/>
+          <a:p>
+            <a:pPr indent="0" marL="0">
+              <a:buNone/>
+            </a:pPr>
+            <a:r>
+              <a:rPr lang="en-US" sz="800" dirty="0">
                 <a:solidFill>
                   <a:srgbClr val="8B8FA3"/>
                 </a:solidFill>
@@ -2867,9 +2867,9 @@
                 <a:ea typeface="Consolas" pitchFamily="34" charset="-122"/>
                 <a:cs typeface="Consolas" pitchFamily="34" charset="-120"/>
               </a:rPr>
-              <a:t>14972</a:t>
-            </a:r>
-            <a:endParaRPr lang="en-US" sz="1000" dirty="0"/>
+              <a:t>lmkd.reinit</a:t>
+            </a:r>
+            <a:endParaRPr lang="en-US" sz="800" dirty="0"/>
           </a:p>
         </p:txBody>
       </p:sp>
@@ -2881,34 +2881,34 @@
         </p:nvSpPr>
         <p:spPr>
           <a:xfrm>
-            <a:off x="2743200" y="1645920"/>
-            <a:ext cx="2743200" cy="365760"/>
-          </a:xfrm>
-          <a:prstGeom prst="rect">
-            <a:avLst/>
-          </a:prstGeom>
-          <a:noFill/>
-          <a:ln/>
-        </p:spPr>
-        <p:txBody>
-          <a:bodyPr wrap="square" rtlCol="0" anchor="ctr"/>
-          <a:lstStyle/>
-          <a:p>
-            <a:pPr indent="0" marL="0">
-              <a:buNone/>
-            </a:pPr>
-            <a:r>
-              <a:rPr lang="en-US" sz="1000" dirty="0">
-                <a:solidFill>
-                  <a:srgbClr val="FFD644"/>
+            <a:off x="2743200" y="1508760"/>
+            <a:ext cx="2560320" cy="274320"/>
+          </a:xfrm>
+          <a:prstGeom prst="rect">
+            <a:avLst/>
+          </a:prstGeom>
+          <a:noFill/>
+          <a:ln/>
+        </p:spPr>
+        <p:txBody>
+          <a:bodyPr wrap="square" rtlCol="0" anchor="ctr"/>
+          <a:lstStyle/>
+          <a:p>
+            <a:pPr indent="0" marL="0">
+              <a:buNone/>
+            </a:pPr>
+            <a:r>
+              <a:rPr lang="en-US" sz="800" dirty="0">
+                <a:solidFill>
+                  <a:srgbClr val="8B8FA3"/>
                 </a:solidFill>
                 <a:latin typeface="Microsoft JhengHei" pitchFamily="34" charset="0"/>
                 <a:ea typeface="Microsoft JhengHei" pitchFamily="34" charset="-122"/>
                 <a:cs typeface="Microsoft JhengHei" pitchFamily="34" charset="-120"/>
               </a:rPr>
-              <a:t>com.google.android.gms</a:t>
-            </a:r>
-            <a:endParaRPr lang="en-US" sz="1000" dirty="0"/>
+              <a:t>-</a:t>
+            </a:r>
+            <a:endParaRPr lang="en-US" sz="800" dirty="0"/>
           </a:p>
         </p:txBody>
       </p:sp>
@@ -2920,34 +2920,34 @@
         </p:nvSpPr>
         <p:spPr>
           <a:xfrm>
-            <a:off x="5486400" y="1645920"/>
-            <a:ext cx="731520" cy="365760"/>
-          </a:xfrm>
-          <a:prstGeom prst="rect">
-            <a:avLst/>
-          </a:prstGeom>
-          <a:noFill/>
-          <a:ln/>
-        </p:spPr>
-        <p:txBody>
-          <a:bodyPr wrap="square" rtlCol="0" anchor="ctr"/>
-          <a:lstStyle/>
-          <a:p>
-            <a:pPr indent="0" marL="0">
-              <a:buNone/>
-            </a:pPr>
-            <a:r>
-              <a:rPr lang="en-US" sz="1000" dirty="0">
-                <a:solidFill>
-                  <a:srgbClr val="FFD644"/>
+            <a:off x="5303520" y="1508760"/>
+            <a:ext cx="914400" cy="274320"/>
+          </a:xfrm>
+          <a:prstGeom prst="rect">
+            <a:avLst/>
+          </a:prstGeom>
+          <a:noFill/>
+          <a:ln/>
+        </p:spPr>
+        <p:txBody>
+          <a:bodyPr wrap="square" rtlCol="0" anchor="ctr"/>
+          <a:lstStyle/>
+          <a:p>
+            <a:pPr indent="0" marL="0">
+              <a:buNone/>
+            </a:pPr>
+            <a:r>
+              <a:rPr lang="en-US" sz="800" dirty="0">
+                <a:solidFill>
+                  <a:srgbClr val="8B8FA3"/>
                 </a:solidFill>
                 <a:latin typeface="Consolas" pitchFamily="34" charset="0"/>
                 <a:ea typeface="Consolas" pitchFamily="34" charset="-122"/>
                 <a:cs typeface="Consolas" pitchFamily="34" charset="-120"/>
               </a:rPr>
-              <a:t>BTOP</a:t>
-            </a:r>
-            <a:endParaRPr lang="en-US" sz="1000" dirty="0"/>
+              <a:t>-</a:t>
+            </a:r>
+            <a:endParaRPr lang="en-US" sz="800" dirty="0"/>
           </a:p>
         </p:txBody>
       </p:sp>
@@ -2959,24 +2959,24 @@
         </p:nvSpPr>
         <p:spPr>
           <a:xfrm>
-            <a:off x="6400800" y="1645920"/>
-            <a:ext cx="5212080" cy="365760"/>
-          </a:xfrm>
-          <a:prstGeom prst="rect">
-            <a:avLst/>
-          </a:prstGeom>
-          <a:noFill/>
-          <a:ln/>
-        </p:spPr>
-        <p:txBody>
-          <a:bodyPr wrap="square" rtlCol="0" anchor="ctr"/>
-          <a:lstStyle/>
-          <a:p>
-            <a:pPr indent="0" marL="0">
-              <a:buNone/>
-            </a:pPr>
-            <a:r>
-              <a:rPr lang="en-US" sz="1000" dirty="0">
+            <a:off x="6309360" y="1508760"/>
+            <a:ext cx="5212080" cy="274320"/>
+          </a:xfrm>
+          <a:prstGeom prst="rect">
+            <a:avLst/>
+          </a:prstGeom>
+          <a:noFill/>
+          <a:ln/>
+        </p:spPr>
+        <p:txBody>
+          <a:bodyPr wrap="square" rtlCol="0" anchor="ctr"/>
+          <a:lstStyle/>
+          <a:p>
+            <a:pPr indent="0" marL="0">
+              <a:buNone/>
+            </a:pPr>
+            <a:r>
+              <a:rPr lang="en-US" sz="900" dirty="0">
                 <a:solidFill>
                   <a:srgbClr val="E0E0E6"/>
                 </a:solidFill>
@@ -2984,9 +2984,9 @@
                 <a:ea typeface="Microsoft JhengHei" pitchFamily="34" charset="-122"/>
                 <a:cs typeface="Microsoft JhengHei" pitchFamily="34" charset="-120"/>
               </a:rPr>
-              <a:t>Google Play Services — 可見的背景服務，先被殺</a:t>
-            </a:r>
-            <a:endParaRPr lang="en-US" sz="1000" dirty="0"/>
+              <a:t>LMKD 被重新初始化 — 記憶體壓力已失控</a:t>
+            </a:r>
+            <a:endParaRPr lang="en-US" sz="900" dirty="0"/>
           </a:p>
         </p:txBody>
       </p:sp>
@@ -2998,34 +2998,34 @@
         </p:nvSpPr>
         <p:spPr>
           <a:xfrm>
-            <a:off x="731520" y="2212848"/>
-            <a:ext cx="1371600" cy="365760"/>
-          </a:xfrm>
-          <a:prstGeom prst="rect">
-            <a:avLst/>
-          </a:prstGeom>
-          <a:noFill/>
-          <a:ln/>
-        </p:spPr>
-        <p:txBody>
-          <a:bodyPr wrap="square" rtlCol="0" anchor="ctr"/>
-          <a:lstStyle/>
-          <a:p>
-            <a:pPr indent="0" marL="0">
-              <a:buNone/>
-            </a:pPr>
-            <a:r>
-              <a:rPr lang="en-US" sz="1000" dirty="0">
-                <a:solidFill>
-                  <a:srgbClr val="FFD644"/>
+            <a:off x="731520" y="1856232"/>
+            <a:ext cx="640080" cy="274320"/>
+          </a:xfrm>
+          <a:prstGeom prst="rect">
+            <a:avLst/>
+          </a:prstGeom>
+          <a:noFill/>
+          <a:ln/>
+        </p:spPr>
+        <p:txBody>
+          <a:bodyPr wrap="square" rtlCol="0" anchor="ctr"/>
+          <a:lstStyle/>
+          <a:p>
+            <a:pPr indent="0" marL="0">
+              <a:buNone/>
+            </a:pPr>
+            <a:r>
+              <a:rPr lang="en-US" sz="800" dirty="0">
+                <a:solidFill>
+                  <a:srgbClr val="8B8FA3"/>
                 </a:solidFill>
                 <a:latin typeface="Consolas" pitchFamily="34" charset="0"/>
                 <a:ea typeface="Consolas" pitchFamily="34" charset="-122"/>
                 <a:cs typeface="Consolas" pitchFamily="34" charset="-120"/>
               </a:rPr>
-              <a:t>15:44:47.549</a:t>
-            </a:r>
-            <a:endParaRPr lang="en-US" sz="1000" dirty="0"/>
+              <a:t>14972</a:t>
+            </a:r>
+            <a:endParaRPr lang="en-US" sz="800" dirty="0"/>
           </a:p>
         </p:txBody>
       </p:sp>
@@ -3037,34 +3037,34 @@
         </p:nvSpPr>
         <p:spPr>
           <a:xfrm>
-            <a:off x="2103120" y="2212848"/>
-            <a:ext cx="640080" cy="365760"/>
-          </a:xfrm>
-          <a:prstGeom prst="rect">
-            <a:avLst/>
-          </a:prstGeom>
-          <a:noFill/>
-          <a:ln/>
-        </p:spPr>
-        <p:txBody>
-          <a:bodyPr wrap="square" rtlCol="0" anchor="ctr"/>
-          <a:lstStyle/>
-          <a:p>
-            <a:pPr indent="0" marL="0">
-              <a:buNone/>
-            </a:pPr>
-            <a:r>
-              <a:rPr lang="en-US" sz="1000" dirty="0">
-                <a:solidFill>
-                  <a:srgbClr val="8B8FA3"/>
+            <a:off x="1371600" y="1856232"/>
+            <a:ext cx="1371600" cy="274320"/>
+          </a:xfrm>
+          <a:prstGeom prst="rect">
+            <a:avLst/>
+          </a:prstGeom>
+          <a:noFill/>
+          <a:ln/>
+        </p:spPr>
+        <p:txBody>
+          <a:bodyPr wrap="square" rtlCol="0" anchor="ctr"/>
+          <a:lstStyle/>
+          <a:p>
+            <a:pPr indent="0" marL="0">
+              <a:buNone/>
+            </a:pPr>
+            <a:r>
+              <a:rPr lang="en-US" sz="800" dirty="0">
+                <a:solidFill>
+                  <a:srgbClr val="FFD644"/>
                 </a:solidFill>
                 <a:latin typeface="Consolas" pitchFamily="34" charset="0"/>
                 <a:ea typeface="Consolas" pitchFamily="34" charset="-122"/>
                 <a:cs typeface="Consolas" pitchFamily="34" charset="-120"/>
               </a:rPr>
-              <a:t>14977</a:t>
-            </a:r>
-            <a:endParaRPr lang="en-US" sz="1000" dirty="0"/>
+              <a:t>oom_reaper</a:t>
+            </a:r>
+            <a:endParaRPr lang="en-US" sz="800" dirty="0"/>
           </a:p>
         </p:txBody>
       </p:sp>
@@ -3076,24 +3076,24 @@
         </p:nvSpPr>
         <p:spPr>
           <a:xfrm>
-            <a:off x="2743200" y="2212848"/>
-            <a:ext cx="2743200" cy="365760"/>
-          </a:xfrm>
-          <a:prstGeom prst="rect">
-            <a:avLst/>
-          </a:prstGeom>
-          <a:noFill/>
-          <a:ln/>
-        </p:spPr>
-        <p:txBody>
-          <a:bodyPr wrap="square" rtlCol="0" anchor="ctr"/>
-          <a:lstStyle/>
-          <a:p>
-            <a:pPr indent="0" marL="0">
-              <a:buNone/>
-            </a:pPr>
-            <a:r>
-              <a:rPr lang="en-US" sz="1000" dirty="0">
+            <a:off x="2743200" y="1856232"/>
+            <a:ext cx="2560320" cy="274320"/>
+          </a:xfrm>
+          <a:prstGeom prst="rect">
+            <a:avLst/>
+          </a:prstGeom>
+          <a:noFill/>
+          <a:ln/>
+        </p:spPr>
+        <p:txBody>
+          <a:bodyPr wrap="square" rtlCol="0" anchor="ctr"/>
+          <a:lstStyle/>
+          <a:p>
+            <a:pPr indent="0" marL="0">
+              <a:buNone/>
+            </a:pPr>
+            <a:r>
+              <a:rPr lang="en-US" sz="800" dirty="0">
                 <a:solidFill>
                   <a:srgbClr val="FFD644"/>
                 </a:solidFill>
@@ -3101,9 +3101,9 @@
                 <a:ea typeface="Microsoft JhengHei" pitchFamily="34" charset="-122"/>
                 <a:cs typeface="Microsoft JhengHei" pitchFamily="34" charset="-120"/>
               </a:rPr>
-              <a:t>com.google.android.as</a:t>
-            </a:r>
-            <a:endParaRPr lang="en-US" sz="1000" dirty="0"/>
+              <a:t>com.google.android.gms</a:t>
+            </a:r>
+            <a:endParaRPr lang="en-US" sz="800" dirty="0"/>
           </a:p>
         </p:txBody>
       </p:sp>
@@ -3115,24 +3115,24 @@
         </p:nvSpPr>
         <p:spPr>
           <a:xfrm>
-            <a:off x="5486400" y="2212848"/>
-            <a:ext cx="731520" cy="365760"/>
-          </a:xfrm>
-          <a:prstGeom prst="rect">
-            <a:avLst/>
-          </a:prstGeom>
-          <a:noFill/>
-          <a:ln/>
-        </p:spPr>
-        <p:txBody>
-          <a:bodyPr wrap="square" rtlCol="0" anchor="ctr"/>
-          <a:lstStyle/>
-          <a:p>
-            <a:pPr indent="0" marL="0">
-              <a:buNone/>
-            </a:pPr>
-            <a:r>
-              <a:rPr lang="en-US" sz="1000" dirty="0">
+            <a:off x="5303520" y="1856232"/>
+            <a:ext cx="914400" cy="274320"/>
+          </a:xfrm>
+          <a:prstGeom prst="rect">
+            <a:avLst/>
+          </a:prstGeom>
+          <a:noFill/>
+          <a:ln/>
+        </p:spPr>
+        <p:txBody>
+          <a:bodyPr wrap="square" rtlCol="0" anchor="ctr"/>
+          <a:lstStyle/>
+          <a:p>
+            <a:pPr indent="0" marL="0">
+              <a:buNone/>
+            </a:pPr>
+            <a:r>
+              <a:rPr lang="en-US" sz="800" dirty="0">
                 <a:solidFill>
                   <a:srgbClr val="FFD644"/>
                 </a:solidFill>
@@ -3140,9 +3140,9 @@
                 <a:ea typeface="Consolas" pitchFamily="34" charset="-122"/>
                 <a:cs typeface="Consolas" pitchFamily="34" charset="-120"/>
               </a:rPr>
-              <a:t>BFGS</a:t>
-            </a:r>
-            <a:endParaRPr lang="en-US" sz="1000" dirty="0"/>
+              <a:t>vis BTOP</a:t>
+            </a:r>
+            <a:endParaRPr lang="en-US" sz="800" dirty="0"/>
           </a:p>
         </p:txBody>
       </p:sp>
@@ -3154,24 +3154,24 @@
         </p:nvSpPr>
         <p:spPr>
           <a:xfrm>
-            <a:off x="6400800" y="2212848"/>
-            <a:ext cx="5212080" cy="365760"/>
-          </a:xfrm>
-          <a:prstGeom prst="rect">
-            <a:avLst/>
-          </a:prstGeom>
-          <a:noFill/>
-          <a:ln/>
-        </p:spPr>
-        <p:txBody>
-          <a:bodyPr wrap="square" rtlCol="0" anchor="ctr"/>
-          <a:lstStyle/>
-          <a:p>
-            <a:pPr indent="0" marL="0">
-              <a:buNone/>
-            </a:pPr>
-            <a:r>
-              <a:rPr lang="en-US" sz="1000" dirty="0">
+            <a:off x="6309360" y="1856232"/>
+            <a:ext cx="5212080" cy="274320"/>
+          </a:xfrm>
+          <a:prstGeom prst="rect">
+            <a:avLst/>
+          </a:prstGeom>
+          <a:noFill/>
+          <a:ln/>
+        </p:spPr>
+        <p:txBody>
+          <a:bodyPr wrap="square" rtlCol="0" anchor="ctr"/>
+          <a:lstStyle/>
+          <a:p>
+            <a:pPr indent="0" marL="0">
+              <a:buNone/>
+            </a:pPr>
+            <a:r>
+              <a:rPr lang="en-US" sz="900" dirty="0">
                 <a:solidFill>
                   <a:srgbClr val="E0E0E6"/>
                 </a:solidFill>
@@ -3179,9 +3179,9 @@
                 <a:ea typeface="Microsoft JhengHei" pitchFamily="34" charset="-122"/>
                 <a:cs typeface="Microsoft JhengHei" pitchFamily="34" charset="-120"/>
               </a:rPr>
-              <a:t>AI 智慧服務 — 背景前景服務</a:t>
-            </a:r>
-            <a:endParaRPr lang="en-US" sz="1000" dirty="0"/>
+              <a:t>Google Play Services — 可見背景服務，先被殺</a:t>
+            </a:r>
+            <a:endParaRPr lang="en-US" sz="900" dirty="0"/>
           </a:p>
         </p:txBody>
       </p:sp>
@@ -3193,34 +3193,34 @@
         </p:nvSpPr>
         <p:spPr>
           <a:xfrm>
-            <a:off x="731520" y="2779776"/>
-            <a:ext cx="1371600" cy="365760"/>
-          </a:xfrm>
-          <a:prstGeom prst="rect">
-            <a:avLst/>
-          </a:prstGeom>
-          <a:noFill/>
-          <a:ln/>
-        </p:spPr>
-        <p:txBody>
-          <a:bodyPr wrap="square" rtlCol="0" anchor="ctr"/>
-          <a:lstStyle/>
-          <a:p>
-            <a:pPr indent="0" marL="0">
-              <a:buNone/>
-            </a:pPr>
-            <a:r>
-              <a:rPr lang="en-US" sz="1000" dirty="0">
-                <a:solidFill>
-                  <a:srgbClr val="FFD644"/>
+            <a:off x="731520" y="2203704"/>
+            <a:ext cx="640080" cy="274320"/>
+          </a:xfrm>
+          <a:prstGeom prst="rect">
+            <a:avLst/>
+          </a:prstGeom>
+          <a:noFill/>
+          <a:ln/>
+        </p:spPr>
+        <p:txBody>
+          <a:bodyPr wrap="square" rtlCol="0" anchor="ctr"/>
+          <a:lstStyle/>
+          <a:p>
+            <a:pPr indent="0" marL="0">
+              <a:buNone/>
+            </a:pPr>
+            <a:r>
+              <a:rPr lang="en-US" sz="800" dirty="0">
+                <a:solidFill>
+                  <a:srgbClr val="8B8FA3"/>
                 </a:solidFill>
                 <a:latin typeface="Consolas" pitchFamily="34" charset="0"/>
                 <a:ea typeface="Consolas" pitchFamily="34" charset="-122"/>
                 <a:cs typeface="Consolas" pitchFamily="34" charset="-120"/>
               </a:rPr>
-              <a:t>15:44:47.629</a:t>
-            </a:r>
-            <a:endParaRPr lang="en-US" sz="1000" dirty="0"/>
+              <a:t>14977</a:t>
+            </a:r>
+            <a:endParaRPr lang="en-US" sz="800" dirty="0"/>
           </a:p>
         </p:txBody>
       </p:sp>
@@ -3232,34 +3232,34 @@
         </p:nvSpPr>
         <p:spPr>
           <a:xfrm>
-            <a:off x="2103120" y="2779776"/>
-            <a:ext cx="640080" cy="365760"/>
-          </a:xfrm>
-          <a:prstGeom prst="rect">
-            <a:avLst/>
-          </a:prstGeom>
-          <a:noFill/>
-          <a:ln/>
-        </p:spPr>
-        <p:txBody>
-          <a:bodyPr wrap="square" rtlCol="0" anchor="ctr"/>
-          <a:lstStyle/>
-          <a:p>
-            <a:pPr indent="0" marL="0">
-              <a:buNone/>
-            </a:pPr>
-            <a:r>
-              <a:rPr lang="en-US" sz="1000" dirty="0">
-                <a:solidFill>
-                  <a:srgbClr val="8B8FA3"/>
+            <a:off x="1371600" y="2203704"/>
+            <a:ext cx="1371600" cy="274320"/>
+          </a:xfrm>
+          <a:prstGeom prst="rect">
+            <a:avLst/>
+          </a:prstGeom>
+          <a:noFill/>
+          <a:ln/>
+        </p:spPr>
+        <p:txBody>
+          <a:bodyPr wrap="square" rtlCol="0" anchor="ctr"/>
+          <a:lstStyle/>
+          <a:p>
+            <a:pPr indent="0" marL="0">
+              <a:buNone/>
+            </a:pPr>
+            <a:r>
+              <a:rPr lang="en-US" sz="800" dirty="0">
+                <a:solidFill>
+                  <a:srgbClr val="FFD644"/>
                 </a:solidFill>
                 <a:latin typeface="Consolas" pitchFamily="34" charset="0"/>
                 <a:ea typeface="Consolas" pitchFamily="34" charset="-122"/>
                 <a:cs typeface="Consolas" pitchFamily="34" charset="-120"/>
               </a:rPr>
-              <a:t>14987</a:t>
-            </a:r>
-            <a:endParaRPr lang="en-US" sz="1000" dirty="0"/>
+              <a:t>oom_reaper</a:t>
+            </a:r>
+            <a:endParaRPr lang="en-US" sz="800" dirty="0"/>
           </a:p>
         </p:txBody>
       </p:sp>
@@ -3271,24 +3271,24 @@
         </p:nvSpPr>
         <p:spPr>
           <a:xfrm>
-            <a:off x="2743200" y="2779776"/>
-            <a:ext cx="2743200" cy="365760"/>
-          </a:xfrm>
-          <a:prstGeom prst="rect">
-            <a:avLst/>
-          </a:prstGeom>
-          <a:noFill/>
-          <a:ln/>
-        </p:spPr>
-        <p:txBody>
-          <a:bodyPr wrap="square" rtlCol="0" anchor="ctr"/>
-          <a:lstStyle/>
-          <a:p>
-            <a:pPr indent="0" marL="0">
-              <a:buNone/>
-            </a:pPr>
-            <a:r>
-              <a:rPr lang="en-US" sz="1000" dirty="0">
+            <a:off x="2743200" y="2203704"/>
+            <a:ext cx="2560320" cy="274320"/>
+          </a:xfrm>
+          <a:prstGeom prst="rect">
+            <a:avLst/>
+          </a:prstGeom>
+          <a:noFill/>
+          <a:ln/>
+        </p:spPr>
+        <p:txBody>
+          <a:bodyPr wrap="square" rtlCol="0" anchor="ctr"/>
+          <a:lstStyle/>
+          <a:p>
+            <a:pPr indent="0" marL="0">
+              <a:buNone/>
+            </a:pPr>
+            <a:r>
+              <a:rPr lang="en-US" sz="800" dirty="0">
                 <a:solidFill>
                   <a:srgbClr val="FFD644"/>
                 </a:solidFill>
@@ -3296,9 +3296,9 @@
                 <a:ea typeface="Microsoft JhengHei" pitchFamily="34" charset="-122"/>
                 <a:cs typeface="Microsoft JhengHei" pitchFamily="34" charset="-120"/>
               </a:rPr>
-              <a:t>android.ext.services</a:t>
-            </a:r>
-            <a:endParaRPr lang="en-US" sz="1000" dirty="0"/>
+              <a:t>com.google.android.as</a:t>
+            </a:r>
+            <a:endParaRPr lang="en-US" sz="800" dirty="0"/>
           </a:p>
         </p:txBody>
       </p:sp>
@@ -3310,24 +3310,24 @@
         </p:nvSpPr>
         <p:spPr>
           <a:xfrm>
-            <a:off x="5486400" y="2779776"/>
-            <a:ext cx="731520" cy="365760"/>
-          </a:xfrm>
-          <a:prstGeom prst="rect">
-            <a:avLst/>
-          </a:prstGeom>
-          <a:noFill/>
-          <a:ln/>
-        </p:spPr>
-        <p:txBody>
-          <a:bodyPr wrap="square" rtlCol="0" anchor="ctr"/>
-          <a:lstStyle/>
-          <a:p>
-            <a:pPr indent="0" marL="0">
-              <a:buNone/>
-            </a:pPr>
-            <a:r>
-              <a:rPr lang="en-US" sz="1000" dirty="0">
+            <a:off x="5303520" y="2203704"/>
+            <a:ext cx="914400" cy="274320"/>
+          </a:xfrm>
+          <a:prstGeom prst="rect">
+            <a:avLst/>
+          </a:prstGeom>
+          <a:noFill/>
+          <a:ln/>
+        </p:spPr>
+        <p:txBody>
+          <a:bodyPr wrap="square" rtlCol="0" anchor="ctr"/>
+          <a:lstStyle/>
+          <a:p>
+            <a:pPr indent="0" marL="0">
+              <a:buNone/>
+            </a:pPr>
+            <a:r>
+              <a:rPr lang="en-US" sz="800" dirty="0">
                 <a:solidFill>
                   <a:srgbClr val="FFD644"/>
                 </a:solidFill>
@@ -3335,9 +3335,9 @@
                 <a:ea typeface="Consolas" pitchFamily="34" charset="-122"/>
                 <a:cs typeface="Consolas" pitchFamily="34" charset="-120"/>
               </a:rPr>
-              <a:t>BFGS</a:t>
-            </a:r>
-            <a:endParaRPr lang="en-US" sz="1000" dirty="0"/>
+              <a:t>vis BFGS</a:t>
+            </a:r>
+            <a:endParaRPr lang="en-US" sz="800" dirty="0"/>
           </a:p>
         </p:txBody>
       </p:sp>
@@ -3349,24 +3349,24 @@
         </p:nvSpPr>
         <p:spPr>
           <a:xfrm>
-            <a:off x="6400800" y="2779776"/>
-            <a:ext cx="5212080" cy="365760"/>
-          </a:xfrm>
-          <a:prstGeom prst="rect">
-            <a:avLst/>
-          </a:prstGeom>
-          <a:noFill/>
-          <a:ln/>
-        </p:spPr>
-        <p:txBody>
-          <a:bodyPr wrap="square" rtlCol="0" anchor="ctr"/>
-          <a:lstStyle/>
-          <a:p>
-            <a:pPr indent="0" marL="0">
-              <a:buNone/>
-            </a:pPr>
-            <a:r>
-              <a:rPr lang="en-US" sz="1000" dirty="0">
+            <a:off x="6309360" y="2203704"/>
+            <a:ext cx="5212080" cy="274320"/>
+          </a:xfrm>
+          <a:prstGeom prst="rect">
+            <a:avLst/>
+          </a:prstGeom>
+          <a:noFill/>
+          <a:ln/>
+        </p:spPr>
+        <p:txBody>
+          <a:bodyPr wrap="square" rtlCol="0" anchor="ctr"/>
+          <a:lstStyle/>
+          <a:p>
+            <a:pPr indent="0" marL="0">
+              <a:buNone/>
+            </a:pPr>
+            <a:r>
+              <a:rPr lang="en-US" sz="900" dirty="0">
                 <a:solidFill>
                   <a:srgbClr val="E0E0E6"/>
                 </a:solidFill>
@@ -3374,9 +3374,9 @@
                 <a:ea typeface="Microsoft JhengHei" pitchFamily="34" charset="-122"/>
                 <a:cs typeface="Microsoft JhengHei" pitchFamily="34" charset="-120"/>
               </a:rPr>
-              <a:t>通知助手 — 背景服務</a:t>
-            </a:r>
-            <a:endParaRPr lang="en-US" sz="1000" dirty="0"/>
+              <a:t>AI 智慧服務</a:t>
+            </a:r>
+            <a:endParaRPr lang="en-US" sz="900" dirty="0"/>
           </a:p>
         </p:txBody>
       </p:sp>
@@ -3388,34 +3388,34 @@
         </p:nvSpPr>
         <p:spPr>
           <a:xfrm>
-            <a:off x="731520" y="3346704"/>
-            <a:ext cx="1371600" cy="365760"/>
-          </a:xfrm>
-          <a:prstGeom prst="rect">
-            <a:avLst/>
-          </a:prstGeom>
-          <a:noFill/>
-          <a:ln/>
-        </p:spPr>
-        <p:txBody>
-          <a:bodyPr wrap="square" rtlCol="0" anchor="ctr"/>
-          <a:lstStyle/>
-          <a:p>
-            <a:pPr indent="0" marL="0">
-              <a:buNone/>
-            </a:pPr>
-            <a:r>
-              <a:rPr lang="en-US" sz="1000" dirty="0">
-                <a:solidFill>
-                  <a:srgbClr val="FFD644"/>
+            <a:off x="731520" y="2551176"/>
+            <a:ext cx="640080" cy="274320"/>
+          </a:xfrm>
+          <a:prstGeom prst="rect">
+            <a:avLst/>
+          </a:prstGeom>
+          <a:noFill/>
+          <a:ln/>
+        </p:spPr>
+        <p:txBody>
+          <a:bodyPr wrap="square" rtlCol="0" anchor="ctr"/>
+          <a:lstStyle/>
+          <a:p>
+            <a:pPr indent="0" marL="0">
+              <a:buNone/>
+            </a:pPr>
+            <a:r>
+              <a:rPr lang="en-US" sz="800" dirty="0">
+                <a:solidFill>
+                  <a:srgbClr val="8B8FA3"/>
                 </a:solidFill>
                 <a:latin typeface="Consolas" pitchFamily="34" charset="0"/>
                 <a:ea typeface="Consolas" pitchFamily="34" charset="-122"/>
                 <a:cs typeface="Consolas" pitchFamily="34" charset="-120"/>
               </a:rPr>
-              <a:t>15:44:47.685</a:t>
-            </a:r>
-            <a:endParaRPr lang="en-US" sz="1000" dirty="0"/>
+              <a:t>14987</a:t>
+            </a:r>
+            <a:endParaRPr lang="en-US" sz="800" dirty="0"/>
           </a:p>
         </p:txBody>
       </p:sp>
@@ -3427,34 +3427,34 @@
         </p:nvSpPr>
         <p:spPr>
           <a:xfrm>
-            <a:off x="2103120" y="3346704"/>
-            <a:ext cx="640080" cy="365760"/>
-          </a:xfrm>
-          <a:prstGeom prst="rect">
-            <a:avLst/>
-          </a:prstGeom>
-          <a:noFill/>
-          <a:ln/>
-        </p:spPr>
-        <p:txBody>
-          <a:bodyPr wrap="square" rtlCol="0" anchor="ctr"/>
-          <a:lstStyle/>
-          <a:p>
-            <a:pPr indent="0" marL="0">
-              <a:buNone/>
-            </a:pPr>
-            <a:r>
-              <a:rPr lang="en-US" sz="1000" dirty="0">
-                <a:solidFill>
-                  <a:srgbClr val="8B8FA3"/>
+            <a:off x="1371600" y="2551176"/>
+            <a:ext cx="1371600" cy="274320"/>
+          </a:xfrm>
+          <a:prstGeom prst="rect">
+            <a:avLst/>
+          </a:prstGeom>
+          <a:noFill/>
+          <a:ln/>
+        </p:spPr>
+        <p:txBody>
+          <a:bodyPr wrap="square" rtlCol="0" anchor="ctr"/>
+          <a:lstStyle/>
+          <a:p>
+            <a:pPr indent="0" marL="0">
+              <a:buNone/>
+            </a:pPr>
+            <a:r>
+              <a:rPr lang="en-US" sz="800" dirty="0">
+                <a:solidFill>
+                  <a:srgbClr val="FFD644"/>
                 </a:solidFill>
                 <a:latin typeface="Consolas" pitchFamily="34" charset="0"/>
                 <a:ea typeface="Consolas" pitchFamily="34" charset="-122"/>
                 <a:cs typeface="Consolas" pitchFamily="34" charset="-120"/>
               </a:rPr>
-              <a:t>14997</a:t>
-            </a:r>
-            <a:endParaRPr lang="en-US" sz="1000" dirty="0"/>
+              <a:t>oom_reaper</a:t>
+            </a:r>
+            <a:endParaRPr lang="en-US" sz="800" dirty="0"/>
           </a:p>
         </p:txBody>
       </p:sp>
@@ -3466,24 +3466,24 @@
         </p:nvSpPr>
         <p:spPr>
           <a:xfrm>
-            <a:off x="2743200" y="3346704"/>
-            <a:ext cx="2743200" cy="365760"/>
-          </a:xfrm>
-          <a:prstGeom prst="rect">
-            <a:avLst/>
-          </a:prstGeom>
-          <a:noFill/>
-          <a:ln/>
-        </p:spPr>
-        <p:txBody>
-          <a:bodyPr wrap="square" rtlCol="0" anchor="ctr"/>
-          <a:lstStyle/>
-          <a:p>
-            <a:pPr indent="0" marL="0">
-              <a:buNone/>
-            </a:pPr>
-            <a:r>
-              <a:rPr lang="en-US" sz="1000" dirty="0">
+            <a:off x="2743200" y="2551176"/>
+            <a:ext cx="2560320" cy="274320"/>
+          </a:xfrm>
+          <a:prstGeom prst="rect">
+            <a:avLst/>
+          </a:prstGeom>
+          <a:noFill/>
+          <a:ln/>
+        </p:spPr>
+        <p:txBody>
+          <a:bodyPr wrap="square" rtlCol="0" anchor="ctr"/>
+          <a:lstStyle/>
+          <a:p>
+            <a:pPr indent="0" marL="0">
+              <a:buNone/>
+            </a:pPr>
+            <a:r>
+              <a:rPr lang="en-US" sz="800" dirty="0">
                 <a:solidFill>
                   <a:srgbClr val="FFD644"/>
                 </a:solidFill>
@@ -3491,9 +3491,9 @@
                 <a:ea typeface="Microsoft JhengHei" pitchFamily="34" charset="-122"/>
                 <a:cs typeface="Microsoft JhengHei" pitchFamily="34" charset="-120"/>
               </a:rPr>
-              <a:t>googlequicksearchbox</a:t>
-            </a:r>
-            <a:endParaRPr lang="en-US" sz="1000" dirty="0"/>
+              <a:t>android.ext.services</a:t>
+            </a:r>
+            <a:endParaRPr lang="en-US" sz="800" dirty="0"/>
           </a:p>
         </p:txBody>
       </p:sp>
@@ -3505,24 +3505,24 @@
         </p:nvSpPr>
         <p:spPr>
           <a:xfrm>
-            <a:off x="5486400" y="3346704"/>
-            <a:ext cx="731520" cy="365760"/>
-          </a:xfrm>
-          <a:prstGeom prst="rect">
-            <a:avLst/>
-          </a:prstGeom>
-          <a:noFill/>
-          <a:ln/>
-        </p:spPr>
-        <p:txBody>
-          <a:bodyPr wrap="square" rtlCol="0" anchor="ctr"/>
-          <a:lstStyle/>
-          <a:p>
-            <a:pPr indent="0" marL="0">
-              <a:buNone/>
-            </a:pPr>
-            <a:r>
-              <a:rPr lang="en-US" sz="1000" dirty="0">
+            <a:off x="5303520" y="2551176"/>
+            <a:ext cx="914400" cy="274320"/>
+          </a:xfrm>
+          <a:prstGeom prst="rect">
+            <a:avLst/>
+          </a:prstGeom>
+          <a:noFill/>
+          <a:ln/>
+        </p:spPr>
+        <p:txBody>
+          <a:bodyPr wrap="square" rtlCol="0" anchor="ctr"/>
+          <a:lstStyle/>
+          <a:p>
+            <a:pPr indent="0" marL="0">
+              <a:buNone/>
+            </a:pPr>
+            <a:r>
+              <a:rPr lang="en-US" sz="800" dirty="0">
                 <a:solidFill>
                   <a:srgbClr val="FFD644"/>
                 </a:solidFill>
@@ -3530,9 +3530,9 @@
                 <a:ea typeface="Consolas" pitchFamily="34" charset="-122"/>
                 <a:cs typeface="Consolas" pitchFamily="34" charset="-120"/>
               </a:rPr>
-              <a:t>BFGS</a:t>
-            </a:r>
-            <a:endParaRPr lang="en-US" sz="1000" dirty="0"/>
+              <a:t>vis BFGS</a:t>
+            </a:r>
+            <a:endParaRPr lang="en-US" sz="800" dirty="0"/>
           </a:p>
         </p:txBody>
       </p:sp>
@@ -3544,24 +3544,24 @@
         </p:nvSpPr>
         <p:spPr>
           <a:xfrm>
-            <a:off x="6400800" y="3346704"/>
-            <a:ext cx="5212080" cy="365760"/>
-          </a:xfrm>
-          <a:prstGeom prst="rect">
-            <a:avLst/>
-          </a:prstGeom>
-          <a:noFill/>
-          <a:ln/>
-        </p:spPr>
-        <p:txBody>
-          <a:bodyPr wrap="square" rtlCol="0" anchor="ctr"/>
-          <a:lstStyle/>
-          <a:p>
-            <a:pPr indent="0" marL="0">
-              <a:buNone/>
-            </a:pPr>
-            <a:r>
-              <a:rPr lang="en-US" sz="1000" dirty="0">
+            <a:off x="6309360" y="2551176"/>
+            <a:ext cx="5212080" cy="274320"/>
+          </a:xfrm>
+          <a:prstGeom prst="rect">
+            <a:avLst/>
+          </a:prstGeom>
+          <a:noFill/>
+          <a:ln/>
+        </p:spPr>
+        <p:txBody>
+          <a:bodyPr wrap="square" rtlCol="0" anchor="ctr"/>
+          <a:lstStyle/>
+          <a:p>
+            <a:pPr indent="0" marL="0">
+              <a:buNone/>
+            </a:pPr>
+            <a:r>
+              <a:rPr lang="en-US" sz="900" dirty="0">
                 <a:solidFill>
                   <a:srgbClr val="E0E0E6"/>
                 </a:solidFill>
@@ -3569,9 +3569,9 @@
                 <a:ea typeface="Microsoft JhengHei" pitchFamily="34" charset="-122"/>
                 <a:cs typeface="Microsoft JhengHei" pitchFamily="34" charset="-120"/>
               </a:rPr>
-              <a:t>Google 語音互動 — 背景服務</a:t>
-            </a:r>
-            <a:endParaRPr lang="en-US" sz="1000" dirty="0"/>
+              <a:t>通知助手</a:t>
+            </a:r>
+            <a:endParaRPr lang="en-US" sz="900" dirty="0"/>
           </a:p>
         </p:txBody>
       </p:sp>
@@ -3583,34 +3583,34 @@
         </p:nvSpPr>
         <p:spPr>
           <a:xfrm>
-            <a:off x="731520" y="3913632"/>
-            <a:ext cx="1371600" cy="365760"/>
-          </a:xfrm>
-          <a:prstGeom prst="rect">
-            <a:avLst/>
-          </a:prstGeom>
-          <a:noFill/>
-          <a:ln/>
-        </p:spPr>
-        <p:txBody>
-          <a:bodyPr wrap="square" rtlCol="0" anchor="ctr"/>
-          <a:lstStyle/>
-          <a:p>
-            <a:pPr indent="0" marL="0">
-              <a:buNone/>
-            </a:pPr>
-            <a:r>
-              <a:rPr lang="en-US" sz="1000" dirty="0">
-                <a:solidFill>
-                  <a:srgbClr val="FFAA44"/>
+            <a:off x="731520" y="2898648"/>
+            <a:ext cx="640080" cy="274320"/>
+          </a:xfrm>
+          <a:prstGeom prst="rect">
+            <a:avLst/>
+          </a:prstGeom>
+          <a:noFill/>
+          <a:ln/>
+        </p:spPr>
+        <p:txBody>
+          <a:bodyPr wrap="square" rtlCol="0" anchor="ctr"/>
+          <a:lstStyle/>
+          <a:p>
+            <a:pPr indent="0" marL="0">
+              <a:buNone/>
+            </a:pPr>
+            <a:r>
+              <a:rPr lang="en-US" sz="800" dirty="0">
+                <a:solidFill>
+                  <a:srgbClr val="8B8FA3"/>
                 </a:solidFill>
                 <a:latin typeface="Consolas" pitchFamily="34" charset="0"/>
                 <a:ea typeface="Consolas" pitchFamily="34" charset="-122"/>
                 <a:cs typeface="Consolas" pitchFamily="34" charset="-120"/>
               </a:rPr>
-              <a:t>15:44:47.714</a:t>
-            </a:r>
-            <a:endParaRPr lang="en-US" sz="1000" dirty="0"/>
+              <a:t>14997</a:t>
+            </a:r>
+            <a:endParaRPr lang="en-US" sz="800" dirty="0"/>
           </a:p>
         </p:txBody>
       </p:sp>
@@ -3622,34 +3622,34 @@
         </p:nvSpPr>
         <p:spPr>
           <a:xfrm>
-            <a:off x="2103120" y="3913632"/>
-            <a:ext cx="640080" cy="365760"/>
-          </a:xfrm>
-          <a:prstGeom prst="rect">
-            <a:avLst/>
-          </a:prstGeom>
-          <a:noFill/>
-          <a:ln/>
-        </p:spPr>
-        <p:txBody>
-          <a:bodyPr wrap="square" rtlCol="0" anchor="ctr"/>
-          <a:lstStyle/>
-          <a:p>
-            <a:pPr indent="0" marL="0">
-              <a:buNone/>
-            </a:pPr>
-            <a:r>
-              <a:rPr lang="en-US" sz="1000" dirty="0">
-                <a:solidFill>
-                  <a:srgbClr val="8B8FA3"/>
+            <a:off x="1371600" y="2898648"/>
+            <a:ext cx="1371600" cy="274320"/>
+          </a:xfrm>
+          <a:prstGeom prst="rect">
+            <a:avLst/>
+          </a:prstGeom>
+          <a:noFill/>
+          <a:ln/>
+        </p:spPr>
+        <p:txBody>
+          <a:bodyPr wrap="square" rtlCol="0" anchor="ctr"/>
+          <a:lstStyle/>
+          <a:p>
+            <a:pPr indent="0" marL="0">
+              <a:buNone/>
+            </a:pPr>
+            <a:r>
+              <a:rPr lang="en-US" sz="800" dirty="0">
+                <a:solidFill>
+                  <a:srgbClr val="FFD644"/>
                 </a:solidFill>
                 <a:latin typeface="Consolas" pitchFamily="34" charset="0"/>
                 <a:ea typeface="Consolas" pitchFamily="34" charset="-122"/>
                 <a:cs typeface="Consolas" pitchFamily="34" charset="-120"/>
               </a:rPr>
-              <a:t>15001</a:t>
-            </a:r>
-            <a:endParaRPr lang="en-US" sz="1000" dirty="0"/>
+              <a:t>oom_reaper</a:t>
+            </a:r>
+            <a:endParaRPr lang="en-US" sz="800" dirty="0"/>
           </a:p>
         </p:txBody>
       </p:sp>
@@ -3661,34 +3661,34 @@
         </p:nvSpPr>
         <p:spPr>
           <a:xfrm>
-            <a:off x="2743200" y="3913632"/>
-            <a:ext cx="2743200" cy="365760"/>
-          </a:xfrm>
-          <a:prstGeom prst="rect">
-            <a:avLst/>
-          </a:prstGeom>
-          <a:noFill/>
-          <a:ln/>
-        </p:spPr>
-        <p:txBody>
-          <a:bodyPr wrap="square" rtlCol="0" anchor="ctr"/>
-          <a:lstStyle/>
-          <a:p>
-            <a:pPr indent="0" marL="0">
-              <a:buNone/>
-            </a:pPr>
-            <a:r>
-              <a:rPr lang="en-US" sz="1000" dirty="0">
-                <a:solidFill>
-                  <a:srgbClr val="FFAA44"/>
+            <a:off x="2743200" y="2898648"/>
+            <a:ext cx="2560320" cy="274320"/>
+          </a:xfrm>
+          <a:prstGeom prst="rect">
+            <a:avLst/>
+          </a:prstGeom>
+          <a:noFill/>
+          <a:ln/>
+        </p:spPr>
+        <p:txBody>
+          <a:bodyPr wrap="square" rtlCol="0" anchor="ctr"/>
+          <a:lstStyle/>
+          <a:p>
+            <a:pPr indent="0" marL="0">
+              <a:buNone/>
+            </a:pPr>
+            <a:r>
+              <a:rPr lang="en-US" sz="800" dirty="0">
+                <a:solidFill>
+                  <a:srgbClr val="FFD644"/>
                 </a:solidFill>
                 <a:latin typeface="Microsoft JhengHei" pitchFamily="34" charset="0"/>
                 <a:ea typeface="Microsoft JhengHei" pitchFamily="34" charset="-122"/>
                 <a:cs typeface="Microsoft JhengHei" pitchFamily="34" charset="-120"/>
               </a:rPr>
-              <a:t>com.android.launcher3</a:t>
-            </a:r>
-            <a:endParaRPr lang="en-US" sz="1000" dirty="0"/>
+              <a:t>googlequicksearchbox</a:t>
+            </a:r>
+            <a:endParaRPr lang="en-US" sz="800" dirty="0"/>
           </a:p>
         </p:txBody>
       </p:sp>
@@ -3700,34 +3700,34 @@
         </p:nvSpPr>
         <p:spPr>
           <a:xfrm>
-            <a:off x="5486400" y="3913632"/>
-            <a:ext cx="731520" cy="365760"/>
-          </a:xfrm>
-          <a:prstGeom prst="rect">
-            <a:avLst/>
-          </a:prstGeom>
-          <a:noFill/>
-          <a:ln/>
-        </p:spPr>
-        <p:txBody>
-          <a:bodyPr wrap="square" rtlCol="0" anchor="ctr"/>
-          <a:lstStyle/>
-          <a:p>
-            <a:pPr indent="0" marL="0">
-              <a:buNone/>
-            </a:pPr>
-            <a:r>
-              <a:rPr lang="en-US" sz="1000" dirty="0">
-                <a:solidFill>
-                  <a:srgbClr val="FFAA44"/>
+            <a:off x="5303520" y="2898648"/>
+            <a:ext cx="914400" cy="274320"/>
+          </a:xfrm>
+          <a:prstGeom prst="rect">
+            <a:avLst/>
+          </a:prstGeom>
+          <a:noFill/>
+          <a:ln/>
+        </p:spPr>
+        <p:txBody>
+          <a:bodyPr wrap="square" rtlCol="0" anchor="ctr"/>
+          <a:lstStyle/>
+          <a:p>
+            <a:pPr indent="0" marL="0">
+              <a:buNone/>
+            </a:pPr>
+            <a:r>
+              <a:rPr lang="en-US" sz="800" dirty="0">
+                <a:solidFill>
+                  <a:srgbClr val="FFD644"/>
                 </a:solidFill>
                 <a:latin typeface="Consolas" pitchFamily="34" charset="0"/>
                 <a:ea typeface="Consolas" pitchFamily="34" charset="-122"/>
                 <a:cs typeface="Consolas" pitchFamily="34" charset="-120"/>
               </a:rPr>
-              <a:t>BFGS</a:t>
-            </a:r>
-            <a:endParaRPr lang="en-US" sz="1000" dirty="0"/>
+              <a:t>vis BFGS</a:t>
+            </a:r>
+            <a:endParaRPr lang="en-US" sz="800" dirty="0"/>
           </a:p>
         </p:txBody>
       </p:sp>
@@ -3739,24 +3739,24 @@
         </p:nvSpPr>
         <p:spPr>
           <a:xfrm>
-            <a:off x="6400800" y="3913632"/>
-            <a:ext cx="5212080" cy="365760"/>
-          </a:xfrm>
-          <a:prstGeom prst="rect">
-            <a:avLst/>
-          </a:prstGeom>
-          <a:noFill/>
-          <a:ln/>
-        </p:spPr>
-        <p:txBody>
-          <a:bodyPr wrap="square" rtlCol="0" anchor="ctr"/>
-          <a:lstStyle/>
-          <a:p>
-            <a:pPr indent="0" marL="0">
-              <a:buNone/>
-            </a:pPr>
-            <a:r>
-              <a:rPr lang="en-US" sz="1000" dirty="0">
+            <a:off x="6309360" y="2898648"/>
+            <a:ext cx="5212080" cy="274320"/>
+          </a:xfrm>
+          <a:prstGeom prst="rect">
+            <a:avLst/>
+          </a:prstGeom>
+          <a:noFill/>
+          <a:ln/>
+        </p:spPr>
+        <p:txBody>
+          <a:bodyPr wrap="square" rtlCol="0" anchor="ctr"/>
+          <a:lstStyle/>
+          <a:p>
+            <a:pPr indent="0" marL="0">
+              <a:buNone/>
+            </a:pPr>
+            <a:r>
+              <a:rPr lang="en-US" sz="900" dirty="0">
                 <a:solidFill>
                   <a:srgbClr val="E0E0E6"/>
                 </a:solidFill>
@@ -3764,9 +3764,9 @@
                 <a:ea typeface="Microsoft JhengHei" pitchFamily="34" charset="-122"/>
                 <a:cs typeface="Microsoft JhengHei" pitchFamily="34" charset="-120"/>
               </a:rPr>
-              <a:t>桌面 Launcher — 連桌面都殺了，代表已經很嚴重</a:t>
-            </a:r>
-            <a:endParaRPr lang="en-US" sz="1000" dirty="0"/>
+              <a:t>Google 語音互動</a:t>
+            </a:r>
+            <a:endParaRPr lang="en-US" sz="900" dirty="0"/>
           </a:p>
         </p:txBody>
       </p:sp>
@@ -3778,34 +3778,34 @@
         </p:nvSpPr>
         <p:spPr>
           <a:xfrm>
-            <a:off x="731520" y="4480560"/>
-            <a:ext cx="1371600" cy="365760"/>
-          </a:xfrm>
-          <a:prstGeom prst="rect">
-            <a:avLst/>
-          </a:prstGeom>
-          <a:noFill/>
-          <a:ln/>
-        </p:spPr>
-        <p:txBody>
-          <a:bodyPr wrap="square" rtlCol="0" anchor="ctr"/>
-          <a:lstStyle/>
-          <a:p>
-            <a:pPr indent="0" marL="0">
-              <a:buNone/>
-            </a:pPr>
-            <a:r>
-              <a:rPr lang="en-US" sz="1000" dirty="0">
-                <a:solidFill>
-                  <a:srgbClr val="FFAA44"/>
+            <a:off x="731520" y="3246120"/>
+            <a:ext cx="640080" cy="274320"/>
+          </a:xfrm>
+          <a:prstGeom prst="rect">
+            <a:avLst/>
+          </a:prstGeom>
+          <a:noFill/>
+          <a:ln/>
+        </p:spPr>
+        <p:txBody>
+          <a:bodyPr wrap="square" rtlCol="0" anchor="ctr"/>
+          <a:lstStyle/>
+          <a:p>
+            <a:pPr indent="0" marL="0">
+              <a:buNone/>
+            </a:pPr>
+            <a:r>
+              <a:rPr lang="en-US" sz="800" dirty="0">
+                <a:solidFill>
+                  <a:srgbClr val="8B8FA3"/>
                 </a:solidFill>
                 <a:latin typeface="Consolas" pitchFamily="34" charset="0"/>
                 <a:ea typeface="Consolas" pitchFamily="34" charset="-122"/>
                 <a:cs typeface="Consolas" pitchFamily="34" charset="-120"/>
               </a:rPr>
-              <a:t>15:44:47.809</a:t>
-            </a:r>
-            <a:endParaRPr lang="en-US" sz="1000" dirty="0"/>
+              <a:t>15001</a:t>
+            </a:r>
+            <a:endParaRPr lang="en-US" sz="800" dirty="0"/>
           </a:p>
         </p:txBody>
       </p:sp>
@@ -3817,34 +3817,34 @@
         </p:nvSpPr>
         <p:spPr>
           <a:xfrm>
-            <a:off x="2103120" y="4480560"/>
-            <a:ext cx="640080" cy="365760"/>
-          </a:xfrm>
-          <a:prstGeom prst="rect">
-            <a:avLst/>
-          </a:prstGeom>
-          <a:noFill/>
-          <a:ln/>
-        </p:spPr>
-        <p:txBody>
-          <a:bodyPr wrap="square" rtlCol="0" anchor="ctr"/>
-          <a:lstStyle/>
-          <a:p>
-            <a:pPr indent="0" marL="0">
-              <a:buNone/>
-            </a:pPr>
-            <a:r>
-              <a:rPr lang="en-US" sz="1000" dirty="0">
-                <a:solidFill>
-                  <a:srgbClr val="8B8FA3"/>
+            <a:off x="1371600" y="3246120"/>
+            <a:ext cx="1371600" cy="274320"/>
+          </a:xfrm>
+          <a:prstGeom prst="rect">
+            <a:avLst/>
+          </a:prstGeom>
+          <a:noFill/>
+          <a:ln/>
+        </p:spPr>
+        <p:txBody>
+          <a:bodyPr wrap="square" rtlCol="0" anchor="ctr"/>
+          <a:lstStyle/>
+          <a:p>
+            <a:pPr indent="0" marL="0">
+              <a:buNone/>
+            </a:pPr>
+            <a:r>
+              <a:rPr lang="en-US" sz="800" dirty="0">
+                <a:solidFill>
+                  <a:srgbClr val="FFAA44"/>
                 </a:solidFill>
                 <a:latin typeface="Consolas" pitchFamily="34" charset="0"/>
                 <a:ea typeface="Consolas" pitchFamily="34" charset="-122"/>
                 <a:cs typeface="Consolas" pitchFamily="34" charset="-120"/>
               </a:rPr>
-              <a:t>15016</a:t>
-            </a:r>
-            <a:endParaRPr lang="en-US" sz="1000" dirty="0"/>
+              <a:t>oom_reaper</a:t>
+            </a:r>
+            <a:endParaRPr lang="en-US" sz="800" dirty="0"/>
           </a:p>
         </p:txBody>
       </p:sp>
@@ -3856,24 +3856,24 @@
         </p:nvSpPr>
         <p:spPr>
           <a:xfrm>
-            <a:off x="2743200" y="4480560"/>
-            <a:ext cx="2743200" cy="365760"/>
-          </a:xfrm>
-          <a:prstGeom prst="rect">
-            <a:avLst/>
-          </a:prstGeom>
-          <a:noFill/>
-          <a:ln/>
-        </p:spPr>
-        <p:txBody>
-          <a:bodyPr wrap="square" rtlCol="0" anchor="ctr"/>
-          <a:lstStyle/>
-          <a:p>
-            <a:pPr indent="0" marL="0">
-              <a:buNone/>
-            </a:pPr>
-            <a:r>
-              <a:rPr lang="en-US" sz="1000" dirty="0">
+            <a:off x="2743200" y="3246120"/>
+            <a:ext cx="2560320" cy="274320"/>
+          </a:xfrm>
+          <a:prstGeom prst="rect">
+            <a:avLst/>
+          </a:prstGeom>
+          <a:noFill/>
+          <a:ln/>
+        </p:spPr>
+        <p:txBody>
+          <a:bodyPr wrap="square" rtlCol="0" anchor="ctr"/>
+          <a:lstStyle/>
+          <a:p>
+            <a:pPr indent="0" marL="0">
+              <a:buNone/>
+            </a:pPr>
+            <a:r>
+              <a:rPr lang="en-US" sz="800" dirty="0">
                 <a:solidFill>
                   <a:srgbClr val="FFAA44"/>
                 </a:solidFill>
@@ -3881,9 +3881,9 @@
                 <a:ea typeface="Microsoft JhengHei" pitchFamily="34" charset="-122"/>
                 <a:cs typeface="Microsoft JhengHei" pitchFamily="34" charset="-120"/>
               </a:rPr>
-              <a:t>com.android.smspush</a:t>
-            </a:r>
-            <a:endParaRPr lang="en-US" sz="1000" dirty="0"/>
+              <a:t>com.android.launcher3</a:t>
+            </a:r>
+            <a:endParaRPr lang="en-US" sz="800" dirty="0"/>
           </a:p>
         </p:txBody>
       </p:sp>
@@ -3895,24 +3895,24 @@
         </p:nvSpPr>
         <p:spPr>
           <a:xfrm>
-            <a:off x="5486400" y="4480560"/>
-            <a:ext cx="731520" cy="365760"/>
-          </a:xfrm>
-          <a:prstGeom prst="rect">
-            <a:avLst/>
-          </a:prstGeom>
-          <a:noFill/>
-          <a:ln/>
-        </p:spPr>
-        <p:txBody>
-          <a:bodyPr wrap="square" rtlCol="0" anchor="ctr"/>
-          <a:lstStyle/>
-          <a:p>
-            <a:pPr indent="0" marL="0">
-              <a:buNone/>
-            </a:pPr>
-            <a:r>
-              <a:rPr lang="en-US" sz="1000" dirty="0">
+            <a:off x="5303520" y="3246120"/>
+            <a:ext cx="914400" cy="274320"/>
+          </a:xfrm>
+          <a:prstGeom prst="rect">
+            <a:avLst/>
+          </a:prstGeom>
+          <a:noFill/>
+          <a:ln/>
+        </p:spPr>
+        <p:txBody>
+          <a:bodyPr wrap="square" rtlCol="0" anchor="ctr"/>
+          <a:lstStyle/>
+          <a:p>
+            <a:pPr indent="0" marL="0">
+              <a:buNone/>
+            </a:pPr>
+            <a:r>
+              <a:rPr lang="en-US" sz="800" dirty="0">
                 <a:solidFill>
                   <a:srgbClr val="FFAA44"/>
                 </a:solidFill>
@@ -3920,9 +3920,9 @@
                 <a:ea typeface="Consolas" pitchFamily="34" charset="-122"/>
                 <a:cs typeface="Consolas" pitchFamily="34" charset="-120"/>
               </a:rPr>
-              <a:t>IMPF</a:t>
-            </a:r>
-            <a:endParaRPr lang="en-US" sz="1000" dirty="0"/>
+              <a:t>vis BFGS</a:t>
+            </a:r>
+            <a:endParaRPr lang="en-US" sz="800" dirty="0"/>
           </a:p>
         </p:txBody>
       </p:sp>
@@ -3934,24 +3934,24 @@
         </p:nvSpPr>
         <p:spPr>
           <a:xfrm>
-            <a:off x="6400800" y="4480560"/>
-            <a:ext cx="5212080" cy="365760"/>
-          </a:xfrm>
-          <a:prstGeom prst="rect">
-            <a:avLst/>
-          </a:prstGeom>
-          <a:noFill/>
-          <a:ln/>
-        </p:spPr>
-        <p:txBody>
-          <a:bodyPr wrap="square" rtlCol="0" anchor="ctr"/>
-          <a:lstStyle/>
-          <a:p>
-            <a:pPr indent="0" marL="0">
-              <a:buNone/>
-            </a:pPr>
-            <a:r>
-              <a:rPr lang="en-US" sz="1000" dirty="0">
+            <a:off x="6309360" y="3246120"/>
+            <a:ext cx="5212080" cy="274320"/>
+          </a:xfrm>
+          <a:prstGeom prst="rect">
+            <a:avLst/>
+          </a:prstGeom>
+          <a:noFill/>
+          <a:ln/>
+        </p:spPr>
+        <p:txBody>
+          <a:bodyPr wrap="square" rtlCol="0" anchor="ctr"/>
+          <a:lstStyle/>
+          <a:p>
+            <a:pPr indent="0" marL="0">
+              <a:buNone/>
+            </a:pPr>
+            <a:r>
+              <a:rPr lang="en-US" sz="900" dirty="0">
                 <a:solidFill>
                   <a:srgbClr val="E0E0E6"/>
                 </a:solidFill>
@@ -3959,26 +3959,221 @@
                 <a:ea typeface="Microsoft JhengHei" pitchFamily="34" charset="-122"/>
                 <a:cs typeface="Microsoft JhengHei" pitchFamily="34" charset="-120"/>
               </a:rPr>
-              <a:t>簡訊推播 — 重要的前景服務也被殺</a:t>
-            </a:r>
-            <a:endParaRPr lang="en-US" sz="1000" dirty="0"/>
-          </a:p>
-        </p:txBody>
-      </p:sp>
-      <p:sp>
-        <p:nvSpPr>
-          <p:cNvPr id="40" name="Shape 38"/>
-          <p:cNvSpPr/>
-          <p:nvPr/>
-        </p:nvSpPr>
-        <p:spPr>
-          <a:xfrm>
-            <a:off x="594360" y="5001768"/>
-            <a:ext cx="10972800" cy="502920"/>
+              <a:t>桌面 Launcher — 連桌面都殺了 = 很嚴重</a:t>
+            </a:r>
+            <a:endParaRPr lang="en-US" sz="900" dirty="0"/>
+          </a:p>
+        </p:txBody>
+      </p:sp>
+      <p:sp>
+        <p:nvSpPr>
+          <p:cNvPr id="40" name="Text 38"/>
+          <p:cNvSpPr/>
+          <p:nvPr/>
+        </p:nvSpPr>
+        <p:spPr>
+          <a:xfrm>
+            <a:off x="731520" y="3593592"/>
+            <a:ext cx="640080" cy="274320"/>
+          </a:xfrm>
+          <a:prstGeom prst="rect">
+            <a:avLst/>
+          </a:prstGeom>
+          <a:noFill/>
+          <a:ln/>
+        </p:spPr>
+        <p:txBody>
+          <a:bodyPr wrap="square" rtlCol="0" anchor="ctr"/>
+          <a:lstStyle/>
+          <a:p>
+            <a:pPr indent="0" marL="0">
+              <a:buNone/>
+            </a:pPr>
+            <a:r>
+              <a:rPr lang="en-US" sz="800" dirty="0">
+                <a:solidFill>
+                  <a:srgbClr val="8B8FA3"/>
+                </a:solidFill>
+                <a:latin typeface="Consolas" pitchFamily="34" charset="0"/>
+                <a:ea typeface="Consolas" pitchFamily="34" charset="-122"/>
+                <a:cs typeface="Consolas" pitchFamily="34" charset="-120"/>
+              </a:rPr>
+              <a:t>15016</a:t>
+            </a:r>
+            <a:endParaRPr lang="en-US" sz="800" dirty="0"/>
+          </a:p>
+        </p:txBody>
+      </p:sp>
+      <p:sp>
+        <p:nvSpPr>
+          <p:cNvPr id="41" name="Text 39"/>
+          <p:cNvSpPr/>
+          <p:nvPr/>
+        </p:nvSpPr>
+        <p:spPr>
+          <a:xfrm>
+            <a:off x="1371600" y="3593592"/>
+            <a:ext cx="1371600" cy="274320"/>
+          </a:xfrm>
+          <a:prstGeom prst="rect">
+            <a:avLst/>
+          </a:prstGeom>
+          <a:noFill/>
+          <a:ln/>
+        </p:spPr>
+        <p:txBody>
+          <a:bodyPr wrap="square" rtlCol="0" anchor="ctr"/>
+          <a:lstStyle/>
+          <a:p>
+            <a:pPr indent="0" marL="0">
+              <a:buNone/>
+            </a:pPr>
+            <a:r>
+              <a:rPr lang="en-US" sz="800" dirty="0">
+                <a:solidFill>
+                  <a:srgbClr val="FFAA44"/>
+                </a:solidFill>
+                <a:latin typeface="Consolas" pitchFamily="34" charset="0"/>
+                <a:ea typeface="Consolas" pitchFamily="34" charset="-122"/>
+                <a:cs typeface="Consolas" pitchFamily="34" charset="-120"/>
+              </a:rPr>
+              <a:t>oom_reaper</a:t>
+            </a:r>
+            <a:endParaRPr lang="en-US" sz="800" dirty="0"/>
+          </a:p>
+        </p:txBody>
+      </p:sp>
+      <p:sp>
+        <p:nvSpPr>
+          <p:cNvPr id="42" name="Text 40"/>
+          <p:cNvSpPr/>
+          <p:nvPr/>
+        </p:nvSpPr>
+        <p:spPr>
+          <a:xfrm>
+            <a:off x="2743200" y="3593592"/>
+            <a:ext cx="2560320" cy="274320"/>
+          </a:xfrm>
+          <a:prstGeom prst="rect">
+            <a:avLst/>
+          </a:prstGeom>
+          <a:noFill/>
+          <a:ln/>
+        </p:spPr>
+        <p:txBody>
+          <a:bodyPr wrap="square" rtlCol="0" anchor="ctr"/>
+          <a:lstStyle/>
+          <a:p>
+            <a:pPr indent="0" marL="0">
+              <a:buNone/>
+            </a:pPr>
+            <a:r>
+              <a:rPr lang="en-US" sz="800" dirty="0">
+                <a:solidFill>
+                  <a:srgbClr val="FFAA44"/>
+                </a:solidFill>
+                <a:latin typeface="Microsoft JhengHei" pitchFamily="34" charset="0"/>
+                <a:ea typeface="Microsoft JhengHei" pitchFamily="34" charset="-122"/>
+                <a:cs typeface="Microsoft JhengHei" pitchFamily="34" charset="-120"/>
+              </a:rPr>
+              <a:t>com.android.smspush</a:t>
+            </a:r>
+            <a:endParaRPr lang="en-US" sz="800" dirty="0"/>
+          </a:p>
+        </p:txBody>
+      </p:sp>
+      <p:sp>
+        <p:nvSpPr>
+          <p:cNvPr id="43" name="Text 41"/>
+          <p:cNvSpPr/>
+          <p:nvPr/>
+        </p:nvSpPr>
+        <p:spPr>
+          <a:xfrm>
+            <a:off x="5303520" y="3593592"/>
+            <a:ext cx="914400" cy="274320"/>
+          </a:xfrm>
+          <a:prstGeom prst="rect">
+            <a:avLst/>
+          </a:prstGeom>
+          <a:noFill/>
+          <a:ln/>
+        </p:spPr>
+        <p:txBody>
+          <a:bodyPr wrap="square" rtlCol="0" anchor="ctr"/>
+          <a:lstStyle/>
+          <a:p>
+            <a:pPr indent="0" marL="0">
+              <a:buNone/>
+            </a:pPr>
+            <a:r>
+              <a:rPr lang="en-US" sz="800" dirty="0">
+                <a:solidFill>
+                  <a:srgbClr val="FFAA44"/>
+                </a:solidFill>
+                <a:latin typeface="Consolas" pitchFamily="34" charset="0"/>
+                <a:ea typeface="Consolas" pitchFamily="34" charset="-122"/>
+                <a:cs typeface="Consolas" pitchFamily="34" charset="-120"/>
+              </a:rPr>
+              <a:t>vis IMPF</a:t>
+            </a:r>
+            <a:endParaRPr lang="en-US" sz="800" dirty="0"/>
+          </a:p>
+        </p:txBody>
+      </p:sp>
+      <p:sp>
+        <p:nvSpPr>
+          <p:cNvPr id="44" name="Text 42"/>
+          <p:cNvSpPr/>
+          <p:nvPr/>
+        </p:nvSpPr>
+        <p:spPr>
+          <a:xfrm>
+            <a:off x="6309360" y="3593592"/>
+            <a:ext cx="5212080" cy="274320"/>
+          </a:xfrm>
+          <a:prstGeom prst="rect">
+            <a:avLst/>
+          </a:prstGeom>
+          <a:noFill/>
+          <a:ln/>
+        </p:spPr>
+        <p:txBody>
+          <a:bodyPr wrap="square" rtlCol="0" anchor="ctr"/>
+          <a:lstStyle/>
+          <a:p>
+            <a:pPr indent="0" marL="0">
+              <a:buNone/>
+            </a:pPr>
+            <a:r>
+              <a:rPr lang="en-US" sz="900" dirty="0">
+                <a:solidFill>
+                  <a:srgbClr val="E0E0E6"/>
+                </a:solidFill>
+                <a:latin typeface="Microsoft JhengHei" pitchFamily="34" charset="0"/>
+                <a:ea typeface="Microsoft JhengHei" pitchFamily="34" charset="-122"/>
+                <a:cs typeface="Microsoft JhengHei" pitchFamily="34" charset="-120"/>
+              </a:rPr>
+              <a:t>簡訊推播 — 重要前景服務也被殺</a:t>
+            </a:r>
+            <a:endParaRPr lang="en-US" sz="900" dirty="0"/>
+          </a:p>
+        </p:txBody>
+      </p:sp>
+      <p:sp>
+        <p:nvSpPr>
+          <p:cNvPr id="45" name="Shape 43"/>
+          <p:cNvSpPr/>
+          <p:nvPr/>
+        </p:nvSpPr>
+        <p:spPr>
+          <a:xfrm>
+            <a:off x="594360" y="3913632"/>
+            <a:ext cx="10972800" cy="329184"/>
           </a:xfrm>
           <a:prstGeom prst="roundRect">
             <a:avLst>
-              <a:gd name="adj" fmla="val 9091"/>
+              <a:gd name="adj" fmla="val 8333"/>
             </a:avLst>
           </a:prstGeom>
           <a:solidFill>
@@ -3989,30 +4184,30 @@
       </p:sp>
       <p:sp>
         <p:nvSpPr>
-          <p:cNvPr id="41" name="Text 39"/>
-          <p:cNvSpPr/>
-          <p:nvPr/>
-        </p:nvSpPr>
-        <p:spPr>
-          <a:xfrm>
-            <a:off x="731520" y="5047488"/>
-            <a:ext cx="1371600" cy="365760"/>
-          </a:xfrm>
-          <a:prstGeom prst="rect">
-            <a:avLst/>
-          </a:prstGeom>
-          <a:noFill/>
-          <a:ln/>
-        </p:spPr>
-        <p:txBody>
-          <a:bodyPr wrap="square" rtlCol="0" anchor="ctr"/>
-          <a:lstStyle/>
-          <a:p>
-            <a:pPr indent="0" marL="0">
-              <a:buNone/>
-            </a:pPr>
-            <a:r>
-              <a:rPr lang="en-US" sz="1000" b="1" dirty="0">
+          <p:cNvPr id="46" name="Text 44"/>
+          <p:cNvSpPr/>
+          <p:nvPr/>
+        </p:nvSpPr>
+        <p:spPr>
+          <a:xfrm>
+            <a:off x="731520" y="3941064"/>
+            <a:ext cx="640080" cy="274320"/>
+          </a:xfrm>
+          <a:prstGeom prst="rect">
+            <a:avLst/>
+          </a:prstGeom>
+          <a:noFill/>
+          <a:ln/>
+        </p:spPr>
+        <p:txBody>
+          <a:bodyPr wrap="square" rtlCol="0" anchor="ctr"/>
+          <a:lstStyle/>
+          <a:p>
+            <a:pPr indent="0" marL="0">
+              <a:buNone/>
+            </a:pPr>
+            <a:r>
+              <a:rPr lang="en-US" sz="800" b="1" dirty="0">
                 <a:solidFill>
                   <a:srgbClr val="FF5F6D"/>
                 </a:solidFill>
@@ -4020,77 +4215,77 @@
                 <a:ea typeface="Consolas" pitchFamily="34" charset="-122"/>
                 <a:cs typeface="Consolas" pitchFamily="34" charset="-120"/>
               </a:rPr>
-              <a:t>15:44:47.863</a:t>
-            </a:r>
-            <a:endParaRPr lang="en-US" sz="1000" dirty="0"/>
-          </a:p>
-        </p:txBody>
-      </p:sp>
-      <p:sp>
-        <p:nvSpPr>
-          <p:cNvPr id="42" name="Text 40"/>
-          <p:cNvSpPr/>
-          <p:nvPr/>
-        </p:nvSpPr>
-        <p:spPr>
-          <a:xfrm>
-            <a:off x="2103120" y="5047488"/>
-            <a:ext cx="640080" cy="365760"/>
-          </a:xfrm>
-          <a:prstGeom prst="rect">
-            <a:avLst/>
-          </a:prstGeom>
-          <a:noFill/>
-          <a:ln/>
-        </p:spPr>
-        <p:txBody>
-          <a:bodyPr wrap="square" rtlCol="0" anchor="ctr"/>
-          <a:lstStyle/>
-          <a:p>
-            <a:pPr indent="0" marL="0">
-              <a:buNone/>
-            </a:pPr>
-            <a:r>
-              <a:rPr lang="en-US" sz="1000" dirty="0">
-                <a:solidFill>
-                  <a:srgbClr val="8B8FA3"/>
+              <a:t>15032</a:t>
+            </a:r>
+            <a:endParaRPr lang="en-US" sz="800" dirty="0"/>
+          </a:p>
+        </p:txBody>
+      </p:sp>
+      <p:sp>
+        <p:nvSpPr>
+          <p:cNvPr id="47" name="Text 45"/>
+          <p:cNvSpPr/>
+          <p:nvPr/>
+        </p:nvSpPr>
+        <p:spPr>
+          <a:xfrm>
+            <a:off x="1371600" y="3941064"/>
+            <a:ext cx="1371600" cy="274320"/>
+          </a:xfrm>
+          <a:prstGeom prst="rect">
+            <a:avLst/>
+          </a:prstGeom>
+          <a:noFill/>
+          <a:ln/>
+        </p:spPr>
+        <p:txBody>
+          <a:bodyPr wrap="square" rtlCol="0" anchor="ctr"/>
+          <a:lstStyle/>
+          <a:p>
+            <a:pPr indent="0" marL="0">
+              <a:buNone/>
+            </a:pPr>
+            <a:r>
+              <a:rPr lang="en-US" sz="800" b="1" dirty="0">
+                <a:solidFill>
+                  <a:srgbClr val="FF5F6D"/>
                 </a:solidFill>
                 <a:latin typeface="Consolas" pitchFamily="34" charset="0"/>
                 <a:ea typeface="Consolas" pitchFamily="34" charset="-122"/>
                 <a:cs typeface="Consolas" pitchFamily="34" charset="-120"/>
               </a:rPr>
-              <a:t>15032</a:t>
-            </a:r>
-            <a:endParaRPr lang="en-US" sz="1000" dirty="0"/>
-          </a:p>
-        </p:txBody>
-      </p:sp>
-      <p:sp>
-        <p:nvSpPr>
-          <p:cNvPr id="43" name="Text 41"/>
-          <p:cNvSpPr/>
-          <p:nvPr/>
-        </p:nvSpPr>
-        <p:spPr>
-          <a:xfrm>
-            <a:off x="2743200" y="5047488"/>
-            <a:ext cx="2743200" cy="365760"/>
-          </a:xfrm>
-          <a:prstGeom prst="rect">
-            <a:avLst/>
-          </a:prstGeom>
-          <a:noFill/>
-          <a:ln/>
-        </p:spPr>
-        <p:txBody>
-          <a:bodyPr wrap="square" rtlCol="0" anchor="ctr"/>
-          <a:lstStyle/>
-          <a:p>
-            <a:pPr indent="0" marL="0">
-              <a:buNone/>
-            </a:pPr>
-            <a:r>
-              <a:rPr lang="en-US" sz="1000" b="1" dirty="0">
+              <a:t>oom_reaper</a:t>
+            </a:r>
+            <a:endParaRPr lang="en-US" sz="800" dirty="0"/>
+          </a:p>
+        </p:txBody>
+      </p:sp>
+      <p:sp>
+        <p:nvSpPr>
+          <p:cNvPr id="48" name="Text 46"/>
+          <p:cNvSpPr/>
+          <p:nvPr/>
+        </p:nvSpPr>
+        <p:spPr>
+          <a:xfrm>
+            <a:off x="2743200" y="3941064"/>
+            <a:ext cx="2560320" cy="274320"/>
+          </a:xfrm>
+          <a:prstGeom prst="rect">
+            <a:avLst/>
+          </a:prstGeom>
+          <a:noFill/>
+          <a:ln/>
+        </p:spPr>
+        <p:txBody>
+          <a:bodyPr wrap="square" rtlCol="0" anchor="ctr"/>
+          <a:lstStyle/>
+          <a:p>
+            <a:pPr indent="0" marL="0">
+              <a:buNone/>
+            </a:pPr>
+            <a:r>
+              <a:rPr lang="en-US" sz="800" b="1" dirty="0">
                 <a:solidFill>
                   <a:srgbClr val="FF5F6D"/>
                 </a:solidFill>
@@ -4098,38 +4293,38 @@
                 <a:ea typeface="Microsoft JhengHei" pitchFamily="34" charset="-122"/>
                 <a:cs typeface="Microsoft JhengHei" pitchFamily="34" charset="-120"/>
               </a:rPr>
-              <a:t>com.google.android.apps.nbu.files</a:t>
-            </a:r>
-            <a:endParaRPr lang="en-US" sz="1000" dirty="0"/>
-          </a:p>
-        </p:txBody>
-      </p:sp>
-      <p:sp>
-        <p:nvSpPr>
-          <p:cNvPr id="44" name="Text 42"/>
-          <p:cNvSpPr/>
-          <p:nvPr/>
-        </p:nvSpPr>
-        <p:spPr>
-          <a:xfrm>
-            <a:off x="5486400" y="5047488"/>
-            <a:ext cx="731520" cy="365760"/>
-          </a:xfrm>
-          <a:prstGeom prst="rect">
-            <a:avLst/>
-          </a:prstGeom>
-          <a:noFill/>
-          <a:ln/>
-        </p:spPr>
-        <p:txBody>
-          <a:bodyPr wrap="square" rtlCol="0" anchor="ctr"/>
-          <a:lstStyle/>
-          <a:p>
-            <a:pPr indent="0" marL="0">
-              <a:buNone/>
-            </a:pPr>
-            <a:r>
-              <a:rPr lang="en-US" sz="1000" b="1" dirty="0">
+              <a:t>apps.nbu.files</a:t>
+            </a:r>
+            <a:endParaRPr lang="en-US" sz="800" dirty="0"/>
+          </a:p>
+        </p:txBody>
+      </p:sp>
+      <p:sp>
+        <p:nvSpPr>
+          <p:cNvPr id="49" name="Text 47"/>
+          <p:cNvSpPr/>
+          <p:nvPr/>
+        </p:nvSpPr>
+        <p:spPr>
+          <a:xfrm>
+            <a:off x="5303520" y="3941064"/>
+            <a:ext cx="914400" cy="274320"/>
+          </a:xfrm>
+          <a:prstGeom prst="rect">
+            <a:avLst/>
+          </a:prstGeom>
+          <a:noFill/>
+          <a:ln/>
+        </p:spPr>
+        <p:txBody>
+          <a:bodyPr wrap="square" rtlCol="0" anchor="ctr"/>
+          <a:lstStyle/>
+          <a:p>
+            <a:pPr indent="0" marL="0">
+              <a:buNone/>
+            </a:pPr>
+            <a:r>
+              <a:rPr lang="en-US" sz="800" b="1" dirty="0">
                 <a:solidFill>
                   <a:srgbClr val="FF5F6D"/>
                 </a:solidFill>
@@ -4139,36 +4334,36 @@
               </a:rPr>
               <a:t>fg TOP</a:t>
             </a:r>
-            <a:endParaRPr lang="en-US" sz="1000" dirty="0"/>
-          </a:p>
-        </p:txBody>
-      </p:sp>
-      <p:sp>
-        <p:nvSpPr>
-          <p:cNvPr id="45" name="Text 43"/>
-          <p:cNvSpPr/>
-          <p:nvPr/>
-        </p:nvSpPr>
-        <p:spPr>
-          <a:xfrm>
-            <a:off x="6400800" y="5047488"/>
-            <a:ext cx="5212080" cy="365760"/>
-          </a:xfrm>
-          <a:prstGeom prst="rect">
-            <a:avLst/>
-          </a:prstGeom>
-          <a:noFill/>
-          <a:ln/>
-        </p:spPr>
-        <p:txBody>
-          <a:bodyPr wrap="square" rtlCol="0" anchor="ctr"/>
-          <a:lstStyle/>
-          <a:p>
-            <a:pPr indent="0" marL="0">
-              <a:buNone/>
-            </a:pPr>
-            <a:r>
-              <a:rPr lang="en-US" sz="1000" b="1" dirty="0">
+            <a:endParaRPr lang="en-US" sz="800" dirty="0"/>
+          </a:p>
+        </p:txBody>
+      </p:sp>
+      <p:sp>
+        <p:nvSpPr>
+          <p:cNvPr id="50" name="Text 48"/>
+          <p:cNvSpPr/>
+          <p:nvPr/>
+        </p:nvSpPr>
+        <p:spPr>
+          <a:xfrm>
+            <a:off x="6309360" y="3941064"/>
+            <a:ext cx="5212080" cy="274320"/>
+          </a:xfrm>
+          <a:prstGeom prst="rect">
+            <a:avLst/>
+          </a:prstGeom>
+          <a:noFill/>
+          <a:ln/>
+        </p:spPr>
+        <p:txBody>
+          <a:bodyPr wrap="square" rtlCol="0" anchor="ctr"/>
+          <a:lstStyle/>
+          <a:p>
+            <a:pPr indent="0" marL="0">
+              <a:buNone/>
+            </a:pPr>
+            <a:r>
+              <a:rPr lang="en-US" sz="900" b="1" dirty="0">
                 <a:solidFill>
                   <a:srgbClr val="FF5F6D"/>
                 </a:solidFill>
@@ -4176,52 +4371,99 @@
                 <a:ea typeface="Microsoft JhengHei" pitchFamily="34" charset="-122"/>
                 <a:cs typeface="Microsoft JhengHei" pitchFamily="34" charset="-120"/>
               </a:rPr>
-              <a:t>Files by Google — 最後才殺，因為 adj=0 優先級最高</a:t>
-            </a:r>
-            <a:endParaRPr lang="en-US" sz="1000" dirty="0"/>
-          </a:p>
-        </p:txBody>
-      </p:sp>
-      <p:sp>
-        <p:nvSpPr>
-          <p:cNvPr id="46" name="Text 44"/>
-          <p:cNvSpPr/>
-          <p:nvPr/>
-        </p:nvSpPr>
-        <p:spPr>
-          <a:xfrm>
-            <a:off x="731520" y="5760720"/>
-            <a:ext cx="10515600" cy="274320"/>
-          </a:xfrm>
-          <a:prstGeom prst="rect">
-            <a:avLst/>
-          </a:prstGeom>
-          <a:noFill/>
-          <a:ln/>
-        </p:spPr>
-        <p:txBody>
-          <a:bodyPr wrap="square" rtlCol="0" anchor="ctr"/>
-          <a:lstStyle/>
-          <a:p>
-            <a:pPr indent="0" marL="0">
-              <a:buNone/>
-            </a:pPr>
-            <a:r>
-              <a:rPr lang="en-US" sz="1000" b="1" dirty="0">
-                <a:solidFill>
-                  <a:srgbClr val="8B8FA3"/>
+              <a:t>Files by Google — 最後才殺 (adj=0)</a:t>
+            </a:r>
+            <a:endParaRPr lang="en-US" sz="900" dirty="0"/>
+          </a:p>
+        </p:txBody>
+      </p:sp>
+      <p:sp>
+        <p:nvSpPr>
+          <p:cNvPr id="51" name="Shape 49"/>
+          <p:cNvSpPr/>
+          <p:nvPr/>
+        </p:nvSpPr>
+        <p:spPr>
+          <a:xfrm>
+            <a:off x="594360" y="4261104"/>
+            <a:ext cx="10972800" cy="329184"/>
+          </a:xfrm>
+          <a:prstGeom prst="roundRect">
+            <a:avLst>
+              <a:gd name="adj" fmla="val 8333"/>
+            </a:avLst>
+          </a:prstGeom>
+          <a:solidFill>
+            <a:srgbClr val="351515"/>
+          </a:solidFill>
+          <a:ln/>
+        </p:spPr>
+      </p:sp>
+      <p:sp>
+        <p:nvSpPr>
+          <p:cNvPr id="52" name="Text 50"/>
+          <p:cNvSpPr/>
+          <p:nvPr/>
+        </p:nvSpPr>
+        <p:spPr>
+          <a:xfrm>
+            <a:off x="731520" y="4288536"/>
+            <a:ext cx="640080" cy="274320"/>
+          </a:xfrm>
+          <a:prstGeom prst="rect">
+            <a:avLst/>
+          </a:prstGeom>
+          <a:noFill/>
+          <a:ln/>
+        </p:spPr>
+        <p:txBody>
+          <a:bodyPr wrap="square" rtlCol="0" anchor="ctr"/>
+          <a:lstStyle/>
+          <a:p>
+            <a:pPr indent="0" marL="0">
+              <a:buNone/>
+            </a:pPr>
+            <a:r>
+              <a:rPr lang="en-US" sz="800" b="1" dirty="0">
+                <a:solidFill>
+                  <a:srgbClr val="FF5F6D"/>
                 </a:solidFill>
                 <a:latin typeface="Consolas" pitchFamily="34" charset="0"/>
                 <a:ea typeface="Consolas" pitchFamily="34" charset="-122"/>
                 <a:cs typeface="Consolas" pitchFamily="34" charset="-120"/>
               </a:rPr>
-              <a:t>行 15034: </a:t>
-            </a:r>
-            <a:pPr indent="0" marL="0">
-              <a:buNone/>
-            </a:pPr>
-            <a:r>
-              <a:rPr lang="en-US" sz="1000" dirty="0">
+              <a:t>15034</a:t>
+            </a:r>
+            <a:endParaRPr lang="en-US" sz="800" dirty="0"/>
+          </a:p>
+        </p:txBody>
+      </p:sp>
+      <p:sp>
+        <p:nvSpPr>
+          <p:cNvPr id="53" name="Text 51"/>
+          <p:cNvSpPr/>
+          <p:nvPr/>
+        </p:nvSpPr>
+        <p:spPr>
+          <a:xfrm>
+            <a:off x="1371600" y="4288536"/>
+            <a:ext cx="1371600" cy="274320"/>
+          </a:xfrm>
+          <a:prstGeom prst="rect">
+            <a:avLst/>
+          </a:prstGeom>
+          <a:noFill/>
+          <a:ln/>
+        </p:spPr>
+        <p:txBody>
+          <a:bodyPr wrap="square" rtlCol="0" anchor="ctr"/>
+          <a:lstStyle/>
+          <a:p>
+            <a:pPr indent="0" marL="0">
+              <a:buNone/>
+            </a:pPr>
+            <a:r>
+              <a:rPr lang="en-US" sz="800" b="1" dirty="0">
                 <a:solidFill>
                   <a:srgbClr val="FF5F6D"/>
                 </a:solidFill>
@@ -4229,9 +4471,928 @@
                 <a:ea typeface="Consolas" pitchFamily="34" charset="-122"/>
                 <a:cs typeface="Consolas" pitchFamily="34" charset="-120"/>
               </a:rPr>
-              <a:t>ActivityManager: Process com.google.android.apps.nbu.files (pid 4796) has died: fg  TOP</a:t>
-            </a:r>
-            <a:endParaRPr lang="en-US" sz="1000" dirty="0"/>
+              <a:t>has died</a:t>
+            </a:r>
+            <a:endParaRPr lang="en-US" sz="800" dirty="0"/>
+          </a:p>
+        </p:txBody>
+      </p:sp>
+      <p:sp>
+        <p:nvSpPr>
+          <p:cNvPr id="54" name="Text 52"/>
+          <p:cNvSpPr/>
+          <p:nvPr/>
+        </p:nvSpPr>
+        <p:spPr>
+          <a:xfrm>
+            <a:off x="2743200" y="4288536"/>
+            <a:ext cx="2560320" cy="274320"/>
+          </a:xfrm>
+          <a:prstGeom prst="rect">
+            <a:avLst/>
+          </a:prstGeom>
+          <a:noFill/>
+          <a:ln/>
+        </p:spPr>
+        <p:txBody>
+          <a:bodyPr wrap="square" rtlCol="0" anchor="ctr"/>
+          <a:lstStyle/>
+          <a:p>
+            <a:pPr indent="0" marL="0">
+              <a:buNone/>
+            </a:pPr>
+            <a:r>
+              <a:rPr lang="en-US" sz="800" b="1" dirty="0">
+                <a:solidFill>
+                  <a:srgbClr val="FF5F6D"/>
+                </a:solidFill>
+                <a:latin typeface="Microsoft JhengHei" pitchFamily="34" charset="0"/>
+                <a:ea typeface="Microsoft JhengHei" pitchFamily="34" charset="-122"/>
+                <a:cs typeface="Microsoft JhengHei" pitchFamily="34" charset="-120"/>
+              </a:rPr>
+              <a:t>apps.nbu.files</a:t>
+            </a:r>
+            <a:endParaRPr lang="en-US" sz="800" dirty="0"/>
+          </a:p>
+        </p:txBody>
+      </p:sp>
+      <p:sp>
+        <p:nvSpPr>
+          <p:cNvPr id="55" name="Text 53"/>
+          <p:cNvSpPr/>
+          <p:nvPr/>
+        </p:nvSpPr>
+        <p:spPr>
+          <a:xfrm>
+            <a:off x="5303520" y="4288536"/>
+            <a:ext cx="914400" cy="274320"/>
+          </a:xfrm>
+          <a:prstGeom prst="rect">
+            <a:avLst/>
+          </a:prstGeom>
+          <a:noFill/>
+          <a:ln/>
+        </p:spPr>
+        <p:txBody>
+          <a:bodyPr wrap="square" rtlCol="0" anchor="ctr"/>
+          <a:lstStyle/>
+          <a:p>
+            <a:pPr indent="0" marL="0">
+              <a:buNone/>
+            </a:pPr>
+            <a:r>
+              <a:rPr lang="en-US" sz="800" b="1" dirty="0">
+                <a:solidFill>
+                  <a:srgbClr val="FF5F6D"/>
+                </a:solidFill>
+                <a:latin typeface="Consolas" pitchFamily="34" charset="0"/>
+                <a:ea typeface="Consolas" pitchFamily="34" charset="-122"/>
+                <a:cs typeface="Consolas" pitchFamily="34" charset="-120"/>
+              </a:rPr>
+              <a:t>fg TOP</a:t>
+            </a:r>
+            <a:endParaRPr lang="en-US" sz="800" dirty="0"/>
+          </a:p>
+        </p:txBody>
+      </p:sp>
+      <p:sp>
+        <p:nvSpPr>
+          <p:cNvPr id="56" name="Text 54"/>
+          <p:cNvSpPr/>
+          <p:nvPr/>
+        </p:nvSpPr>
+        <p:spPr>
+          <a:xfrm>
+            <a:off x="6309360" y="4288536"/>
+            <a:ext cx="5212080" cy="274320"/>
+          </a:xfrm>
+          <a:prstGeom prst="rect">
+            <a:avLst/>
+          </a:prstGeom>
+          <a:noFill/>
+          <a:ln/>
+        </p:spPr>
+        <p:txBody>
+          <a:bodyPr wrap="square" rtlCol="0" anchor="ctr"/>
+          <a:lstStyle/>
+          <a:p>
+            <a:pPr indent="0" marL="0">
+              <a:buNone/>
+            </a:pPr>
+            <a:r>
+              <a:rPr lang="en-US" sz="900" b="1" dirty="0">
+                <a:solidFill>
+                  <a:srgbClr val="FF5F6D"/>
+                </a:solidFill>
+                <a:latin typeface="Microsoft JhengHei" pitchFamily="34" charset="0"/>
+                <a:ea typeface="Microsoft JhengHei" pitchFamily="34" charset="-122"/>
+                <a:cs typeface="Microsoft JhengHei" pitchFamily="34" charset="-120"/>
+              </a:rPr>
+              <a:t>ActivityManager 確認前景 App 死亡</a:t>
+            </a:r>
+            <a:endParaRPr lang="en-US" sz="900" dirty="0"/>
+          </a:p>
+        </p:txBody>
+      </p:sp>
+      <p:sp>
+        <p:nvSpPr>
+          <p:cNvPr id="57" name="Text 55"/>
+          <p:cNvSpPr/>
+          <p:nvPr/>
+        </p:nvSpPr>
+        <p:spPr>
+          <a:xfrm>
+            <a:off x="731520" y="4636008"/>
+            <a:ext cx="640080" cy="274320"/>
+          </a:xfrm>
+          <a:prstGeom prst="rect">
+            <a:avLst/>
+          </a:prstGeom>
+          <a:noFill/>
+          <a:ln/>
+        </p:spPr>
+        <p:txBody>
+          <a:bodyPr wrap="square" rtlCol="0" anchor="ctr"/>
+          <a:lstStyle/>
+          <a:p>
+            <a:pPr indent="0" marL="0">
+              <a:buNone/>
+            </a:pPr>
+            <a:r>
+              <a:rPr lang="en-US" sz="800" dirty="0">
+                <a:solidFill>
+                  <a:srgbClr val="8B8FA3"/>
+                </a:solidFill>
+                <a:latin typeface="Consolas" pitchFamily="34" charset="0"/>
+                <a:ea typeface="Consolas" pitchFamily="34" charset="-122"/>
+                <a:cs typeface="Consolas" pitchFamily="34" charset="-120"/>
+              </a:rPr>
+              <a:t>15035-37</a:t>
+            </a:r>
+            <a:endParaRPr lang="en-US" sz="800" dirty="0"/>
+          </a:p>
+        </p:txBody>
+      </p:sp>
+      <p:sp>
+        <p:nvSpPr>
+          <p:cNvPr id="58" name="Text 56"/>
+          <p:cNvSpPr/>
+          <p:nvPr/>
+        </p:nvSpPr>
+        <p:spPr>
+          <a:xfrm>
+            <a:off x="1371600" y="4636008"/>
+            <a:ext cx="1371600" cy="274320"/>
+          </a:xfrm>
+          <a:prstGeom prst="rect">
+            <a:avLst/>
+          </a:prstGeom>
+          <a:noFill/>
+          <a:ln/>
+        </p:spPr>
+        <p:txBody>
+          <a:bodyPr wrap="square" rtlCol="0" anchor="ctr"/>
+          <a:lstStyle/>
+          <a:p>
+            <a:pPr indent="0" marL="0">
+              <a:buNone/>
+            </a:pPr>
+            <a:r>
+              <a:rPr lang="en-US" sz="800" dirty="0">
+                <a:solidFill>
+                  <a:srgbClr val="8B8FA3"/>
+                </a:solidFill>
+                <a:latin typeface="Consolas" pitchFamily="34" charset="0"/>
+                <a:ea typeface="Consolas" pitchFamily="34" charset="-122"/>
+                <a:cs typeface="Consolas" pitchFamily="34" charset="-120"/>
+              </a:rPr>
+              <a:t>WIN DEATH</a:t>
+            </a:r>
+            <a:endParaRPr lang="en-US" sz="800" dirty="0"/>
+          </a:p>
+        </p:txBody>
+      </p:sp>
+      <p:sp>
+        <p:nvSpPr>
+          <p:cNvPr id="59" name="Text 57"/>
+          <p:cNvSpPr/>
+          <p:nvPr/>
+        </p:nvSpPr>
+        <p:spPr>
+          <a:xfrm>
+            <a:off x="2743200" y="4636008"/>
+            <a:ext cx="2560320" cy="274320"/>
+          </a:xfrm>
+          <a:prstGeom prst="rect">
+            <a:avLst/>
+          </a:prstGeom>
+          <a:noFill/>
+          <a:ln/>
+        </p:spPr>
+        <p:txBody>
+          <a:bodyPr wrap="square" rtlCol="0" anchor="ctr"/>
+          <a:lstStyle/>
+          <a:p>
+            <a:pPr indent="0" marL="0">
+              <a:buNone/>
+            </a:pPr>
+            <a:r>
+              <a:rPr lang="en-US" sz="800" dirty="0">
+                <a:solidFill>
+                  <a:srgbClr val="8B8FA3"/>
+                </a:solidFill>
+                <a:latin typeface="Microsoft JhengHei" pitchFamily="34" charset="0"/>
+                <a:ea typeface="Microsoft JhengHei" pitchFamily="34" charset="-122"/>
+                <a:cs typeface="Microsoft JhengHei" pitchFamily="34" charset="-120"/>
+              </a:rPr>
+              <a:t>apps.nbu.files</a:t>
+            </a:r>
+            <a:endParaRPr lang="en-US" sz="800" dirty="0"/>
+          </a:p>
+        </p:txBody>
+      </p:sp>
+      <p:sp>
+        <p:nvSpPr>
+          <p:cNvPr id="60" name="Text 58"/>
+          <p:cNvSpPr/>
+          <p:nvPr/>
+        </p:nvSpPr>
+        <p:spPr>
+          <a:xfrm>
+            <a:off x="5303520" y="4636008"/>
+            <a:ext cx="914400" cy="274320"/>
+          </a:xfrm>
+          <a:prstGeom prst="rect">
+            <a:avLst/>
+          </a:prstGeom>
+          <a:noFill/>
+          <a:ln/>
+        </p:spPr>
+        <p:txBody>
+          <a:bodyPr wrap="square" rtlCol="0" anchor="ctr"/>
+          <a:lstStyle/>
+          <a:p>
+            <a:pPr indent="0" marL="0">
+              <a:buNone/>
+            </a:pPr>
+            <a:r>
+              <a:rPr lang="en-US" sz="800" dirty="0">
+                <a:solidFill>
+                  <a:srgbClr val="8B8FA3"/>
+                </a:solidFill>
+                <a:latin typeface="Consolas" pitchFamily="34" charset="0"/>
+                <a:ea typeface="Consolas" pitchFamily="34" charset="-122"/>
+                <a:cs typeface="Consolas" pitchFamily="34" charset="-120"/>
+              </a:rPr>
+              <a:t>-</a:t>
+            </a:r>
+            <a:endParaRPr lang="en-US" sz="800" dirty="0"/>
+          </a:p>
+        </p:txBody>
+      </p:sp>
+      <p:sp>
+        <p:nvSpPr>
+          <p:cNvPr id="61" name="Text 59"/>
+          <p:cNvSpPr/>
+          <p:nvPr/>
+        </p:nvSpPr>
+        <p:spPr>
+          <a:xfrm>
+            <a:off x="6309360" y="4636008"/>
+            <a:ext cx="5212080" cy="274320"/>
+          </a:xfrm>
+          <a:prstGeom prst="rect">
+            <a:avLst/>
+          </a:prstGeom>
+          <a:noFill/>
+          <a:ln/>
+        </p:spPr>
+        <p:txBody>
+          <a:bodyPr wrap="square" rtlCol="0" anchor="ctr"/>
+          <a:lstStyle/>
+          <a:p>
+            <a:pPr indent="0" marL="0">
+              <a:buNone/>
+            </a:pPr>
+            <a:r>
+              <a:rPr lang="en-US" sz="900" dirty="0">
+                <a:solidFill>
+                  <a:srgbClr val="E0E0E6"/>
+                </a:solidFill>
+                <a:latin typeface="Microsoft JhengHei" pitchFamily="34" charset="0"/>
+                <a:ea typeface="Microsoft JhengHei" pitchFamily="34" charset="-122"/>
+                <a:cs typeface="Microsoft JhengHei" pitchFamily="34" charset="-120"/>
+              </a:rPr>
+              <a:t>3 個視窗被清理</a:t>
+            </a:r>
+            <a:endParaRPr lang="en-US" sz="900" dirty="0"/>
+          </a:p>
+        </p:txBody>
+      </p:sp>
+      <p:sp>
+        <p:nvSpPr>
+          <p:cNvPr id="62" name="Text 60"/>
+          <p:cNvSpPr/>
+          <p:nvPr/>
+        </p:nvSpPr>
+        <p:spPr>
+          <a:xfrm>
+            <a:off x="731520" y="4983480"/>
+            <a:ext cx="640080" cy="274320"/>
+          </a:xfrm>
+          <a:prstGeom prst="rect">
+            <a:avLst/>
+          </a:prstGeom>
+          <a:noFill/>
+          <a:ln/>
+        </p:spPr>
+        <p:txBody>
+          <a:bodyPr wrap="square" rtlCol="0" anchor="ctr"/>
+          <a:lstStyle/>
+          <a:p>
+            <a:pPr indent="0" marL="0">
+              <a:buNone/>
+            </a:pPr>
+            <a:r>
+              <a:rPr lang="en-US" sz="800" dirty="0">
+                <a:solidFill>
+                  <a:srgbClr val="8B8FA3"/>
+                </a:solidFill>
+                <a:latin typeface="Consolas" pitchFamily="34" charset="0"/>
+                <a:ea typeface="Consolas" pitchFamily="34" charset="-122"/>
+                <a:cs typeface="Consolas" pitchFamily="34" charset="-120"/>
+              </a:rPr>
+              <a:t>15038</a:t>
+            </a:r>
+            <a:endParaRPr lang="en-US" sz="800" dirty="0"/>
+          </a:p>
+        </p:txBody>
+      </p:sp>
+      <p:sp>
+        <p:nvSpPr>
+          <p:cNvPr id="63" name="Text 61"/>
+          <p:cNvSpPr/>
+          <p:nvPr/>
+        </p:nvSpPr>
+        <p:spPr>
+          <a:xfrm>
+            <a:off x="1371600" y="4983480"/>
+            <a:ext cx="1371600" cy="274320"/>
+          </a:xfrm>
+          <a:prstGeom prst="rect">
+            <a:avLst/>
+          </a:prstGeom>
+          <a:noFill/>
+          <a:ln/>
+        </p:spPr>
+        <p:txBody>
+          <a:bodyPr wrap="square" rtlCol="0" anchor="ctr"/>
+          <a:lstStyle/>
+          <a:p>
+            <a:pPr indent="0" marL="0">
+              <a:buNone/>
+            </a:pPr>
+            <a:r>
+              <a:rPr lang="en-US" sz="800" dirty="0">
+                <a:solidFill>
+                  <a:srgbClr val="8B8FA3"/>
+                </a:solidFill>
+                <a:latin typeface="Consolas" pitchFamily="34" charset="0"/>
+                <a:ea typeface="Consolas" pitchFamily="34" charset="-122"/>
+                <a:cs typeface="Consolas" pitchFamily="34" charset="-120"/>
+              </a:rPr>
+              <a:t>Force remove</a:t>
+            </a:r>
+            <a:endParaRPr lang="en-US" sz="800" dirty="0"/>
+          </a:p>
+        </p:txBody>
+      </p:sp>
+      <p:sp>
+        <p:nvSpPr>
+          <p:cNvPr id="64" name="Text 62"/>
+          <p:cNvSpPr/>
+          <p:nvPr/>
+        </p:nvSpPr>
+        <p:spPr>
+          <a:xfrm>
+            <a:off x="2743200" y="4983480"/>
+            <a:ext cx="2560320" cy="274320"/>
+          </a:xfrm>
+          <a:prstGeom prst="rect">
+            <a:avLst/>
+          </a:prstGeom>
+          <a:noFill/>
+          <a:ln/>
+        </p:spPr>
+        <p:txBody>
+          <a:bodyPr wrap="square" rtlCol="0" anchor="ctr"/>
+          <a:lstStyle/>
+          <a:p>
+            <a:pPr indent="0" marL="0">
+              <a:buNone/>
+            </a:pPr>
+            <a:r>
+              <a:rPr lang="en-US" sz="800" dirty="0">
+                <a:solidFill>
+                  <a:srgbClr val="8B8FA3"/>
+                </a:solidFill>
+                <a:latin typeface="Microsoft JhengHei" pitchFamily="34" charset="0"/>
+                <a:ea typeface="Microsoft JhengHei" pitchFamily="34" charset="-122"/>
+                <a:cs typeface="Microsoft JhengHei" pitchFamily="34" charset="-120"/>
+              </a:rPr>
+              <a:t>HomeActivity</a:t>
+            </a:r>
+            <a:endParaRPr lang="en-US" sz="800" dirty="0"/>
+          </a:p>
+        </p:txBody>
+      </p:sp>
+      <p:sp>
+        <p:nvSpPr>
+          <p:cNvPr id="65" name="Text 63"/>
+          <p:cNvSpPr/>
+          <p:nvPr/>
+        </p:nvSpPr>
+        <p:spPr>
+          <a:xfrm>
+            <a:off x="5303520" y="4983480"/>
+            <a:ext cx="914400" cy="274320"/>
+          </a:xfrm>
+          <a:prstGeom prst="rect">
+            <a:avLst/>
+          </a:prstGeom>
+          <a:noFill/>
+          <a:ln/>
+        </p:spPr>
+        <p:txBody>
+          <a:bodyPr wrap="square" rtlCol="0" anchor="ctr"/>
+          <a:lstStyle/>
+          <a:p>
+            <a:pPr indent="0" marL="0">
+              <a:buNone/>
+            </a:pPr>
+            <a:r>
+              <a:rPr lang="en-US" sz="800" dirty="0">
+                <a:solidFill>
+                  <a:srgbClr val="8B8FA3"/>
+                </a:solidFill>
+                <a:latin typeface="Consolas" pitchFamily="34" charset="0"/>
+                <a:ea typeface="Consolas" pitchFamily="34" charset="-122"/>
+                <a:cs typeface="Consolas" pitchFamily="34" charset="-120"/>
+              </a:rPr>
+              <a:t>STOPPED</a:t>
+            </a:r>
+            <a:endParaRPr lang="en-US" sz="800" dirty="0"/>
+          </a:p>
+        </p:txBody>
+      </p:sp>
+      <p:sp>
+        <p:nvSpPr>
+          <p:cNvPr id="66" name="Text 64"/>
+          <p:cNvSpPr/>
+          <p:nvPr/>
+        </p:nvSpPr>
+        <p:spPr>
+          <a:xfrm>
+            <a:off x="6309360" y="4983480"/>
+            <a:ext cx="5212080" cy="274320"/>
+          </a:xfrm>
+          <a:prstGeom prst="rect">
+            <a:avLst/>
+          </a:prstGeom>
+          <a:noFill/>
+          <a:ln/>
+        </p:spPr>
+        <p:txBody>
+          <a:bodyPr wrap="square" rtlCol="0" anchor="ctr"/>
+          <a:lstStyle/>
+          <a:p>
+            <a:pPr indent="0" marL="0">
+              <a:buNone/>
+            </a:pPr>
+            <a:r>
+              <a:rPr lang="en-US" sz="900" dirty="0">
+                <a:solidFill>
+                  <a:srgbClr val="E0E0E6"/>
+                </a:solidFill>
+                <a:latin typeface="Microsoft JhengHei" pitchFamily="34" charset="0"/>
+                <a:ea typeface="Microsoft JhengHei" pitchFamily="34" charset="-122"/>
+                <a:cs typeface="Microsoft JhengHei" pitchFamily="34" charset="-120"/>
+              </a:rPr>
+              <a:t>強制移除首頁 Activity</a:t>
+            </a:r>
+            <a:endParaRPr lang="en-US" sz="900" dirty="0"/>
+          </a:p>
+        </p:txBody>
+      </p:sp>
+      <p:sp>
+        <p:nvSpPr>
+          <p:cNvPr id="67" name="Text 65"/>
+          <p:cNvSpPr/>
+          <p:nvPr/>
+        </p:nvSpPr>
+        <p:spPr>
+          <a:xfrm>
+            <a:off x="731520" y="5330952"/>
+            <a:ext cx="640080" cy="274320"/>
+          </a:xfrm>
+          <a:prstGeom prst="rect">
+            <a:avLst/>
+          </a:prstGeom>
+          <a:noFill/>
+          <a:ln/>
+        </p:spPr>
+        <p:txBody>
+          <a:bodyPr wrap="square" rtlCol="0" anchor="ctr"/>
+          <a:lstStyle/>
+          <a:p>
+            <a:pPr indent="0" marL="0">
+              <a:buNone/>
+            </a:pPr>
+            <a:r>
+              <a:rPr lang="en-US" sz="800" dirty="0">
+                <a:solidFill>
+                  <a:srgbClr val="8B8FA3"/>
+                </a:solidFill>
+                <a:latin typeface="Consolas" pitchFamily="34" charset="0"/>
+                <a:ea typeface="Consolas" pitchFamily="34" charset="-122"/>
+                <a:cs typeface="Consolas" pitchFamily="34" charset="-120"/>
+              </a:rPr>
+              <a:t>15040</a:t>
+            </a:r>
+            <a:endParaRPr lang="en-US" sz="800" dirty="0"/>
+          </a:p>
+        </p:txBody>
+      </p:sp>
+      <p:sp>
+        <p:nvSpPr>
+          <p:cNvPr id="68" name="Text 66"/>
+          <p:cNvSpPr/>
+          <p:nvPr/>
+        </p:nvSpPr>
+        <p:spPr>
+          <a:xfrm>
+            <a:off x="1371600" y="5330952"/>
+            <a:ext cx="1371600" cy="274320"/>
+          </a:xfrm>
+          <a:prstGeom prst="rect">
+            <a:avLst/>
+          </a:prstGeom>
+          <a:noFill/>
+          <a:ln/>
+        </p:spPr>
+        <p:txBody>
+          <a:bodyPr wrap="square" rtlCol="0" anchor="ctr"/>
+          <a:lstStyle/>
+          <a:p>
+            <a:pPr indent="0" marL="0">
+              <a:buNone/>
+            </a:pPr>
+            <a:r>
+              <a:rPr lang="en-US" sz="800" dirty="0">
+                <a:solidFill>
+                  <a:srgbClr val="FFAA44"/>
+                </a:solidFill>
+                <a:latin typeface="Consolas" pitchFamily="34" charset="0"/>
+                <a:ea typeface="Consolas" pitchFamily="34" charset="-122"/>
+                <a:cs typeface="Consolas" pitchFamily="34" charset="-120"/>
+              </a:rPr>
+              <a:t>Force remove</a:t>
+            </a:r>
+            <a:endParaRPr lang="en-US" sz="800" dirty="0"/>
+          </a:p>
+        </p:txBody>
+      </p:sp>
+      <p:sp>
+        <p:nvSpPr>
+          <p:cNvPr id="69" name="Text 67"/>
+          <p:cNvSpPr/>
+          <p:nvPr/>
+        </p:nvSpPr>
+        <p:spPr>
+          <a:xfrm>
+            <a:off x="2743200" y="5330952"/>
+            <a:ext cx="2560320" cy="274320"/>
+          </a:xfrm>
+          <a:prstGeom prst="rect">
+            <a:avLst/>
+          </a:prstGeom>
+          <a:noFill/>
+          <a:ln/>
+        </p:spPr>
+        <p:txBody>
+          <a:bodyPr wrap="square" rtlCol="0" anchor="ctr"/>
+          <a:lstStyle/>
+          <a:p>
+            <a:pPr indent="0" marL="0">
+              <a:buNone/>
+            </a:pPr>
+            <a:r>
+              <a:rPr lang="en-US" sz="800" dirty="0">
+                <a:solidFill>
+                  <a:srgbClr val="FFAA44"/>
+                </a:solidFill>
+                <a:latin typeface="Microsoft JhengHei" pitchFamily="34" charset="0"/>
+                <a:ea typeface="Microsoft JhengHei" pitchFamily="34" charset="-122"/>
+                <a:cs typeface="Microsoft JhengHei" pitchFamily="34" charset="-120"/>
+              </a:rPr>
+              <a:t>AdvancedBrowsingActivity</a:t>
+            </a:r>
+            <a:endParaRPr lang="en-US" sz="800" dirty="0"/>
+          </a:p>
+        </p:txBody>
+      </p:sp>
+      <p:sp>
+        <p:nvSpPr>
+          <p:cNvPr id="70" name="Text 68"/>
+          <p:cNvSpPr/>
+          <p:nvPr/>
+        </p:nvSpPr>
+        <p:spPr>
+          <a:xfrm>
+            <a:off x="5303520" y="5330952"/>
+            <a:ext cx="914400" cy="274320"/>
+          </a:xfrm>
+          <a:prstGeom prst="rect">
+            <a:avLst/>
+          </a:prstGeom>
+          <a:noFill/>
+          <a:ln/>
+        </p:spPr>
+        <p:txBody>
+          <a:bodyPr wrap="square" rtlCol="0" anchor="ctr"/>
+          <a:lstStyle/>
+          <a:p>
+            <a:pPr indent="0" marL="0">
+              <a:buNone/>
+            </a:pPr>
+            <a:r>
+              <a:rPr lang="en-US" sz="800" dirty="0">
+                <a:solidFill>
+                  <a:srgbClr val="FFAA44"/>
+                </a:solidFill>
+                <a:latin typeface="Consolas" pitchFamily="34" charset="0"/>
+                <a:ea typeface="Consolas" pitchFamily="34" charset="-122"/>
+                <a:cs typeface="Consolas" pitchFamily="34" charset="-120"/>
+              </a:rPr>
+              <a:t>RESUMED</a:t>
+            </a:r>
+            <a:endParaRPr lang="en-US" sz="800" dirty="0"/>
+          </a:p>
+        </p:txBody>
+      </p:sp>
+      <p:sp>
+        <p:nvSpPr>
+          <p:cNvPr id="71" name="Text 69"/>
+          <p:cNvSpPr/>
+          <p:nvPr/>
+        </p:nvSpPr>
+        <p:spPr>
+          <a:xfrm>
+            <a:off x="6309360" y="5330952"/>
+            <a:ext cx="5212080" cy="274320"/>
+          </a:xfrm>
+          <a:prstGeom prst="rect">
+            <a:avLst/>
+          </a:prstGeom>
+          <a:noFill/>
+          <a:ln/>
+        </p:spPr>
+        <p:txBody>
+          <a:bodyPr wrap="square" rtlCol="0" anchor="ctr"/>
+          <a:lstStyle/>
+          <a:p>
+            <a:pPr indent="0" marL="0">
+              <a:buNone/>
+            </a:pPr>
+            <a:r>
+              <a:rPr lang="en-US" sz="900" dirty="0">
+                <a:solidFill>
+                  <a:srgbClr val="E0E0E6"/>
+                </a:solidFill>
+                <a:latin typeface="Microsoft JhengHei" pitchFamily="34" charset="0"/>
+                <a:ea typeface="Microsoft JhengHei" pitchFamily="34" charset="-122"/>
+                <a:cs typeface="Microsoft JhengHei" pitchFamily="34" charset="-120"/>
+              </a:rPr>
+              <a:t>強制移除正在顯示的複製畫面</a:t>
+            </a:r>
+            <a:endParaRPr lang="en-US" sz="900" dirty="0"/>
+          </a:p>
+        </p:txBody>
+      </p:sp>
+      <p:sp>
+        <p:nvSpPr>
+          <p:cNvPr id="72" name="Shape 70"/>
+          <p:cNvSpPr/>
+          <p:nvPr/>
+        </p:nvSpPr>
+        <p:spPr>
+          <a:xfrm>
+            <a:off x="594360" y="5650992"/>
+            <a:ext cx="10972800" cy="329184"/>
+          </a:xfrm>
+          <a:prstGeom prst="roundRect">
+            <a:avLst>
+              <a:gd name="adj" fmla="val 8333"/>
+            </a:avLst>
+          </a:prstGeom>
+          <a:solidFill>
+            <a:srgbClr val="351515"/>
+          </a:solidFill>
+          <a:ln/>
+        </p:spPr>
+      </p:sp>
+      <p:sp>
+        <p:nvSpPr>
+          <p:cNvPr id="73" name="Text 71"/>
+          <p:cNvSpPr/>
+          <p:nvPr/>
+        </p:nvSpPr>
+        <p:spPr>
+          <a:xfrm>
+            <a:off x="731520" y="5678424"/>
+            <a:ext cx="640080" cy="274320"/>
+          </a:xfrm>
+          <a:prstGeom prst="rect">
+            <a:avLst/>
+          </a:prstGeom>
+          <a:noFill/>
+          <a:ln/>
+        </p:spPr>
+        <p:txBody>
+          <a:bodyPr wrap="square" rtlCol="0" anchor="ctr"/>
+          <a:lstStyle/>
+          <a:p>
+            <a:pPr indent="0" marL="0">
+              <a:buNone/>
+            </a:pPr>
+            <a:r>
+              <a:rPr lang="en-US" sz="800" b="1" dirty="0">
+                <a:solidFill>
+                  <a:srgbClr val="FF5F6D"/>
+                </a:solidFill>
+                <a:latin typeface="Consolas" pitchFamily="34" charset="0"/>
+                <a:ea typeface="Consolas" pitchFamily="34" charset="-122"/>
+                <a:cs typeface="Consolas" pitchFamily="34" charset="-120"/>
+              </a:rPr>
+              <a:t>153406</a:t>
+            </a:r>
+            <a:endParaRPr lang="en-US" sz="800" dirty="0"/>
+          </a:p>
+        </p:txBody>
+      </p:sp>
+      <p:sp>
+        <p:nvSpPr>
+          <p:cNvPr id="74" name="Text 72"/>
+          <p:cNvSpPr/>
+          <p:nvPr/>
+        </p:nvSpPr>
+        <p:spPr>
+          <a:xfrm>
+            <a:off x="1371600" y="5678424"/>
+            <a:ext cx="1371600" cy="274320"/>
+          </a:xfrm>
+          <a:prstGeom prst="rect">
+            <a:avLst/>
+          </a:prstGeom>
+          <a:noFill/>
+          <a:ln/>
+        </p:spPr>
+        <p:txBody>
+          <a:bodyPr wrap="square" rtlCol="0" anchor="ctr"/>
+          <a:lstStyle/>
+          <a:p>
+            <a:pPr indent="0" marL="0">
+              <a:buNone/>
+            </a:pPr>
+            <a:r>
+              <a:rPr lang="en-US" sz="800" b="1" dirty="0">
+                <a:solidFill>
+                  <a:srgbClr val="FF5F6D"/>
+                </a:solidFill>
+                <a:latin typeface="Consolas" pitchFamily="34" charset="0"/>
+                <a:ea typeface="Consolas" pitchFamily="34" charset="-122"/>
+                <a:cs typeface="Consolas" pitchFamily="34" charset="-120"/>
+              </a:rPr>
+              <a:t>reason=3</a:t>
+            </a:r>
+            <a:endParaRPr lang="en-US" sz="800" dirty="0"/>
+          </a:p>
+        </p:txBody>
+      </p:sp>
+      <p:sp>
+        <p:nvSpPr>
+          <p:cNvPr id="75" name="Text 73"/>
+          <p:cNvSpPr/>
+          <p:nvPr/>
+        </p:nvSpPr>
+        <p:spPr>
+          <a:xfrm>
+            <a:off x="2743200" y="5678424"/>
+            <a:ext cx="2560320" cy="274320"/>
+          </a:xfrm>
+          <a:prstGeom prst="rect">
+            <a:avLst/>
+          </a:prstGeom>
+          <a:noFill/>
+          <a:ln/>
+        </p:spPr>
+        <p:txBody>
+          <a:bodyPr wrap="square" rtlCol="0" anchor="ctr"/>
+          <a:lstStyle/>
+          <a:p>
+            <a:pPr indent="0" marL="0">
+              <a:buNone/>
+            </a:pPr>
+            <a:r>
+              <a:rPr lang="en-US" sz="800" b="1" dirty="0">
+                <a:solidFill>
+                  <a:srgbClr val="FF5F6D"/>
+                </a:solidFill>
+                <a:latin typeface="Microsoft JhengHei" pitchFamily="34" charset="0"/>
+                <a:ea typeface="Microsoft JhengHei" pitchFamily="34" charset="-122"/>
+                <a:cs typeface="Microsoft JhengHei" pitchFamily="34" charset="-120"/>
+              </a:rPr>
+              <a:t>apps.nbu.files</a:t>
+            </a:r>
+            <a:endParaRPr lang="en-US" sz="800" dirty="0"/>
+          </a:p>
+        </p:txBody>
+      </p:sp>
+      <p:sp>
+        <p:nvSpPr>
+          <p:cNvPr id="76" name="Text 74"/>
+          <p:cNvSpPr/>
+          <p:nvPr/>
+        </p:nvSpPr>
+        <p:spPr>
+          <a:xfrm>
+            <a:off x="5303520" y="5678424"/>
+            <a:ext cx="914400" cy="274320"/>
+          </a:xfrm>
+          <a:prstGeom prst="rect">
+            <a:avLst/>
+          </a:prstGeom>
+          <a:noFill/>
+          <a:ln/>
+        </p:spPr>
+        <p:txBody>
+          <a:bodyPr wrap="square" rtlCol="0" anchor="ctr"/>
+          <a:lstStyle/>
+          <a:p>
+            <a:pPr indent="0" marL="0">
+              <a:buNone/>
+            </a:pPr>
+            <a:r>
+              <a:rPr lang="en-US" sz="800" b="1" dirty="0">
+                <a:solidFill>
+                  <a:srgbClr val="FF5F6D"/>
+                </a:solidFill>
+                <a:latin typeface="Consolas" pitchFamily="34" charset="0"/>
+                <a:ea typeface="Consolas" pitchFamily="34" charset="-122"/>
+                <a:cs typeface="Consolas" pitchFamily="34" charset="-120"/>
+              </a:rPr>
+              <a:t>imp=100</a:t>
+            </a:r>
+            <a:endParaRPr lang="en-US" sz="800" dirty="0"/>
+          </a:p>
+        </p:txBody>
+      </p:sp>
+      <p:sp>
+        <p:nvSpPr>
+          <p:cNvPr id="77" name="Text 75"/>
+          <p:cNvSpPr/>
+          <p:nvPr/>
+        </p:nvSpPr>
+        <p:spPr>
+          <a:xfrm>
+            <a:off x="6309360" y="5678424"/>
+            <a:ext cx="5212080" cy="274320"/>
+          </a:xfrm>
+          <a:prstGeom prst="rect">
+            <a:avLst/>
+          </a:prstGeom>
+          <a:noFill/>
+          <a:ln/>
+        </p:spPr>
+        <p:txBody>
+          <a:bodyPr wrap="square" rtlCol="0" anchor="ctr"/>
+          <a:lstStyle/>
+          <a:p>
+            <a:pPr indent="0" marL="0">
+              <a:buNone/>
+            </a:pPr>
+            <a:r>
+              <a:rPr lang="en-US" sz="900" b="1" dirty="0">
+                <a:solidFill>
+                  <a:srgbClr val="FF5F6D"/>
+                </a:solidFill>
+                <a:latin typeface="Microsoft JhengHei" pitchFamily="34" charset="0"/>
+                <a:ea typeface="Microsoft JhengHei" pitchFamily="34" charset="-122"/>
+                <a:cs typeface="Microsoft JhengHei" pitchFamily="34" charset="-120"/>
+              </a:rPr>
+              <a:t>死因：LOW_MEMORY（前景 App）</a:t>
+            </a:r>
+            <a:endParaRPr lang="en-US" sz="900" dirty="0"/>
           </a:p>
         </p:txBody>
       </p:sp>
@@ -4381,23 +5542,23 @@
         <p:spPr>
           <a:xfrm>
             <a:off x="731520" y="1234440"/>
-            <a:ext cx="1371600" cy="274320"/>
-          </a:xfrm>
-          <a:prstGeom prst="rect">
-            <a:avLst/>
-          </a:prstGeom>
-          <a:noFill/>
-          <a:ln/>
-        </p:spPr>
-        <p:txBody>
-          <a:bodyPr wrap="square" rtlCol="0" anchor="ctr"/>
-          <a:lstStyle/>
-          <a:p>
-            <a:pPr indent="0" marL="0">
-              <a:buNone/>
-            </a:pPr>
-            <a:r>
-              <a:rPr lang="en-US" sz="1000" b="1" dirty="0">
+            <a:ext cx="640080" cy="228600"/>
+          </a:xfrm>
+          <a:prstGeom prst="rect">
+            <a:avLst/>
+          </a:prstGeom>
+          <a:noFill/>
+          <a:ln/>
+        </p:spPr>
+        <p:txBody>
+          <a:bodyPr wrap="square" rtlCol="0" anchor="ctr"/>
+          <a:lstStyle/>
+          <a:p>
+            <a:pPr indent="0" marL="0">
+              <a:buNone/>
+            </a:pPr>
+            <a:r>
+              <a:rPr lang="en-US" sz="900" b="1" dirty="0">
                 <a:solidFill>
                   <a:srgbClr val="8B8FA3"/>
                 </a:solidFill>
@@ -4405,9 +5566,9 @@
                 <a:ea typeface="Microsoft JhengHei" pitchFamily="34" charset="-122"/>
                 <a:cs typeface="Microsoft JhengHei" pitchFamily="34" charset="-120"/>
               </a:rPr>
-              <a:t>時間</a:t>
-            </a:r>
-            <a:endParaRPr lang="en-US" sz="1000" dirty="0"/>
+              <a:t>行號</a:t>
+            </a:r>
+            <a:endParaRPr lang="en-US" sz="900" dirty="0"/>
           </a:p>
         </p:txBody>
       </p:sp>
@@ -4419,24 +5580,24 @@
         </p:nvSpPr>
         <p:spPr>
           <a:xfrm>
-            <a:off x="2103120" y="1234440"/>
-            <a:ext cx="640080" cy="274320"/>
-          </a:xfrm>
-          <a:prstGeom prst="rect">
-            <a:avLst/>
-          </a:prstGeom>
-          <a:noFill/>
-          <a:ln/>
-        </p:spPr>
-        <p:txBody>
-          <a:bodyPr wrap="square" rtlCol="0" anchor="ctr"/>
-          <a:lstStyle/>
-          <a:p>
-            <a:pPr indent="0" marL="0">
-              <a:buNone/>
-            </a:pPr>
-            <a:r>
-              <a:rPr lang="en-US" sz="1000" b="1" dirty="0">
+            <a:off x="1371600" y="1234440"/>
+            <a:ext cx="1371600" cy="228600"/>
+          </a:xfrm>
+          <a:prstGeom prst="rect">
+            <a:avLst/>
+          </a:prstGeom>
+          <a:noFill/>
+          <a:ln/>
+        </p:spPr>
+        <p:txBody>
+          <a:bodyPr wrap="square" rtlCol="0" anchor="ctr"/>
+          <a:lstStyle/>
+          <a:p>
+            <a:pPr indent="0" marL="0">
+              <a:buNone/>
+            </a:pPr>
+            <a:r>
+              <a:rPr lang="en-US" sz="900" b="1" dirty="0">
                 <a:solidFill>
                   <a:srgbClr val="8B8FA3"/>
                 </a:solidFill>
@@ -4444,9 +5605,9 @@
                 <a:ea typeface="Microsoft JhengHei" pitchFamily="34" charset="-122"/>
                 <a:cs typeface="Microsoft JhengHei" pitchFamily="34" charset="-120"/>
               </a:rPr>
-              <a:t>行號</a:t>
-            </a:r>
-            <a:endParaRPr lang="en-US" sz="1000" dirty="0"/>
+              <a:t>關鍵字</a:t>
+            </a:r>
+            <a:endParaRPr lang="en-US" sz="900" dirty="0"/>
           </a:p>
         </p:txBody>
       </p:sp>
@@ -4459,23 +5620,23 @@
         <p:spPr>
           <a:xfrm>
             <a:off x="2743200" y="1234440"/>
-            <a:ext cx="2743200" cy="274320"/>
-          </a:xfrm>
-          <a:prstGeom prst="rect">
-            <a:avLst/>
-          </a:prstGeom>
-          <a:noFill/>
-          <a:ln/>
-        </p:spPr>
-        <p:txBody>
-          <a:bodyPr wrap="square" rtlCol="0" anchor="ctr"/>
-          <a:lstStyle/>
-          <a:p>
-            <a:pPr indent="0" marL="0">
-              <a:buNone/>
-            </a:pPr>
-            <a:r>
-              <a:rPr lang="en-US" sz="1000" b="1" dirty="0">
+            <a:ext cx="2560320" cy="228600"/>
+          </a:xfrm>
+          <a:prstGeom prst="rect">
+            <a:avLst/>
+          </a:prstGeom>
+          <a:noFill/>
+          <a:ln/>
+        </p:spPr>
+        <p:txBody>
+          <a:bodyPr wrap="square" rtlCol="0" anchor="ctr"/>
+          <a:lstStyle/>
+          <a:p>
+            <a:pPr indent="0" marL="0">
+              <a:buNone/>
+            </a:pPr>
+            <a:r>
+              <a:rPr lang="en-US" sz="900" b="1" dirty="0">
                 <a:solidFill>
                   <a:srgbClr val="8B8FA3"/>
                 </a:solidFill>
@@ -4485,7 +5646,7 @@
               </a:rPr>
               <a:t>被殺進程</a:t>
             </a:r>
-            <a:endParaRPr lang="en-US" sz="1000" dirty="0"/>
+            <a:endParaRPr lang="en-US" sz="900" dirty="0"/>
           </a:p>
         </p:txBody>
       </p:sp>
@@ -4497,24 +5658,24 @@
         </p:nvSpPr>
         <p:spPr>
           <a:xfrm>
-            <a:off x="5486400" y="1234440"/>
-            <a:ext cx="731520" cy="274320"/>
-          </a:xfrm>
-          <a:prstGeom prst="rect">
-            <a:avLst/>
-          </a:prstGeom>
-          <a:noFill/>
-          <a:ln/>
-        </p:spPr>
-        <p:txBody>
-          <a:bodyPr wrap="square" rtlCol="0" anchor="ctr"/>
-          <a:lstStyle/>
-          <a:p>
-            <a:pPr indent="0" marL="0">
-              <a:buNone/>
-            </a:pPr>
-            <a:r>
-              <a:rPr lang="en-US" sz="1000" b="1" dirty="0">
+            <a:off x="5303520" y="1234440"/>
+            <a:ext cx="914400" cy="228600"/>
+          </a:xfrm>
+          <a:prstGeom prst="rect">
+            <a:avLst/>
+          </a:prstGeom>
+          <a:noFill/>
+          <a:ln/>
+        </p:spPr>
+        <p:txBody>
+          <a:bodyPr wrap="square" rtlCol="0" anchor="ctr"/>
+          <a:lstStyle/>
+          <a:p>
+            <a:pPr indent="0" marL="0">
+              <a:buNone/>
+            </a:pPr>
+            <a:r>
+              <a:rPr lang="en-US" sz="900" b="1" dirty="0">
                 <a:solidFill>
                   <a:srgbClr val="8B8FA3"/>
                 </a:solidFill>
@@ -4524,7 +5685,7 @@
               </a:rPr>
               <a:t>狀態</a:t>
             </a:r>
-            <a:endParaRPr lang="en-US" sz="1000" dirty="0"/>
+            <a:endParaRPr lang="en-US" sz="900" dirty="0"/>
           </a:p>
         </p:txBody>
       </p:sp>
@@ -4536,24 +5697,24 @@
         </p:nvSpPr>
         <p:spPr>
           <a:xfrm>
-            <a:off x="6400800" y="1234440"/>
-            <a:ext cx="5029200" cy="274320"/>
-          </a:xfrm>
-          <a:prstGeom prst="rect">
-            <a:avLst/>
-          </a:prstGeom>
-          <a:noFill/>
-          <a:ln/>
-        </p:spPr>
-        <p:txBody>
-          <a:bodyPr wrap="square" rtlCol="0" anchor="ctr"/>
-          <a:lstStyle/>
-          <a:p>
-            <a:pPr indent="0" marL="0">
-              <a:buNone/>
-            </a:pPr>
-            <a:r>
-              <a:rPr lang="en-US" sz="1000" b="1" dirty="0">
+            <a:off x="6309360" y="1234440"/>
+            <a:ext cx="5029200" cy="228600"/>
+          </a:xfrm>
+          <a:prstGeom prst="rect">
+            <a:avLst/>
+          </a:prstGeom>
+          <a:noFill/>
+          <a:ln/>
+        </p:spPr>
+        <p:txBody>
+          <a:bodyPr wrap="square" rtlCol="0" anchor="ctr"/>
+          <a:lstStyle/>
+          <a:p>
+            <a:pPr indent="0" marL="0">
+              <a:buNone/>
+            </a:pPr>
+            <a:r>
+              <a:rPr lang="en-US" sz="900" b="1" dirty="0">
                 <a:solidFill>
                   <a:srgbClr val="8B8FA3"/>
                 </a:solidFill>
@@ -4563,7 +5724,7 @@
               </a:rPr>
               <a:t>意義</a:t>
             </a:r>
-            <a:endParaRPr lang="en-US" sz="1000" dirty="0"/>
+            <a:endParaRPr lang="en-US" sz="900" dirty="0"/>
           </a:p>
         </p:txBody>
       </p:sp>
@@ -4575,34 +5736,34 @@
         </p:nvSpPr>
         <p:spPr>
           <a:xfrm>
-            <a:off x="731520" y="1645920"/>
-            <a:ext cx="1371600" cy="365760"/>
-          </a:xfrm>
-          <a:prstGeom prst="rect">
-            <a:avLst/>
-          </a:prstGeom>
-          <a:noFill/>
-          <a:ln/>
-        </p:spPr>
-        <p:txBody>
-          <a:bodyPr wrap="square" rtlCol="0" anchor="ctr"/>
-          <a:lstStyle/>
-          <a:p>
-            <a:pPr indent="0" marL="0">
-              <a:buNone/>
-            </a:pPr>
-            <a:r>
-              <a:rPr lang="en-US" sz="1000" dirty="0">
-                <a:solidFill>
-                  <a:srgbClr val="FFD644"/>
+            <a:off x="731520" y="1508760"/>
+            <a:ext cx="640080" cy="274320"/>
+          </a:xfrm>
+          <a:prstGeom prst="rect">
+            <a:avLst/>
+          </a:prstGeom>
+          <a:noFill/>
+          <a:ln/>
+        </p:spPr>
+        <p:txBody>
+          <a:bodyPr wrap="square" rtlCol="0" anchor="ctr"/>
+          <a:lstStyle/>
+          <a:p>
+            <a:pPr indent="0" marL="0">
+              <a:buNone/>
+            </a:pPr>
+            <a:r>
+              <a:rPr lang="en-US" sz="800" dirty="0">
+                <a:solidFill>
+                  <a:srgbClr val="8B8FA3"/>
                 </a:solidFill>
                 <a:latin typeface="Consolas" pitchFamily="34" charset="0"/>
                 <a:ea typeface="Consolas" pitchFamily="34" charset="-122"/>
                 <a:cs typeface="Consolas" pitchFamily="34" charset="-120"/>
               </a:rPr>
-              <a:t>13:01:01.308</a:t>
-            </a:r>
-            <a:endParaRPr lang="en-US" sz="1000" dirty="0"/>
+              <a:t>15714</a:t>
+            </a:r>
+            <a:endParaRPr lang="en-US" sz="800" dirty="0"/>
           </a:p>
         </p:txBody>
       </p:sp>
@@ -4614,24 +5775,24 @@
         </p:nvSpPr>
         <p:spPr>
           <a:xfrm>
-            <a:off x="2103120" y="1645920"/>
-            <a:ext cx="640080" cy="365760"/>
-          </a:xfrm>
-          <a:prstGeom prst="rect">
-            <a:avLst/>
-          </a:prstGeom>
-          <a:noFill/>
-          <a:ln/>
-        </p:spPr>
-        <p:txBody>
-          <a:bodyPr wrap="square" rtlCol="0" anchor="ctr"/>
-          <a:lstStyle/>
-          <a:p>
-            <a:pPr indent="0" marL="0">
-              <a:buNone/>
-            </a:pPr>
-            <a:r>
-              <a:rPr lang="en-US" sz="1000" dirty="0">
+            <a:off x="1371600" y="1508760"/>
+            <a:ext cx="1371600" cy="274320"/>
+          </a:xfrm>
+          <a:prstGeom prst="rect">
+            <a:avLst/>
+          </a:prstGeom>
+          <a:noFill/>
+          <a:ln/>
+        </p:spPr>
+        <p:txBody>
+          <a:bodyPr wrap="square" rtlCol="0" anchor="ctr"/>
+          <a:lstStyle/>
+          <a:p>
+            <a:pPr indent="0" marL="0">
+              <a:buNone/>
+            </a:pPr>
+            <a:r>
+              <a:rPr lang="en-US" sz="800" dirty="0">
                 <a:solidFill>
                   <a:srgbClr val="8B8FA3"/>
                 </a:solidFill>
@@ -4639,9 +5800,9 @@
                 <a:ea typeface="Consolas" pitchFamily="34" charset="-122"/>
                 <a:cs typeface="Consolas" pitchFamily="34" charset="-120"/>
               </a:rPr>
-              <a:t>16293</a:t>
-            </a:r>
-            <a:endParaRPr lang="en-US" sz="1000" dirty="0"/>
+              <a:t>lmkd.reinit</a:t>
+            </a:r>
+            <a:endParaRPr lang="en-US" sz="800" dirty="0"/>
           </a:p>
         </p:txBody>
       </p:sp>
@@ -4653,34 +5814,34 @@
         </p:nvSpPr>
         <p:spPr>
           <a:xfrm>
-            <a:off x="2743200" y="1645920"/>
-            <a:ext cx="2743200" cy="365760"/>
-          </a:xfrm>
-          <a:prstGeom prst="rect">
-            <a:avLst/>
-          </a:prstGeom>
-          <a:noFill/>
-          <a:ln/>
-        </p:spPr>
-        <p:txBody>
-          <a:bodyPr wrap="square" rtlCol="0" anchor="ctr"/>
-          <a:lstStyle/>
-          <a:p>
-            <a:pPr indent="0" marL="0">
-              <a:buNone/>
-            </a:pPr>
-            <a:r>
-              <a:rPr lang="en-US" sz="1000" dirty="0">
-                <a:solidFill>
-                  <a:srgbClr val="FFD644"/>
+            <a:off x="2743200" y="1508760"/>
+            <a:ext cx="2560320" cy="274320"/>
+          </a:xfrm>
+          <a:prstGeom prst="rect">
+            <a:avLst/>
+          </a:prstGeom>
+          <a:noFill/>
+          <a:ln/>
+        </p:spPr>
+        <p:txBody>
+          <a:bodyPr wrap="square" rtlCol="0" anchor="ctr"/>
+          <a:lstStyle/>
+          <a:p>
+            <a:pPr indent="0" marL="0">
+              <a:buNone/>
+            </a:pPr>
+            <a:r>
+              <a:rPr lang="en-US" sz="800" dirty="0">
+                <a:solidFill>
+                  <a:srgbClr val="8B8FA3"/>
                 </a:solidFill>
                 <a:latin typeface="Microsoft JhengHei" pitchFamily="34" charset="0"/>
                 <a:ea typeface="Microsoft JhengHei" pitchFamily="34" charset="-122"/>
                 <a:cs typeface="Microsoft JhengHei" pitchFamily="34" charset="-120"/>
               </a:rPr>
-              <a:t>com.google.android.gms</a:t>
-            </a:r>
-            <a:endParaRPr lang="en-US" sz="1000" dirty="0"/>
+              <a:t>-</a:t>
+            </a:r>
+            <a:endParaRPr lang="en-US" sz="800" dirty="0"/>
           </a:p>
         </p:txBody>
       </p:sp>
@@ -4692,34 +5853,34 @@
         </p:nvSpPr>
         <p:spPr>
           <a:xfrm>
-            <a:off x="5486400" y="1645920"/>
-            <a:ext cx="731520" cy="365760"/>
-          </a:xfrm>
-          <a:prstGeom prst="rect">
-            <a:avLst/>
-          </a:prstGeom>
-          <a:noFill/>
-          <a:ln/>
-        </p:spPr>
-        <p:txBody>
-          <a:bodyPr wrap="square" rtlCol="0" anchor="ctr"/>
-          <a:lstStyle/>
-          <a:p>
-            <a:pPr indent="0" marL="0">
-              <a:buNone/>
-            </a:pPr>
-            <a:r>
-              <a:rPr lang="en-US" sz="1000" dirty="0">
-                <a:solidFill>
-                  <a:srgbClr val="FFD644"/>
+            <a:off x="5303520" y="1508760"/>
+            <a:ext cx="914400" cy="274320"/>
+          </a:xfrm>
+          <a:prstGeom prst="rect">
+            <a:avLst/>
+          </a:prstGeom>
+          <a:noFill/>
+          <a:ln/>
+        </p:spPr>
+        <p:txBody>
+          <a:bodyPr wrap="square" rtlCol="0" anchor="ctr"/>
+          <a:lstStyle/>
+          <a:p>
+            <a:pPr indent="0" marL="0">
+              <a:buNone/>
+            </a:pPr>
+            <a:r>
+              <a:rPr lang="en-US" sz="800" dirty="0">
+                <a:solidFill>
+                  <a:srgbClr val="8B8FA3"/>
                 </a:solidFill>
                 <a:latin typeface="Consolas" pitchFamily="34" charset="0"/>
                 <a:ea typeface="Consolas" pitchFamily="34" charset="-122"/>
                 <a:cs typeface="Consolas" pitchFamily="34" charset="-120"/>
               </a:rPr>
-              <a:t>BTOP</a:t>
-            </a:r>
-            <a:endParaRPr lang="en-US" sz="1000" dirty="0"/>
+              <a:t>-</a:t>
+            </a:r>
+            <a:endParaRPr lang="en-US" sz="800" dirty="0"/>
           </a:p>
         </p:txBody>
       </p:sp>
@@ -4731,24 +5892,24 @@
         </p:nvSpPr>
         <p:spPr>
           <a:xfrm>
-            <a:off x="6400800" y="1645920"/>
-            <a:ext cx="5212080" cy="365760"/>
-          </a:xfrm>
-          <a:prstGeom prst="rect">
-            <a:avLst/>
-          </a:prstGeom>
-          <a:noFill/>
-          <a:ln/>
-        </p:spPr>
-        <p:txBody>
-          <a:bodyPr wrap="square" rtlCol="0" anchor="ctr"/>
-          <a:lstStyle/>
-          <a:p>
-            <a:pPr indent="0" marL="0">
-              <a:buNone/>
-            </a:pPr>
-            <a:r>
-              <a:rPr lang="en-US" sz="1000" dirty="0">
+            <a:off x="6309360" y="1508760"/>
+            <a:ext cx="5212080" cy="274320"/>
+          </a:xfrm>
+          <a:prstGeom prst="rect">
+            <a:avLst/>
+          </a:prstGeom>
+          <a:noFill/>
+          <a:ln/>
+        </p:spPr>
+        <p:txBody>
+          <a:bodyPr wrap="square" rtlCol="0" anchor="ctr"/>
+          <a:lstStyle/>
+          <a:p>
+            <a:pPr indent="0" marL="0">
+              <a:buNone/>
+            </a:pPr>
+            <a:r>
+              <a:rPr lang="en-US" sz="900" dirty="0">
                 <a:solidFill>
                   <a:srgbClr val="E0E0E6"/>
                 </a:solidFill>
@@ -4756,9 +5917,9 @@
                 <a:ea typeface="Microsoft JhengHei" pitchFamily="34" charset="-122"/>
                 <a:cs typeface="Microsoft JhengHei" pitchFamily="34" charset="-120"/>
               </a:rPr>
-              <a:t>Google Play Services — 與 BR#1 相同，最先被殺</a:t>
-            </a:r>
-            <a:endParaRPr lang="en-US" sz="1000" dirty="0"/>
+              <a:t>LMKD 被重新初始化 — 與 BR#1 一致</a:t>
+            </a:r>
+            <a:endParaRPr lang="en-US" sz="900" dirty="0"/>
           </a:p>
         </p:txBody>
       </p:sp>
@@ -4770,34 +5931,34 @@
         </p:nvSpPr>
         <p:spPr>
           <a:xfrm>
-            <a:off x="731520" y="2212848"/>
-            <a:ext cx="1371600" cy="365760"/>
-          </a:xfrm>
-          <a:prstGeom prst="rect">
-            <a:avLst/>
-          </a:prstGeom>
-          <a:noFill/>
-          <a:ln/>
-        </p:spPr>
-        <p:txBody>
-          <a:bodyPr wrap="square" rtlCol="0" anchor="ctr"/>
-          <a:lstStyle/>
-          <a:p>
-            <a:pPr indent="0" marL="0">
-              <a:buNone/>
-            </a:pPr>
-            <a:r>
-              <a:rPr lang="en-US" sz="1000" dirty="0">
-                <a:solidFill>
-                  <a:srgbClr val="FFD644"/>
+            <a:off x="731520" y="1856232"/>
+            <a:ext cx="640080" cy="274320"/>
+          </a:xfrm>
+          <a:prstGeom prst="rect">
+            <a:avLst/>
+          </a:prstGeom>
+          <a:noFill/>
+          <a:ln/>
+        </p:spPr>
+        <p:txBody>
+          <a:bodyPr wrap="square" rtlCol="0" anchor="ctr"/>
+          <a:lstStyle/>
+          <a:p>
+            <a:pPr indent="0" marL="0">
+              <a:buNone/>
+            </a:pPr>
+            <a:r>
+              <a:rPr lang="en-US" sz="800" dirty="0">
+                <a:solidFill>
+                  <a:srgbClr val="8B8FA3"/>
                 </a:solidFill>
                 <a:latin typeface="Consolas" pitchFamily="34" charset="0"/>
                 <a:ea typeface="Consolas" pitchFamily="34" charset="-122"/>
                 <a:cs typeface="Consolas" pitchFamily="34" charset="-120"/>
               </a:rPr>
-              <a:t>13:01:01.356</a:t>
-            </a:r>
-            <a:endParaRPr lang="en-US" sz="1000" dirty="0"/>
+              <a:t>16293</a:t>
+            </a:r>
+            <a:endParaRPr lang="en-US" sz="800" dirty="0"/>
           </a:p>
         </p:txBody>
       </p:sp>
@@ -4809,34 +5970,34 @@
         </p:nvSpPr>
         <p:spPr>
           <a:xfrm>
-            <a:off x="2103120" y="2212848"/>
-            <a:ext cx="640080" cy="365760"/>
-          </a:xfrm>
-          <a:prstGeom prst="rect">
-            <a:avLst/>
-          </a:prstGeom>
-          <a:noFill/>
-          <a:ln/>
-        </p:spPr>
-        <p:txBody>
-          <a:bodyPr wrap="square" rtlCol="0" anchor="ctr"/>
-          <a:lstStyle/>
-          <a:p>
-            <a:pPr indent="0" marL="0">
-              <a:buNone/>
-            </a:pPr>
-            <a:r>
-              <a:rPr lang="en-US" sz="1000" dirty="0">
-                <a:solidFill>
-                  <a:srgbClr val="8B8FA3"/>
+            <a:off x="1371600" y="1856232"/>
+            <a:ext cx="1371600" cy="274320"/>
+          </a:xfrm>
+          <a:prstGeom prst="rect">
+            <a:avLst/>
+          </a:prstGeom>
+          <a:noFill/>
+          <a:ln/>
+        </p:spPr>
+        <p:txBody>
+          <a:bodyPr wrap="square" rtlCol="0" anchor="ctr"/>
+          <a:lstStyle/>
+          <a:p>
+            <a:pPr indent="0" marL="0">
+              <a:buNone/>
+            </a:pPr>
+            <a:r>
+              <a:rPr lang="en-US" sz="800" dirty="0">
+                <a:solidFill>
+                  <a:srgbClr val="FFD644"/>
                 </a:solidFill>
                 <a:latin typeface="Consolas" pitchFamily="34" charset="0"/>
                 <a:ea typeface="Consolas" pitchFamily="34" charset="-122"/>
                 <a:cs typeface="Consolas" pitchFamily="34" charset="-120"/>
               </a:rPr>
-              <a:t>16299</a:t>
-            </a:r>
-            <a:endParaRPr lang="en-US" sz="1000" dirty="0"/>
+              <a:t>oom_reaper</a:t>
+            </a:r>
+            <a:endParaRPr lang="en-US" sz="800" dirty="0"/>
           </a:p>
         </p:txBody>
       </p:sp>
@@ -4848,24 +6009,24 @@
         </p:nvSpPr>
         <p:spPr>
           <a:xfrm>
-            <a:off x="2743200" y="2212848"/>
-            <a:ext cx="2743200" cy="365760"/>
-          </a:xfrm>
-          <a:prstGeom prst="rect">
-            <a:avLst/>
-          </a:prstGeom>
-          <a:noFill/>
-          <a:ln/>
-        </p:spPr>
-        <p:txBody>
-          <a:bodyPr wrap="square" rtlCol="0" anchor="ctr"/>
-          <a:lstStyle/>
-          <a:p>
-            <a:pPr indent="0" marL="0">
-              <a:buNone/>
-            </a:pPr>
-            <a:r>
-              <a:rPr lang="en-US" sz="1000" dirty="0">
+            <a:off x="2743200" y="1856232"/>
+            <a:ext cx="2560320" cy="274320"/>
+          </a:xfrm>
+          <a:prstGeom prst="rect">
+            <a:avLst/>
+          </a:prstGeom>
+          <a:noFill/>
+          <a:ln/>
+        </p:spPr>
+        <p:txBody>
+          <a:bodyPr wrap="square" rtlCol="0" anchor="ctr"/>
+          <a:lstStyle/>
+          <a:p>
+            <a:pPr indent="0" marL="0">
+              <a:buNone/>
+            </a:pPr>
+            <a:r>
+              <a:rPr lang="en-US" sz="800" dirty="0">
                 <a:solidFill>
                   <a:srgbClr val="FFD644"/>
                 </a:solidFill>
@@ -4873,9 +6034,9 @@
                 <a:ea typeface="Microsoft JhengHei" pitchFamily="34" charset="-122"/>
                 <a:cs typeface="Microsoft JhengHei" pitchFamily="34" charset="-120"/>
               </a:rPr>
-              <a:t>com.google.android.as</a:t>
-            </a:r>
-            <a:endParaRPr lang="en-US" sz="1000" dirty="0"/>
+              <a:t>com.google.android.gms</a:t>
+            </a:r>
+            <a:endParaRPr lang="en-US" sz="800" dirty="0"/>
           </a:p>
         </p:txBody>
       </p:sp>
@@ -4887,24 +6048,24 @@
         </p:nvSpPr>
         <p:spPr>
           <a:xfrm>
-            <a:off x="5486400" y="2212848"/>
-            <a:ext cx="731520" cy="365760"/>
-          </a:xfrm>
-          <a:prstGeom prst="rect">
-            <a:avLst/>
-          </a:prstGeom>
-          <a:noFill/>
-          <a:ln/>
-        </p:spPr>
-        <p:txBody>
-          <a:bodyPr wrap="square" rtlCol="0" anchor="ctr"/>
-          <a:lstStyle/>
-          <a:p>
-            <a:pPr indent="0" marL="0">
-              <a:buNone/>
-            </a:pPr>
-            <a:r>
-              <a:rPr lang="en-US" sz="1000" dirty="0">
+            <a:off x="5303520" y="1856232"/>
+            <a:ext cx="914400" cy="274320"/>
+          </a:xfrm>
+          <a:prstGeom prst="rect">
+            <a:avLst/>
+          </a:prstGeom>
+          <a:noFill/>
+          <a:ln/>
+        </p:spPr>
+        <p:txBody>
+          <a:bodyPr wrap="square" rtlCol="0" anchor="ctr"/>
+          <a:lstStyle/>
+          <a:p>
+            <a:pPr indent="0" marL="0">
+              <a:buNone/>
+            </a:pPr>
+            <a:r>
+              <a:rPr lang="en-US" sz="800" dirty="0">
                 <a:solidFill>
                   <a:srgbClr val="FFD644"/>
                 </a:solidFill>
@@ -4912,9 +6073,9 @@
                 <a:ea typeface="Consolas" pitchFamily="34" charset="-122"/>
                 <a:cs typeface="Consolas" pitchFamily="34" charset="-120"/>
               </a:rPr>
-              <a:t>BFGS</a:t>
-            </a:r>
-            <a:endParaRPr lang="en-US" sz="1000" dirty="0"/>
+              <a:t>vis BTOP</a:t>
+            </a:r>
+            <a:endParaRPr lang="en-US" sz="800" dirty="0"/>
           </a:p>
         </p:txBody>
       </p:sp>
@@ -4926,24 +6087,24 @@
         </p:nvSpPr>
         <p:spPr>
           <a:xfrm>
-            <a:off x="6400800" y="2212848"/>
-            <a:ext cx="5212080" cy="365760"/>
-          </a:xfrm>
-          <a:prstGeom prst="rect">
-            <a:avLst/>
-          </a:prstGeom>
-          <a:noFill/>
-          <a:ln/>
-        </p:spPr>
-        <p:txBody>
-          <a:bodyPr wrap="square" rtlCol="0" anchor="ctr"/>
-          <a:lstStyle/>
-          <a:p>
-            <a:pPr indent="0" marL="0">
-              <a:buNone/>
-            </a:pPr>
-            <a:r>
-              <a:rPr lang="en-US" sz="1000" dirty="0">
+            <a:off x="6309360" y="1856232"/>
+            <a:ext cx="5212080" cy="274320"/>
+          </a:xfrm>
+          <a:prstGeom prst="rect">
+            <a:avLst/>
+          </a:prstGeom>
+          <a:noFill/>
+          <a:ln/>
+        </p:spPr>
+        <p:txBody>
+          <a:bodyPr wrap="square" rtlCol="0" anchor="ctr"/>
+          <a:lstStyle/>
+          <a:p>
+            <a:pPr indent="0" marL="0">
+              <a:buNone/>
+            </a:pPr>
+            <a:r>
+              <a:rPr lang="en-US" sz="900" dirty="0">
                 <a:solidFill>
                   <a:srgbClr val="E0E0E6"/>
                 </a:solidFill>
@@ -4951,9 +6112,9 @@
                 <a:ea typeface="Microsoft JhengHei" pitchFamily="34" charset="-122"/>
                 <a:cs typeface="Microsoft JhengHei" pitchFamily="34" charset="-120"/>
               </a:rPr>
-              <a:t>AI 智慧服務 — 與 BR#1 相同順序</a:t>
-            </a:r>
-            <a:endParaRPr lang="en-US" sz="1000" dirty="0"/>
+              <a:t>Google Play Services — 與 BR#1 相同，先被殺</a:t>
+            </a:r>
+            <a:endParaRPr lang="en-US" sz="900" dirty="0"/>
           </a:p>
         </p:txBody>
       </p:sp>
@@ -4965,34 +6126,34 @@
         </p:nvSpPr>
         <p:spPr>
           <a:xfrm>
-            <a:off x="731520" y="2779776"/>
-            <a:ext cx="1371600" cy="365760"/>
-          </a:xfrm>
-          <a:prstGeom prst="rect">
-            <a:avLst/>
-          </a:prstGeom>
-          <a:noFill/>
-          <a:ln/>
-        </p:spPr>
-        <p:txBody>
-          <a:bodyPr wrap="square" rtlCol="0" anchor="ctr"/>
-          <a:lstStyle/>
-          <a:p>
-            <a:pPr indent="0" marL="0">
-              <a:buNone/>
-            </a:pPr>
-            <a:r>
-              <a:rPr lang="en-US" sz="1000" dirty="0">
-                <a:solidFill>
-                  <a:srgbClr val="FFD644"/>
+            <a:off x="731520" y="2203704"/>
+            <a:ext cx="640080" cy="274320"/>
+          </a:xfrm>
+          <a:prstGeom prst="rect">
+            <a:avLst/>
+          </a:prstGeom>
+          <a:noFill/>
+          <a:ln/>
+        </p:spPr>
+        <p:txBody>
+          <a:bodyPr wrap="square" rtlCol="0" anchor="ctr"/>
+          <a:lstStyle/>
+          <a:p>
+            <a:pPr indent="0" marL="0">
+              <a:buNone/>
+            </a:pPr>
+            <a:r>
+              <a:rPr lang="en-US" sz="800" dirty="0">
+                <a:solidFill>
+                  <a:srgbClr val="8B8FA3"/>
                 </a:solidFill>
                 <a:latin typeface="Consolas" pitchFamily="34" charset="0"/>
                 <a:ea typeface="Consolas" pitchFamily="34" charset="-122"/>
                 <a:cs typeface="Consolas" pitchFamily="34" charset="-120"/>
               </a:rPr>
-              <a:t>13:01:01.394</a:t>
-            </a:r>
-            <a:endParaRPr lang="en-US" sz="1000" dirty="0"/>
+              <a:t>16299</a:t>
+            </a:r>
+            <a:endParaRPr lang="en-US" sz="800" dirty="0"/>
           </a:p>
         </p:txBody>
       </p:sp>
@@ -5004,34 +6165,34 @@
         </p:nvSpPr>
         <p:spPr>
           <a:xfrm>
-            <a:off x="2103120" y="2779776"/>
-            <a:ext cx="640080" cy="365760"/>
-          </a:xfrm>
-          <a:prstGeom prst="rect">
-            <a:avLst/>
-          </a:prstGeom>
-          <a:noFill/>
-          <a:ln/>
-        </p:spPr>
-        <p:txBody>
-          <a:bodyPr wrap="square" rtlCol="0" anchor="ctr"/>
-          <a:lstStyle/>
-          <a:p>
-            <a:pPr indent="0" marL="0">
-              <a:buNone/>
-            </a:pPr>
-            <a:r>
-              <a:rPr lang="en-US" sz="1000" dirty="0">
-                <a:solidFill>
-                  <a:srgbClr val="8B8FA3"/>
+            <a:off x="1371600" y="2203704"/>
+            <a:ext cx="1371600" cy="274320"/>
+          </a:xfrm>
+          <a:prstGeom prst="rect">
+            <a:avLst/>
+          </a:prstGeom>
+          <a:noFill/>
+          <a:ln/>
+        </p:spPr>
+        <p:txBody>
+          <a:bodyPr wrap="square" rtlCol="0" anchor="ctr"/>
+          <a:lstStyle/>
+          <a:p>
+            <a:pPr indent="0" marL="0">
+              <a:buNone/>
+            </a:pPr>
+            <a:r>
+              <a:rPr lang="en-US" sz="800" dirty="0">
+                <a:solidFill>
+                  <a:srgbClr val="FFD644"/>
                 </a:solidFill>
                 <a:latin typeface="Consolas" pitchFamily="34" charset="0"/>
                 <a:ea typeface="Consolas" pitchFamily="34" charset="-122"/>
                 <a:cs typeface="Consolas" pitchFamily="34" charset="-120"/>
               </a:rPr>
-              <a:t>16312</a:t>
-            </a:r>
-            <a:endParaRPr lang="en-US" sz="1000" dirty="0"/>
+              <a:t>oom_reaper</a:t>
+            </a:r>
+            <a:endParaRPr lang="en-US" sz="800" dirty="0"/>
           </a:p>
         </p:txBody>
       </p:sp>
@@ -5043,24 +6204,24 @@
         </p:nvSpPr>
         <p:spPr>
           <a:xfrm>
-            <a:off x="2743200" y="2779776"/>
-            <a:ext cx="2743200" cy="365760"/>
-          </a:xfrm>
-          <a:prstGeom prst="rect">
-            <a:avLst/>
-          </a:prstGeom>
-          <a:noFill/>
-          <a:ln/>
-        </p:spPr>
-        <p:txBody>
-          <a:bodyPr wrap="square" rtlCol="0" anchor="ctr"/>
-          <a:lstStyle/>
-          <a:p>
-            <a:pPr indent="0" marL="0">
-              <a:buNone/>
-            </a:pPr>
-            <a:r>
-              <a:rPr lang="en-US" sz="1000" dirty="0">
+            <a:off x="2743200" y="2203704"/>
+            <a:ext cx="2560320" cy="274320"/>
+          </a:xfrm>
+          <a:prstGeom prst="rect">
+            <a:avLst/>
+          </a:prstGeom>
+          <a:noFill/>
+          <a:ln/>
+        </p:spPr>
+        <p:txBody>
+          <a:bodyPr wrap="square" rtlCol="0" anchor="ctr"/>
+          <a:lstStyle/>
+          <a:p>
+            <a:pPr indent="0" marL="0">
+              <a:buNone/>
+            </a:pPr>
+            <a:r>
+              <a:rPr lang="en-US" sz="800" dirty="0">
                 <a:solidFill>
                   <a:srgbClr val="FFD644"/>
                 </a:solidFill>
@@ -5068,9 +6229,9 @@
                 <a:ea typeface="Microsoft JhengHei" pitchFamily="34" charset="-122"/>
                 <a:cs typeface="Microsoft JhengHei" pitchFamily="34" charset="-120"/>
               </a:rPr>
-              <a:t>android.ext.services</a:t>
-            </a:r>
-            <a:endParaRPr lang="en-US" sz="1000" dirty="0"/>
+              <a:t>com.google.android.as</a:t>
+            </a:r>
+            <a:endParaRPr lang="en-US" sz="800" dirty="0"/>
           </a:p>
         </p:txBody>
       </p:sp>
@@ -5082,24 +6243,24 @@
         </p:nvSpPr>
         <p:spPr>
           <a:xfrm>
-            <a:off x="5486400" y="2779776"/>
-            <a:ext cx="731520" cy="365760"/>
-          </a:xfrm>
-          <a:prstGeom prst="rect">
-            <a:avLst/>
-          </a:prstGeom>
-          <a:noFill/>
-          <a:ln/>
-        </p:spPr>
-        <p:txBody>
-          <a:bodyPr wrap="square" rtlCol="0" anchor="ctr"/>
-          <a:lstStyle/>
-          <a:p>
-            <a:pPr indent="0" marL="0">
-              <a:buNone/>
-            </a:pPr>
-            <a:r>
-              <a:rPr lang="en-US" sz="1000" dirty="0">
+            <a:off x="5303520" y="2203704"/>
+            <a:ext cx="914400" cy="274320"/>
+          </a:xfrm>
+          <a:prstGeom prst="rect">
+            <a:avLst/>
+          </a:prstGeom>
+          <a:noFill/>
+          <a:ln/>
+        </p:spPr>
+        <p:txBody>
+          <a:bodyPr wrap="square" rtlCol="0" anchor="ctr"/>
+          <a:lstStyle/>
+          <a:p>
+            <a:pPr indent="0" marL="0">
+              <a:buNone/>
+            </a:pPr>
+            <a:r>
+              <a:rPr lang="en-US" sz="800" dirty="0">
                 <a:solidFill>
                   <a:srgbClr val="FFD644"/>
                 </a:solidFill>
@@ -5107,9 +6268,9 @@
                 <a:ea typeface="Consolas" pitchFamily="34" charset="-122"/>
                 <a:cs typeface="Consolas" pitchFamily="34" charset="-120"/>
               </a:rPr>
-              <a:t>BFGS</a:t>
-            </a:r>
-            <a:endParaRPr lang="en-US" sz="1000" dirty="0"/>
+              <a:t>vis BFGS</a:t>
+            </a:r>
+            <a:endParaRPr lang="en-US" sz="800" dirty="0"/>
           </a:p>
         </p:txBody>
       </p:sp>
@@ -5121,24 +6282,24 @@
         </p:nvSpPr>
         <p:spPr>
           <a:xfrm>
-            <a:off x="6400800" y="2779776"/>
-            <a:ext cx="5212080" cy="365760"/>
-          </a:xfrm>
-          <a:prstGeom prst="rect">
-            <a:avLst/>
-          </a:prstGeom>
-          <a:noFill/>
-          <a:ln/>
-        </p:spPr>
-        <p:txBody>
-          <a:bodyPr wrap="square" rtlCol="0" anchor="ctr"/>
-          <a:lstStyle/>
-          <a:p>
-            <a:pPr indent="0" marL="0">
-              <a:buNone/>
-            </a:pPr>
-            <a:r>
-              <a:rPr lang="en-US" sz="1000" dirty="0">
+            <a:off x="6309360" y="2203704"/>
+            <a:ext cx="5212080" cy="274320"/>
+          </a:xfrm>
+          <a:prstGeom prst="rect">
+            <a:avLst/>
+          </a:prstGeom>
+          <a:noFill/>
+          <a:ln/>
+        </p:spPr>
+        <p:txBody>
+          <a:bodyPr wrap="square" rtlCol="0" anchor="ctr"/>
+          <a:lstStyle/>
+          <a:p>
+            <a:pPr indent="0" marL="0">
+              <a:buNone/>
+            </a:pPr>
+            <a:r>
+              <a:rPr lang="en-US" sz="900" dirty="0">
                 <a:solidFill>
                   <a:srgbClr val="E0E0E6"/>
                 </a:solidFill>
@@ -5146,9 +6307,9 @@
                 <a:ea typeface="Microsoft JhengHei" pitchFamily="34" charset="-122"/>
                 <a:cs typeface="Microsoft JhengHei" pitchFamily="34" charset="-120"/>
               </a:rPr>
-              <a:t>通知助手 — 與 BR#1 相同順序</a:t>
-            </a:r>
-            <a:endParaRPr lang="en-US" sz="1000" dirty="0"/>
+              <a:t>AI 智慧服務 — 與 BR#1 相同順序</a:t>
+            </a:r>
+            <a:endParaRPr lang="en-US" sz="900" dirty="0"/>
           </a:p>
         </p:txBody>
       </p:sp>
@@ -5160,34 +6321,34 @@
         </p:nvSpPr>
         <p:spPr>
           <a:xfrm>
-            <a:off x="731520" y="3346704"/>
-            <a:ext cx="1371600" cy="365760"/>
-          </a:xfrm>
-          <a:prstGeom prst="rect">
-            <a:avLst/>
-          </a:prstGeom>
-          <a:noFill/>
-          <a:ln/>
-        </p:spPr>
-        <p:txBody>
-          <a:bodyPr wrap="square" rtlCol="0" anchor="ctr"/>
-          <a:lstStyle/>
-          <a:p>
-            <a:pPr indent="0" marL="0">
-              <a:buNone/>
-            </a:pPr>
-            <a:r>
-              <a:rPr lang="en-US" sz="1000" dirty="0">
-                <a:solidFill>
-                  <a:srgbClr val="FFAA44"/>
+            <a:off x="731520" y="2551176"/>
+            <a:ext cx="640080" cy="274320"/>
+          </a:xfrm>
+          <a:prstGeom prst="rect">
+            <a:avLst/>
+          </a:prstGeom>
+          <a:noFill/>
+          <a:ln/>
+        </p:spPr>
+        <p:txBody>
+          <a:bodyPr wrap="square" rtlCol="0" anchor="ctr"/>
+          <a:lstStyle/>
+          <a:p>
+            <a:pPr indent="0" marL="0">
+              <a:buNone/>
+            </a:pPr>
+            <a:r>
+              <a:rPr lang="en-US" sz="800" dirty="0">
+                <a:solidFill>
+                  <a:srgbClr val="8B8FA3"/>
                 </a:solidFill>
                 <a:latin typeface="Consolas" pitchFamily="34" charset="0"/>
                 <a:ea typeface="Consolas" pitchFamily="34" charset="-122"/>
                 <a:cs typeface="Consolas" pitchFamily="34" charset="-120"/>
               </a:rPr>
-              <a:t>13:01:01.481</a:t>
-            </a:r>
-            <a:endParaRPr lang="en-US" sz="1000" dirty="0"/>
+              <a:t>16312</a:t>
+            </a:r>
+            <a:endParaRPr lang="en-US" sz="800" dirty="0"/>
           </a:p>
         </p:txBody>
       </p:sp>
@@ -5199,34 +6360,34 @@
         </p:nvSpPr>
         <p:spPr>
           <a:xfrm>
-            <a:off x="2103120" y="3346704"/>
-            <a:ext cx="640080" cy="365760"/>
-          </a:xfrm>
-          <a:prstGeom prst="rect">
-            <a:avLst/>
-          </a:prstGeom>
-          <a:noFill/>
-          <a:ln/>
-        </p:spPr>
-        <p:txBody>
-          <a:bodyPr wrap="square" rtlCol="0" anchor="ctr"/>
-          <a:lstStyle/>
-          <a:p>
-            <a:pPr indent="0" marL="0">
-              <a:buNone/>
-            </a:pPr>
-            <a:r>
-              <a:rPr lang="en-US" sz="1000" dirty="0">
-                <a:solidFill>
-                  <a:srgbClr val="8B8FA3"/>
+            <a:off x="1371600" y="2551176"/>
+            <a:ext cx="1371600" cy="274320"/>
+          </a:xfrm>
+          <a:prstGeom prst="rect">
+            <a:avLst/>
+          </a:prstGeom>
+          <a:noFill/>
+          <a:ln/>
+        </p:spPr>
+        <p:txBody>
+          <a:bodyPr wrap="square" rtlCol="0" anchor="ctr"/>
+          <a:lstStyle/>
+          <a:p>
+            <a:pPr indent="0" marL="0">
+              <a:buNone/>
+            </a:pPr>
+            <a:r>
+              <a:rPr lang="en-US" sz="800" dirty="0">
+                <a:solidFill>
+                  <a:srgbClr val="FFD644"/>
                 </a:solidFill>
                 <a:latin typeface="Consolas" pitchFamily="34" charset="0"/>
                 <a:ea typeface="Consolas" pitchFamily="34" charset="-122"/>
                 <a:cs typeface="Consolas" pitchFamily="34" charset="-120"/>
               </a:rPr>
-              <a:t>16322</a:t>
-            </a:r>
-            <a:endParaRPr lang="en-US" sz="1000" dirty="0"/>
+              <a:t>oom_reaper</a:t>
+            </a:r>
+            <a:endParaRPr lang="en-US" sz="800" dirty="0"/>
           </a:p>
         </p:txBody>
       </p:sp>
@@ -5238,34 +6399,34 @@
         </p:nvSpPr>
         <p:spPr>
           <a:xfrm>
-            <a:off x="2743200" y="3346704"/>
-            <a:ext cx="2743200" cy="365760"/>
-          </a:xfrm>
-          <a:prstGeom prst="rect">
-            <a:avLst/>
-          </a:prstGeom>
-          <a:noFill/>
-          <a:ln/>
-        </p:spPr>
-        <p:txBody>
-          <a:bodyPr wrap="square" rtlCol="0" anchor="ctr"/>
-          <a:lstStyle/>
-          <a:p>
-            <a:pPr indent="0" marL="0">
-              <a:buNone/>
-            </a:pPr>
-            <a:r>
-              <a:rPr lang="en-US" sz="1000" dirty="0">
-                <a:solidFill>
-                  <a:srgbClr val="FFAA44"/>
+            <a:off x="2743200" y="2551176"/>
+            <a:ext cx="2560320" cy="274320"/>
+          </a:xfrm>
+          <a:prstGeom prst="rect">
+            <a:avLst/>
+          </a:prstGeom>
+          <a:noFill/>
+          <a:ln/>
+        </p:spPr>
+        <p:txBody>
+          <a:bodyPr wrap="square" rtlCol="0" anchor="ctr"/>
+          <a:lstStyle/>
+          <a:p>
+            <a:pPr indent="0" marL="0">
+              <a:buNone/>
+            </a:pPr>
+            <a:r>
+              <a:rPr lang="en-US" sz="800" dirty="0">
+                <a:solidFill>
+                  <a:srgbClr val="FFD644"/>
                 </a:solidFill>
                 <a:latin typeface="Microsoft JhengHei" pitchFamily="34" charset="0"/>
                 <a:ea typeface="Microsoft JhengHei" pitchFamily="34" charset="-122"/>
                 <a:cs typeface="Microsoft JhengHei" pitchFamily="34" charset="-120"/>
               </a:rPr>
-              <a:t>com.android.launcher3</a:t>
-            </a:r>
-            <a:endParaRPr lang="en-US" sz="1000" dirty="0"/>
+              <a:t>android.ext.services</a:t>
+            </a:r>
+            <a:endParaRPr lang="en-US" sz="800" dirty="0"/>
           </a:p>
         </p:txBody>
       </p:sp>
@@ -5277,34 +6438,34 @@
         </p:nvSpPr>
         <p:spPr>
           <a:xfrm>
-            <a:off x="5486400" y="3346704"/>
-            <a:ext cx="731520" cy="365760"/>
-          </a:xfrm>
-          <a:prstGeom prst="rect">
-            <a:avLst/>
-          </a:prstGeom>
-          <a:noFill/>
-          <a:ln/>
-        </p:spPr>
-        <p:txBody>
-          <a:bodyPr wrap="square" rtlCol="0" anchor="ctr"/>
-          <a:lstStyle/>
-          <a:p>
-            <a:pPr indent="0" marL="0">
-              <a:buNone/>
-            </a:pPr>
-            <a:r>
-              <a:rPr lang="en-US" sz="1000" dirty="0">
-                <a:solidFill>
-                  <a:srgbClr val="FFAA44"/>
+            <a:off x="5303520" y="2551176"/>
+            <a:ext cx="914400" cy="274320"/>
+          </a:xfrm>
+          <a:prstGeom prst="rect">
+            <a:avLst/>
+          </a:prstGeom>
+          <a:noFill/>
+          <a:ln/>
+        </p:spPr>
+        <p:txBody>
+          <a:bodyPr wrap="square" rtlCol="0" anchor="ctr"/>
+          <a:lstStyle/>
+          <a:p>
+            <a:pPr indent="0" marL="0">
+              <a:buNone/>
+            </a:pPr>
+            <a:r>
+              <a:rPr lang="en-US" sz="800" dirty="0">
+                <a:solidFill>
+                  <a:srgbClr val="FFD644"/>
                 </a:solidFill>
                 <a:latin typeface="Consolas" pitchFamily="34" charset="0"/>
                 <a:ea typeface="Consolas" pitchFamily="34" charset="-122"/>
                 <a:cs typeface="Consolas" pitchFamily="34" charset="-120"/>
               </a:rPr>
-              <a:t>BFGS</a:t>
-            </a:r>
-            <a:endParaRPr lang="en-US" sz="1000" dirty="0"/>
+              <a:t>vis BFGS</a:t>
+            </a:r>
+            <a:endParaRPr lang="en-US" sz="800" dirty="0"/>
           </a:p>
         </p:txBody>
       </p:sp>
@@ -5316,24 +6477,24 @@
         </p:nvSpPr>
         <p:spPr>
           <a:xfrm>
-            <a:off x="6400800" y="3346704"/>
-            <a:ext cx="5212080" cy="365760"/>
-          </a:xfrm>
-          <a:prstGeom prst="rect">
-            <a:avLst/>
-          </a:prstGeom>
-          <a:noFill/>
-          <a:ln/>
-        </p:spPr>
-        <p:txBody>
-          <a:bodyPr wrap="square" rtlCol="0" anchor="ctr"/>
-          <a:lstStyle/>
-          <a:p>
-            <a:pPr indent="0" marL="0">
-              <a:buNone/>
-            </a:pPr>
-            <a:r>
-              <a:rPr lang="en-US" sz="1000" dirty="0">
+            <a:off x="6309360" y="2551176"/>
+            <a:ext cx="5212080" cy="274320"/>
+          </a:xfrm>
+          <a:prstGeom prst="rect">
+            <a:avLst/>
+          </a:prstGeom>
+          <a:noFill/>
+          <a:ln/>
+        </p:spPr>
+        <p:txBody>
+          <a:bodyPr wrap="square" rtlCol="0" anchor="ctr"/>
+          <a:lstStyle/>
+          <a:p>
+            <a:pPr indent="0" marL="0">
+              <a:buNone/>
+            </a:pPr>
+            <a:r>
+              <a:rPr lang="en-US" sz="900" dirty="0">
                 <a:solidFill>
                   <a:srgbClr val="E0E0E6"/>
                 </a:solidFill>
@@ -5341,9 +6502,9 @@
                 <a:ea typeface="Microsoft JhengHei" pitchFamily="34" charset="-122"/>
                 <a:cs typeface="Microsoft JhengHei" pitchFamily="34" charset="-120"/>
               </a:rPr>
-              <a:t>桌面 Launcher — 連桌面都殺了</a:t>
-            </a:r>
-            <a:endParaRPr lang="en-US" sz="1000" dirty="0"/>
+              <a:t>通知助手 — 與 BR#1 相同順序</a:t>
+            </a:r>
+            <a:endParaRPr lang="en-US" sz="900" dirty="0"/>
           </a:p>
         </p:txBody>
       </p:sp>
@@ -5355,34 +6516,34 @@
         </p:nvSpPr>
         <p:spPr>
           <a:xfrm>
-            <a:off x="731520" y="3913632"/>
-            <a:ext cx="1371600" cy="365760"/>
-          </a:xfrm>
-          <a:prstGeom prst="rect">
-            <a:avLst/>
-          </a:prstGeom>
-          <a:noFill/>
-          <a:ln/>
-        </p:spPr>
-        <p:txBody>
-          <a:bodyPr wrap="square" rtlCol="0" anchor="ctr"/>
-          <a:lstStyle/>
-          <a:p>
-            <a:pPr indent="0" marL="0">
-              <a:buNone/>
-            </a:pPr>
-            <a:r>
-              <a:rPr lang="en-US" sz="1000" dirty="0">
-                <a:solidFill>
-                  <a:srgbClr val="FFD644"/>
+            <a:off x="731520" y="2898648"/>
+            <a:ext cx="640080" cy="274320"/>
+          </a:xfrm>
+          <a:prstGeom prst="rect">
+            <a:avLst/>
+          </a:prstGeom>
+          <a:noFill/>
+          <a:ln/>
+        </p:spPr>
+        <p:txBody>
+          <a:bodyPr wrap="square" rtlCol="0" anchor="ctr"/>
+          <a:lstStyle/>
+          <a:p>
+            <a:pPr indent="0" marL="0">
+              <a:buNone/>
+            </a:pPr>
+            <a:r>
+              <a:rPr lang="en-US" sz="800" dirty="0">
+                <a:solidFill>
+                  <a:srgbClr val="8B8FA3"/>
                 </a:solidFill>
                 <a:latin typeface="Consolas" pitchFamily="34" charset="0"/>
                 <a:ea typeface="Consolas" pitchFamily="34" charset="-122"/>
                 <a:cs typeface="Consolas" pitchFamily="34" charset="-120"/>
               </a:rPr>
-              <a:t>13:01:01.544</a:t>
-            </a:r>
-            <a:endParaRPr lang="en-US" sz="1000" dirty="0"/>
+              <a:t>16322</a:t>
+            </a:r>
+            <a:endParaRPr lang="en-US" sz="800" dirty="0"/>
           </a:p>
         </p:txBody>
       </p:sp>
@@ -5394,34 +6555,34 @@
         </p:nvSpPr>
         <p:spPr>
           <a:xfrm>
-            <a:off x="2103120" y="3913632"/>
-            <a:ext cx="640080" cy="365760"/>
-          </a:xfrm>
-          <a:prstGeom prst="rect">
-            <a:avLst/>
-          </a:prstGeom>
-          <a:noFill/>
-          <a:ln/>
-        </p:spPr>
-        <p:txBody>
-          <a:bodyPr wrap="square" rtlCol="0" anchor="ctr"/>
-          <a:lstStyle/>
-          <a:p>
-            <a:pPr indent="0" marL="0">
-              <a:buNone/>
-            </a:pPr>
-            <a:r>
-              <a:rPr lang="en-US" sz="1000" dirty="0">
-                <a:solidFill>
-                  <a:srgbClr val="8B8FA3"/>
+            <a:off x="1371600" y="2898648"/>
+            <a:ext cx="1371600" cy="274320"/>
+          </a:xfrm>
+          <a:prstGeom prst="rect">
+            <a:avLst/>
+          </a:prstGeom>
+          <a:noFill/>
+          <a:ln/>
+        </p:spPr>
+        <p:txBody>
+          <a:bodyPr wrap="square" rtlCol="0" anchor="ctr"/>
+          <a:lstStyle/>
+          <a:p>
+            <a:pPr indent="0" marL="0">
+              <a:buNone/>
+            </a:pPr>
+            <a:r>
+              <a:rPr lang="en-US" sz="800" dirty="0">
+                <a:solidFill>
+                  <a:srgbClr val="FFAA44"/>
                 </a:solidFill>
                 <a:latin typeface="Consolas" pitchFamily="34" charset="0"/>
                 <a:ea typeface="Consolas" pitchFamily="34" charset="-122"/>
                 <a:cs typeface="Consolas" pitchFamily="34" charset="-120"/>
               </a:rPr>
-              <a:t>16335</a:t>
-            </a:r>
-            <a:endParaRPr lang="en-US" sz="1000" dirty="0"/>
+              <a:t>oom_reaper</a:t>
+            </a:r>
+            <a:endParaRPr lang="en-US" sz="800" dirty="0"/>
           </a:p>
         </p:txBody>
       </p:sp>
@@ -5433,34 +6594,34 @@
         </p:nvSpPr>
         <p:spPr>
           <a:xfrm>
-            <a:off x="2743200" y="3913632"/>
-            <a:ext cx="2743200" cy="365760"/>
-          </a:xfrm>
-          <a:prstGeom prst="rect">
-            <a:avLst/>
-          </a:prstGeom>
-          <a:noFill/>
-          <a:ln/>
-        </p:spPr>
-        <p:txBody>
-          <a:bodyPr wrap="square" rtlCol="0" anchor="ctr"/>
-          <a:lstStyle/>
-          <a:p>
-            <a:pPr indent="0" marL="0">
-              <a:buNone/>
-            </a:pPr>
-            <a:r>
-              <a:rPr lang="en-US" sz="1000" dirty="0">
-                <a:solidFill>
-                  <a:srgbClr val="FFD644"/>
+            <a:off x="2743200" y="2898648"/>
+            <a:ext cx="2560320" cy="274320"/>
+          </a:xfrm>
+          <a:prstGeom prst="rect">
+            <a:avLst/>
+          </a:prstGeom>
+          <a:noFill/>
+          <a:ln/>
+        </p:spPr>
+        <p:txBody>
+          <a:bodyPr wrap="square" rtlCol="0" anchor="ctr"/>
+          <a:lstStyle/>
+          <a:p>
+            <a:pPr indent="0" marL="0">
+              <a:buNone/>
+            </a:pPr>
+            <a:r>
+              <a:rPr lang="en-US" sz="800" dirty="0">
+                <a:solidFill>
+                  <a:srgbClr val="FFAA44"/>
                 </a:solidFill>
                 <a:latin typeface="Microsoft JhengHei" pitchFamily="34" charset="0"/>
                 <a:ea typeface="Microsoft JhengHei" pitchFamily="34" charset="-122"/>
                 <a:cs typeface="Microsoft JhengHei" pitchFamily="34" charset="-120"/>
               </a:rPr>
-              <a:t>googlequicksearchbox</a:t>
-            </a:r>
-            <a:endParaRPr lang="en-US" sz="1000" dirty="0"/>
+              <a:t>com.android.launcher3</a:t>
+            </a:r>
+            <a:endParaRPr lang="en-US" sz="800" dirty="0"/>
           </a:p>
         </p:txBody>
       </p:sp>
@@ -5472,34 +6633,34 @@
         </p:nvSpPr>
         <p:spPr>
           <a:xfrm>
-            <a:off x="5486400" y="3913632"/>
-            <a:ext cx="731520" cy="365760"/>
-          </a:xfrm>
-          <a:prstGeom prst="rect">
-            <a:avLst/>
-          </a:prstGeom>
-          <a:noFill/>
-          <a:ln/>
-        </p:spPr>
-        <p:txBody>
-          <a:bodyPr wrap="square" rtlCol="0" anchor="ctr"/>
-          <a:lstStyle/>
-          <a:p>
-            <a:pPr indent="0" marL="0">
-              <a:buNone/>
-            </a:pPr>
-            <a:r>
-              <a:rPr lang="en-US" sz="1000" dirty="0">
-                <a:solidFill>
-                  <a:srgbClr val="FFD644"/>
+            <a:off x="5303520" y="2898648"/>
+            <a:ext cx="914400" cy="274320"/>
+          </a:xfrm>
+          <a:prstGeom prst="rect">
+            <a:avLst/>
+          </a:prstGeom>
+          <a:noFill/>
+          <a:ln/>
+        </p:spPr>
+        <p:txBody>
+          <a:bodyPr wrap="square" rtlCol="0" anchor="ctr"/>
+          <a:lstStyle/>
+          <a:p>
+            <a:pPr indent="0" marL="0">
+              <a:buNone/>
+            </a:pPr>
+            <a:r>
+              <a:rPr lang="en-US" sz="800" dirty="0">
+                <a:solidFill>
+                  <a:srgbClr val="FFAA44"/>
                 </a:solidFill>
                 <a:latin typeface="Consolas" pitchFamily="34" charset="0"/>
                 <a:ea typeface="Consolas" pitchFamily="34" charset="-122"/>
                 <a:cs typeface="Consolas" pitchFamily="34" charset="-120"/>
               </a:rPr>
-              <a:t>BFGS</a:t>
-            </a:r>
-            <a:endParaRPr lang="en-US" sz="1000" dirty="0"/>
+              <a:t>vis BFGS</a:t>
+            </a:r>
+            <a:endParaRPr lang="en-US" sz="800" dirty="0"/>
           </a:p>
         </p:txBody>
       </p:sp>
@@ -5511,24 +6672,24 @@
         </p:nvSpPr>
         <p:spPr>
           <a:xfrm>
-            <a:off x="6400800" y="3913632"/>
-            <a:ext cx="5212080" cy="365760"/>
-          </a:xfrm>
-          <a:prstGeom prst="rect">
-            <a:avLst/>
-          </a:prstGeom>
-          <a:noFill/>
-          <a:ln/>
-        </p:spPr>
-        <p:txBody>
-          <a:bodyPr wrap="square" rtlCol="0" anchor="ctr"/>
-          <a:lstStyle/>
-          <a:p>
-            <a:pPr indent="0" marL="0">
-              <a:buNone/>
-            </a:pPr>
-            <a:r>
-              <a:rPr lang="en-US" sz="1000" dirty="0">
+            <a:off x="6309360" y="2898648"/>
+            <a:ext cx="5212080" cy="274320"/>
+          </a:xfrm>
+          <a:prstGeom prst="rect">
+            <a:avLst/>
+          </a:prstGeom>
+          <a:noFill/>
+          <a:ln/>
+        </p:spPr>
+        <p:txBody>
+          <a:bodyPr wrap="square" rtlCol="0" anchor="ctr"/>
+          <a:lstStyle/>
+          <a:p>
+            <a:pPr indent="0" marL="0">
+              <a:buNone/>
+            </a:pPr>
+            <a:r>
+              <a:rPr lang="en-US" sz="900" dirty="0">
                 <a:solidFill>
                   <a:srgbClr val="E0E0E6"/>
                 </a:solidFill>
@@ -5536,9 +6697,9 @@
                 <a:ea typeface="Microsoft JhengHei" pitchFamily="34" charset="-122"/>
                 <a:cs typeface="Microsoft JhengHei" pitchFamily="34" charset="-120"/>
               </a:rPr>
-              <a:t>Google 語音互動</a:t>
-            </a:r>
-            <a:endParaRPr lang="en-US" sz="1000" dirty="0"/>
+              <a:t>桌面 Launcher — 連桌面都殺了</a:t>
+            </a:r>
+            <a:endParaRPr lang="en-US" sz="900" dirty="0"/>
           </a:p>
         </p:txBody>
       </p:sp>
@@ -5550,34 +6711,34 @@
         </p:nvSpPr>
         <p:spPr>
           <a:xfrm>
-            <a:off x="731520" y="4480560"/>
-            <a:ext cx="1371600" cy="365760"/>
-          </a:xfrm>
-          <a:prstGeom prst="rect">
-            <a:avLst/>
-          </a:prstGeom>
-          <a:noFill/>
-          <a:ln/>
-        </p:spPr>
-        <p:txBody>
-          <a:bodyPr wrap="square" rtlCol="0" anchor="ctr"/>
-          <a:lstStyle/>
-          <a:p>
-            <a:pPr indent="0" marL="0">
-              <a:buNone/>
-            </a:pPr>
-            <a:r>
-              <a:rPr lang="en-US" sz="1000" dirty="0">
-                <a:solidFill>
-                  <a:srgbClr val="FFAA44"/>
+            <a:off x="731520" y="3246120"/>
+            <a:ext cx="640080" cy="274320"/>
+          </a:xfrm>
+          <a:prstGeom prst="rect">
+            <a:avLst/>
+          </a:prstGeom>
+          <a:noFill/>
+          <a:ln/>
+        </p:spPr>
+        <p:txBody>
+          <a:bodyPr wrap="square" rtlCol="0" anchor="ctr"/>
+          <a:lstStyle/>
+          <a:p>
+            <a:pPr indent="0" marL="0">
+              <a:buNone/>
+            </a:pPr>
+            <a:r>
+              <a:rPr lang="en-US" sz="800" dirty="0">
+                <a:solidFill>
+                  <a:srgbClr val="8B8FA3"/>
                 </a:solidFill>
                 <a:latin typeface="Consolas" pitchFamily="34" charset="0"/>
                 <a:ea typeface="Consolas" pitchFamily="34" charset="-122"/>
                 <a:cs typeface="Consolas" pitchFamily="34" charset="-120"/>
               </a:rPr>
-              <a:t>13:01:01.601</a:t>
-            </a:r>
-            <a:endParaRPr lang="en-US" sz="1000" dirty="0"/>
+              <a:t>16335</a:t>
+            </a:r>
+            <a:endParaRPr lang="en-US" sz="800" dirty="0"/>
           </a:p>
         </p:txBody>
       </p:sp>
@@ -5589,34 +6750,34 @@
         </p:nvSpPr>
         <p:spPr>
           <a:xfrm>
-            <a:off x="2103120" y="4480560"/>
-            <a:ext cx="640080" cy="365760"/>
-          </a:xfrm>
-          <a:prstGeom prst="rect">
-            <a:avLst/>
-          </a:prstGeom>
-          <a:noFill/>
-          <a:ln/>
-        </p:spPr>
-        <p:txBody>
-          <a:bodyPr wrap="square" rtlCol="0" anchor="ctr"/>
-          <a:lstStyle/>
-          <a:p>
-            <a:pPr indent="0" marL="0">
-              <a:buNone/>
-            </a:pPr>
-            <a:r>
-              <a:rPr lang="en-US" sz="1000" dirty="0">
-                <a:solidFill>
-                  <a:srgbClr val="8B8FA3"/>
+            <a:off x="1371600" y="3246120"/>
+            <a:ext cx="1371600" cy="274320"/>
+          </a:xfrm>
+          <a:prstGeom prst="rect">
+            <a:avLst/>
+          </a:prstGeom>
+          <a:noFill/>
+          <a:ln/>
+        </p:spPr>
+        <p:txBody>
+          <a:bodyPr wrap="square" rtlCol="0" anchor="ctr"/>
+          <a:lstStyle/>
+          <a:p>
+            <a:pPr indent="0" marL="0">
+              <a:buNone/>
+            </a:pPr>
+            <a:r>
+              <a:rPr lang="en-US" sz="800" dirty="0">
+                <a:solidFill>
+                  <a:srgbClr val="FFD644"/>
                 </a:solidFill>
                 <a:latin typeface="Consolas" pitchFamily="34" charset="0"/>
                 <a:ea typeface="Consolas" pitchFamily="34" charset="-122"/>
                 <a:cs typeface="Consolas" pitchFamily="34" charset="-120"/>
               </a:rPr>
-              <a:t>16369</a:t>
-            </a:r>
-            <a:endParaRPr lang="en-US" sz="1000" dirty="0"/>
+              <a:t>oom_reaper</a:t>
+            </a:r>
+            <a:endParaRPr lang="en-US" sz="800" dirty="0"/>
           </a:p>
         </p:txBody>
       </p:sp>
@@ -5628,34 +6789,34 @@
         </p:nvSpPr>
         <p:spPr>
           <a:xfrm>
-            <a:off x="2743200" y="4480560"/>
-            <a:ext cx="2743200" cy="365760"/>
-          </a:xfrm>
-          <a:prstGeom prst="rect">
-            <a:avLst/>
-          </a:prstGeom>
-          <a:noFill/>
-          <a:ln/>
-        </p:spPr>
-        <p:txBody>
-          <a:bodyPr wrap="square" rtlCol="0" anchor="ctr"/>
-          <a:lstStyle/>
-          <a:p>
-            <a:pPr indent="0" marL="0">
-              <a:buNone/>
-            </a:pPr>
-            <a:r>
-              <a:rPr lang="en-US" sz="1000" dirty="0">
-                <a:solidFill>
-                  <a:srgbClr val="FFAA44"/>
+            <a:off x="2743200" y="3246120"/>
+            <a:ext cx="2560320" cy="274320"/>
+          </a:xfrm>
+          <a:prstGeom prst="rect">
+            <a:avLst/>
+          </a:prstGeom>
+          <a:noFill/>
+          <a:ln/>
+        </p:spPr>
+        <p:txBody>
+          <a:bodyPr wrap="square" rtlCol="0" anchor="ctr"/>
+          <a:lstStyle/>
+          <a:p>
+            <a:pPr indent="0" marL="0">
+              <a:buNone/>
+            </a:pPr>
+            <a:r>
+              <a:rPr lang="en-US" sz="800" dirty="0">
+                <a:solidFill>
+                  <a:srgbClr val="FFD644"/>
                 </a:solidFill>
                 <a:latin typeface="Microsoft JhengHei" pitchFamily="34" charset="0"/>
                 <a:ea typeface="Microsoft JhengHei" pitchFamily="34" charset="-122"/>
                 <a:cs typeface="Microsoft JhengHei" pitchFamily="34" charset="-120"/>
               </a:rPr>
-              <a:t>com.android.smspush</a:t>
-            </a:r>
-            <a:endParaRPr lang="en-US" sz="1000" dirty="0"/>
+              <a:t>googlequicksearchbox</a:t>
+            </a:r>
+            <a:endParaRPr lang="en-US" sz="800" dirty="0"/>
           </a:p>
         </p:txBody>
       </p:sp>
@@ -5667,34 +6828,34 @@
         </p:nvSpPr>
         <p:spPr>
           <a:xfrm>
-            <a:off x="5486400" y="4480560"/>
-            <a:ext cx="731520" cy="365760"/>
-          </a:xfrm>
-          <a:prstGeom prst="rect">
-            <a:avLst/>
-          </a:prstGeom>
-          <a:noFill/>
-          <a:ln/>
-        </p:spPr>
-        <p:txBody>
-          <a:bodyPr wrap="square" rtlCol="0" anchor="ctr"/>
-          <a:lstStyle/>
-          <a:p>
-            <a:pPr indent="0" marL="0">
-              <a:buNone/>
-            </a:pPr>
-            <a:r>
-              <a:rPr lang="en-US" sz="1000" dirty="0">
-                <a:solidFill>
-                  <a:srgbClr val="FFAA44"/>
+            <a:off x="5303520" y="3246120"/>
+            <a:ext cx="914400" cy="274320"/>
+          </a:xfrm>
+          <a:prstGeom prst="rect">
+            <a:avLst/>
+          </a:prstGeom>
+          <a:noFill/>
+          <a:ln/>
+        </p:spPr>
+        <p:txBody>
+          <a:bodyPr wrap="square" rtlCol="0" anchor="ctr"/>
+          <a:lstStyle/>
+          <a:p>
+            <a:pPr indent="0" marL="0">
+              <a:buNone/>
+            </a:pPr>
+            <a:r>
+              <a:rPr lang="en-US" sz="800" dirty="0">
+                <a:solidFill>
+                  <a:srgbClr val="FFD644"/>
                 </a:solidFill>
                 <a:latin typeface="Consolas" pitchFamily="34" charset="0"/>
                 <a:ea typeface="Consolas" pitchFamily="34" charset="-122"/>
                 <a:cs typeface="Consolas" pitchFamily="34" charset="-120"/>
               </a:rPr>
-              <a:t>IMPF</a:t>
-            </a:r>
-            <a:endParaRPr lang="en-US" sz="1000" dirty="0"/>
+              <a:t>vis BFGS</a:t>
+            </a:r>
+            <a:endParaRPr lang="en-US" sz="800" dirty="0"/>
           </a:p>
         </p:txBody>
       </p:sp>
@@ -5706,24 +6867,24 @@
         </p:nvSpPr>
         <p:spPr>
           <a:xfrm>
-            <a:off x="6400800" y="4480560"/>
-            <a:ext cx="5212080" cy="365760"/>
-          </a:xfrm>
-          <a:prstGeom prst="rect">
-            <a:avLst/>
-          </a:prstGeom>
-          <a:noFill/>
-          <a:ln/>
-        </p:spPr>
-        <p:txBody>
-          <a:bodyPr wrap="square" rtlCol="0" anchor="ctr"/>
-          <a:lstStyle/>
-          <a:p>
-            <a:pPr indent="0" marL="0">
-              <a:buNone/>
-            </a:pPr>
-            <a:r>
-              <a:rPr lang="en-US" sz="1000" dirty="0">
+            <a:off x="6309360" y="3246120"/>
+            <a:ext cx="5212080" cy="274320"/>
+          </a:xfrm>
+          <a:prstGeom prst="rect">
+            <a:avLst/>
+          </a:prstGeom>
+          <a:noFill/>
+          <a:ln/>
+        </p:spPr>
+        <p:txBody>
+          <a:bodyPr wrap="square" rtlCol="0" anchor="ctr"/>
+          <a:lstStyle/>
+          <a:p>
+            <a:pPr indent="0" marL="0">
+              <a:buNone/>
+            </a:pPr>
+            <a:r>
+              <a:rPr lang="en-US" sz="900" dirty="0">
                 <a:solidFill>
                   <a:srgbClr val="E0E0E6"/>
                 </a:solidFill>
@@ -5731,26 +6892,221 @@
                 <a:ea typeface="Microsoft JhengHei" pitchFamily="34" charset="-122"/>
                 <a:cs typeface="Microsoft JhengHei" pitchFamily="34" charset="-120"/>
               </a:rPr>
+              <a:t>Google 語音互動</a:t>
+            </a:r>
+            <a:endParaRPr lang="en-US" sz="900" dirty="0"/>
+          </a:p>
+        </p:txBody>
+      </p:sp>
+      <p:sp>
+        <p:nvSpPr>
+          <p:cNvPr id="40" name="Text 38"/>
+          <p:cNvSpPr/>
+          <p:nvPr/>
+        </p:nvSpPr>
+        <p:spPr>
+          <a:xfrm>
+            <a:off x="731520" y="3593592"/>
+            <a:ext cx="640080" cy="274320"/>
+          </a:xfrm>
+          <a:prstGeom prst="rect">
+            <a:avLst/>
+          </a:prstGeom>
+          <a:noFill/>
+          <a:ln/>
+        </p:spPr>
+        <p:txBody>
+          <a:bodyPr wrap="square" rtlCol="0" anchor="ctr"/>
+          <a:lstStyle/>
+          <a:p>
+            <a:pPr indent="0" marL="0">
+              <a:buNone/>
+            </a:pPr>
+            <a:r>
+              <a:rPr lang="en-US" sz="800" dirty="0">
+                <a:solidFill>
+                  <a:srgbClr val="8B8FA3"/>
+                </a:solidFill>
+                <a:latin typeface="Consolas" pitchFamily="34" charset="0"/>
+                <a:ea typeface="Consolas" pitchFamily="34" charset="-122"/>
+                <a:cs typeface="Consolas" pitchFamily="34" charset="-120"/>
+              </a:rPr>
+              <a:t>16369</a:t>
+            </a:r>
+            <a:endParaRPr lang="en-US" sz="800" dirty="0"/>
+          </a:p>
+        </p:txBody>
+      </p:sp>
+      <p:sp>
+        <p:nvSpPr>
+          <p:cNvPr id="41" name="Text 39"/>
+          <p:cNvSpPr/>
+          <p:nvPr/>
+        </p:nvSpPr>
+        <p:spPr>
+          <a:xfrm>
+            <a:off x="1371600" y="3593592"/>
+            <a:ext cx="1371600" cy="274320"/>
+          </a:xfrm>
+          <a:prstGeom prst="rect">
+            <a:avLst/>
+          </a:prstGeom>
+          <a:noFill/>
+          <a:ln/>
+        </p:spPr>
+        <p:txBody>
+          <a:bodyPr wrap="square" rtlCol="0" anchor="ctr"/>
+          <a:lstStyle/>
+          <a:p>
+            <a:pPr indent="0" marL="0">
+              <a:buNone/>
+            </a:pPr>
+            <a:r>
+              <a:rPr lang="en-US" sz="800" dirty="0">
+                <a:solidFill>
+                  <a:srgbClr val="FFAA44"/>
+                </a:solidFill>
+                <a:latin typeface="Consolas" pitchFamily="34" charset="0"/>
+                <a:ea typeface="Consolas" pitchFamily="34" charset="-122"/>
+                <a:cs typeface="Consolas" pitchFamily="34" charset="-120"/>
+              </a:rPr>
+              <a:t>has died</a:t>
+            </a:r>
+            <a:endParaRPr lang="en-US" sz="800" dirty="0"/>
+          </a:p>
+        </p:txBody>
+      </p:sp>
+      <p:sp>
+        <p:nvSpPr>
+          <p:cNvPr id="42" name="Text 40"/>
+          <p:cNvSpPr/>
+          <p:nvPr/>
+        </p:nvSpPr>
+        <p:spPr>
+          <a:xfrm>
+            <a:off x="2743200" y="3593592"/>
+            <a:ext cx="2560320" cy="274320"/>
+          </a:xfrm>
+          <a:prstGeom prst="rect">
+            <a:avLst/>
+          </a:prstGeom>
+          <a:noFill/>
+          <a:ln/>
+        </p:spPr>
+        <p:txBody>
+          <a:bodyPr wrap="square" rtlCol="0" anchor="ctr"/>
+          <a:lstStyle/>
+          <a:p>
+            <a:pPr indent="0" marL="0">
+              <a:buNone/>
+            </a:pPr>
+            <a:r>
+              <a:rPr lang="en-US" sz="800" dirty="0">
+                <a:solidFill>
+                  <a:srgbClr val="FFAA44"/>
+                </a:solidFill>
+                <a:latin typeface="Microsoft JhengHei" pitchFamily="34" charset="0"/>
+                <a:ea typeface="Microsoft JhengHei" pitchFamily="34" charset="-122"/>
+                <a:cs typeface="Microsoft JhengHei" pitchFamily="34" charset="-120"/>
+              </a:rPr>
+              <a:t>com.android.smspush</a:t>
+            </a:r>
+            <a:endParaRPr lang="en-US" sz="800" dirty="0"/>
+          </a:p>
+        </p:txBody>
+      </p:sp>
+      <p:sp>
+        <p:nvSpPr>
+          <p:cNvPr id="43" name="Text 41"/>
+          <p:cNvSpPr/>
+          <p:nvPr/>
+        </p:nvSpPr>
+        <p:spPr>
+          <a:xfrm>
+            <a:off x="5303520" y="3593592"/>
+            <a:ext cx="914400" cy="274320"/>
+          </a:xfrm>
+          <a:prstGeom prst="rect">
+            <a:avLst/>
+          </a:prstGeom>
+          <a:noFill/>
+          <a:ln/>
+        </p:spPr>
+        <p:txBody>
+          <a:bodyPr wrap="square" rtlCol="0" anchor="ctr"/>
+          <a:lstStyle/>
+          <a:p>
+            <a:pPr indent="0" marL="0">
+              <a:buNone/>
+            </a:pPr>
+            <a:r>
+              <a:rPr lang="en-US" sz="800" dirty="0">
+                <a:solidFill>
+                  <a:srgbClr val="FFAA44"/>
+                </a:solidFill>
+                <a:latin typeface="Consolas" pitchFamily="34" charset="0"/>
+                <a:ea typeface="Consolas" pitchFamily="34" charset="-122"/>
+                <a:cs typeface="Consolas" pitchFamily="34" charset="-120"/>
+              </a:rPr>
+              <a:t>vis IMPF</a:t>
+            </a:r>
+            <a:endParaRPr lang="en-US" sz="800" dirty="0"/>
+          </a:p>
+        </p:txBody>
+      </p:sp>
+      <p:sp>
+        <p:nvSpPr>
+          <p:cNvPr id="44" name="Text 42"/>
+          <p:cNvSpPr/>
+          <p:nvPr/>
+        </p:nvSpPr>
+        <p:spPr>
+          <a:xfrm>
+            <a:off x="6309360" y="3593592"/>
+            <a:ext cx="5212080" cy="274320"/>
+          </a:xfrm>
+          <a:prstGeom prst="rect">
+            <a:avLst/>
+          </a:prstGeom>
+          <a:noFill/>
+          <a:ln/>
+        </p:spPr>
+        <p:txBody>
+          <a:bodyPr wrap="square" rtlCol="0" anchor="ctr"/>
+          <a:lstStyle/>
+          <a:p>
+            <a:pPr indent="0" marL="0">
+              <a:buNone/>
+            </a:pPr>
+            <a:r>
+              <a:rPr lang="en-US" sz="900" dirty="0">
+                <a:solidFill>
+                  <a:srgbClr val="E0E0E6"/>
+                </a:solidFill>
+                <a:latin typeface="Microsoft JhengHei" pitchFamily="34" charset="0"/>
+                <a:ea typeface="Microsoft JhengHei" pitchFamily="34" charset="-122"/>
+                <a:cs typeface="Microsoft JhengHei" pitchFamily="34" charset="-120"/>
+              </a:rPr>
               <a:t>簡訊推播 — 重要前景服務也被殺</a:t>
             </a:r>
-            <a:endParaRPr lang="en-US" sz="1000" dirty="0"/>
-          </a:p>
-        </p:txBody>
-      </p:sp>
-      <p:sp>
-        <p:nvSpPr>
-          <p:cNvPr id="40" name="Shape 38"/>
-          <p:cNvSpPr/>
-          <p:nvPr/>
-        </p:nvSpPr>
-        <p:spPr>
-          <a:xfrm>
-            <a:off x="594360" y="5001768"/>
-            <a:ext cx="10972800" cy="502920"/>
+            <a:endParaRPr lang="en-US" sz="900" dirty="0"/>
+          </a:p>
+        </p:txBody>
+      </p:sp>
+      <p:sp>
+        <p:nvSpPr>
+          <p:cNvPr id="45" name="Shape 43"/>
+          <p:cNvSpPr/>
+          <p:nvPr/>
+        </p:nvSpPr>
+        <p:spPr>
+          <a:xfrm>
+            <a:off x="594360" y="3913632"/>
+            <a:ext cx="10972800" cy="329184"/>
           </a:xfrm>
           <a:prstGeom prst="roundRect">
             <a:avLst>
-              <a:gd name="adj" fmla="val 9091"/>
+              <a:gd name="adj" fmla="val 8333"/>
             </a:avLst>
           </a:prstGeom>
           <a:solidFill>
@@ -5761,30 +7117,30 @@
       </p:sp>
       <p:sp>
         <p:nvSpPr>
-          <p:cNvPr id="41" name="Text 39"/>
-          <p:cNvSpPr/>
-          <p:nvPr/>
-        </p:nvSpPr>
-        <p:spPr>
-          <a:xfrm>
-            <a:off x="731520" y="5047488"/>
-            <a:ext cx="1371600" cy="365760"/>
-          </a:xfrm>
-          <a:prstGeom prst="rect">
-            <a:avLst/>
-          </a:prstGeom>
-          <a:noFill/>
-          <a:ln/>
-        </p:spPr>
-        <p:txBody>
-          <a:bodyPr wrap="square" rtlCol="0" anchor="ctr"/>
-          <a:lstStyle/>
-          <a:p>
-            <a:pPr indent="0" marL="0">
-              <a:buNone/>
-            </a:pPr>
-            <a:r>
-              <a:rPr lang="en-US" sz="1000" b="1" dirty="0">
+          <p:cNvPr id="46" name="Text 44"/>
+          <p:cNvSpPr/>
+          <p:nvPr/>
+        </p:nvSpPr>
+        <p:spPr>
+          <a:xfrm>
+            <a:off x="731520" y="3941064"/>
+            <a:ext cx="640080" cy="274320"/>
+          </a:xfrm>
+          <a:prstGeom prst="rect">
+            <a:avLst/>
+          </a:prstGeom>
+          <a:noFill/>
+          <a:ln/>
+        </p:spPr>
+        <p:txBody>
+          <a:bodyPr wrap="square" rtlCol="0" anchor="ctr"/>
+          <a:lstStyle/>
+          <a:p>
+            <a:pPr indent="0" marL="0">
+              <a:buNone/>
+            </a:pPr>
+            <a:r>
+              <a:rPr lang="en-US" sz="800" b="1" dirty="0">
                 <a:solidFill>
                   <a:srgbClr val="FF5F6D"/>
                 </a:solidFill>
@@ -5792,77 +7148,77 @@
                 <a:ea typeface="Consolas" pitchFamily="34" charset="-122"/>
                 <a:cs typeface="Consolas" pitchFamily="34" charset="-120"/>
               </a:rPr>
-              <a:t>13:01:01.653</a:t>
-            </a:r>
-            <a:endParaRPr lang="en-US" sz="1000" dirty="0"/>
-          </a:p>
-        </p:txBody>
-      </p:sp>
-      <p:sp>
-        <p:nvSpPr>
-          <p:cNvPr id="42" name="Text 40"/>
-          <p:cNvSpPr/>
-          <p:nvPr/>
-        </p:nvSpPr>
-        <p:spPr>
-          <a:xfrm>
-            <a:off x="2103120" y="5047488"/>
-            <a:ext cx="640080" cy="365760"/>
-          </a:xfrm>
-          <a:prstGeom prst="rect">
-            <a:avLst/>
-          </a:prstGeom>
-          <a:noFill/>
-          <a:ln/>
-        </p:spPr>
-        <p:txBody>
-          <a:bodyPr wrap="square" rtlCol="0" anchor="ctr"/>
-          <a:lstStyle/>
-          <a:p>
-            <a:pPr indent="0" marL="0">
-              <a:buNone/>
-            </a:pPr>
-            <a:r>
-              <a:rPr lang="en-US" sz="1000" dirty="0">
-                <a:solidFill>
-                  <a:srgbClr val="8B8FA3"/>
+              <a:t>16372</a:t>
+            </a:r>
+            <a:endParaRPr lang="en-US" sz="800" dirty="0"/>
+          </a:p>
+        </p:txBody>
+      </p:sp>
+      <p:sp>
+        <p:nvSpPr>
+          <p:cNvPr id="47" name="Text 45"/>
+          <p:cNvSpPr/>
+          <p:nvPr/>
+        </p:nvSpPr>
+        <p:spPr>
+          <a:xfrm>
+            <a:off x="1371600" y="3941064"/>
+            <a:ext cx="1371600" cy="274320"/>
+          </a:xfrm>
+          <a:prstGeom prst="rect">
+            <a:avLst/>
+          </a:prstGeom>
+          <a:noFill/>
+          <a:ln/>
+        </p:spPr>
+        <p:txBody>
+          <a:bodyPr wrap="square" rtlCol="0" anchor="ctr"/>
+          <a:lstStyle/>
+          <a:p>
+            <a:pPr indent="0" marL="0">
+              <a:buNone/>
+            </a:pPr>
+            <a:r>
+              <a:rPr lang="en-US" sz="800" b="1" dirty="0">
+                <a:solidFill>
+                  <a:srgbClr val="FF5F6D"/>
                 </a:solidFill>
                 <a:latin typeface="Consolas" pitchFamily="34" charset="0"/>
                 <a:ea typeface="Consolas" pitchFamily="34" charset="-122"/>
                 <a:cs typeface="Consolas" pitchFamily="34" charset="-120"/>
               </a:rPr>
-              <a:t>16372</a:t>
-            </a:r>
-            <a:endParaRPr lang="en-US" sz="1000" dirty="0"/>
-          </a:p>
-        </p:txBody>
-      </p:sp>
-      <p:sp>
-        <p:nvSpPr>
-          <p:cNvPr id="43" name="Text 41"/>
-          <p:cNvSpPr/>
-          <p:nvPr/>
-        </p:nvSpPr>
-        <p:spPr>
-          <a:xfrm>
-            <a:off x="2743200" y="5047488"/>
-            <a:ext cx="2743200" cy="365760"/>
-          </a:xfrm>
-          <a:prstGeom prst="rect">
-            <a:avLst/>
-          </a:prstGeom>
-          <a:noFill/>
-          <a:ln/>
-        </p:spPr>
-        <p:txBody>
-          <a:bodyPr wrap="square" rtlCol="0" anchor="ctr"/>
-          <a:lstStyle/>
-          <a:p>
-            <a:pPr indent="0" marL="0">
-              <a:buNone/>
-            </a:pPr>
-            <a:r>
-              <a:rPr lang="en-US" sz="1000" b="1" dirty="0">
+              <a:t>oom_reaper</a:t>
+            </a:r>
+            <a:endParaRPr lang="en-US" sz="800" dirty="0"/>
+          </a:p>
+        </p:txBody>
+      </p:sp>
+      <p:sp>
+        <p:nvSpPr>
+          <p:cNvPr id="48" name="Text 46"/>
+          <p:cNvSpPr/>
+          <p:nvPr/>
+        </p:nvSpPr>
+        <p:spPr>
+          <a:xfrm>
+            <a:off x="2743200" y="3941064"/>
+            <a:ext cx="2560320" cy="274320"/>
+          </a:xfrm>
+          <a:prstGeom prst="rect">
+            <a:avLst/>
+          </a:prstGeom>
+          <a:noFill/>
+          <a:ln/>
+        </p:spPr>
+        <p:txBody>
+          <a:bodyPr wrap="square" rtlCol="0" anchor="ctr"/>
+          <a:lstStyle/>
+          <a:p>
+            <a:pPr indent="0" marL="0">
+              <a:buNone/>
+            </a:pPr>
+            <a:r>
+              <a:rPr lang="en-US" sz="800" b="1" dirty="0">
                 <a:solidFill>
                   <a:srgbClr val="FF5F6D"/>
                 </a:solidFill>
@@ -5870,38 +7226,38 @@
                 <a:ea typeface="Microsoft JhengHei" pitchFamily="34" charset="-122"/>
                 <a:cs typeface="Microsoft JhengHei" pitchFamily="34" charset="-120"/>
               </a:rPr>
-              <a:t>com.google.android.apps.nbu.files</a:t>
-            </a:r>
-            <a:endParaRPr lang="en-US" sz="1000" dirty="0"/>
-          </a:p>
-        </p:txBody>
-      </p:sp>
-      <p:sp>
-        <p:nvSpPr>
-          <p:cNvPr id="44" name="Text 42"/>
-          <p:cNvSpPr/>
-          <p:nvPr/>
-        </p:nvSpPr>
-        <p:spPr>
-          <a:xfrm>
-            <a:off x="5486400" y="5047488"/>
-            <a:ext cx="731520" cy="365760"/>
-          </a:xfrm>
-          <a:prstGeom prst="rect">
-            <a:avLst/>
-          </a:prstGeom>
-          <a:noFill/>
-          <a:ln/>
-        </p:spPr>
-        <p:txBody>
-          <a:bodyPr wrap="square" rtlCol="0" anchor="ctr"/>
-          <a:lstStyle/>
-          <a:p>
-            <a:pPr indent="0" marL="0">
-              <a:buNone/>
-            </a:pPr>
-            <a:r>
-              <a:rPr lang="en-US" sz="1000" b="1" dirty="0">
+              <a:t>apps.nbu.files</a:t>
+            </a:r>
+            <a:endParaRPr lang="en-US" sz="800" dirty="0"/>
+          </a:p>
+        </p:txBody>
+      </p:sp>
+      <p:sp>
+        <p:nvSpPr>
+          <p:cNvPr id="49" name="Text 47"/>
+          <p:cNvSpPr/>
+          <p:nvPr/>
+        </p:nvSpPr>
+        <p:spPr>
+          <a:xfrm>
+            <a:off x="5303520" y="3941064"/>
+            <a:ext cx="914400" cy="274320"/>
+          </a:xfrm>
+          <a:prstGeom prst="rect">
+            <a:avLst/>
+          </a:prstGeom>
+          <a:noFill/>
+          <a:ln/>
+        </p:spPr>
+        <p:txBody>
+          <a:bodyPr wrap="square" rtlCol="0" anchor="ctr"/>
+          <a:lstStyle/>
+          <a:p>
+            <a:pPr indent="0" marL="0">
+              <a:buNone/>
+            </a:pPr>
+            <a:r>
+              <a:rPr lang="en-US" sz="800" b="1" dirty="0">
                 <a:solidFill>
                   <a:srgbClr val="FF5F6D"/>
                 </a:solidFill>
@@ -5911,36 +7267,36 @@
               </a:rPr>
               <a:t>fg TOP</a:t>
             </a:r>
-            <a:endParaRPr lang="en-US" sz="1000" dirty="0"/>
-          </a:p>
-        </p:txBody>
-      </p:sp>
-      <p:sp>
-        <p:nvSpPr>
-          <p:cNvPr id="45" name="Text 43"/>
-          <p:cNvSpPr/>
-          <p:nvPr/>
-        </p:nvSpPr>
-        <p:spPr>
-          <a:xfrm>
-            <a:off x="6400800" y="5047488"/>
-            <a:ext cx="5212080" cy="365760"/>
-          </a:xfrm>
-          <a:prstGeom prst="rect">
-            <a:avLst/>
-          </a:prstGeom>
-          <a:noFill/>
-          <a:ln/>
-        </p:spPr>
-        <p:txBody>
-          <a:bodyPr wrap="square" rtlCol="0" anchor="ctr"/>
-          <a:lstStyle/>
-          <a:p>
-            <a:pPr indent="0" marL="0">
-              <a:buNone/>
-            </a:pPr>
-            <a:r>
-              <a:rPr lang="en-US" sz="1000" b="1" dirty="0">
+            <a:endParaRPr lang="en-US" sz="800" dirty="0"/>
+          </a:p>
+        </p:txBody>
+      </p:sp>
+      <p:sp>
+        <p:nvSpPr>
+          <p:cNvPr id="50" name="Text 48"/>
+          <p:cNvSpPr/>
+          <p:nvPr/>
+        </p:nvSpPr>
+        <p:spPr>
+          <a:xfrm>
+            <a:off x="6309360" y="3941064"/>
+            <a:ext cx="5212080" cy="274320"/>
+          </a:xfrm>
+          <a:prstGeom prst="rect">
+            <a:avLst/>
+          </a:prstGeom>
+          <a:noFill/>
+          <a:ln/>
+        </p:spPr>
+        <p:txBody>
+          <a:bodyPr wrap="square" rtlCol="0" anchor="ctr"/>
+          <a:lstStyle/>
+          <a:p>
+            <a:pPr indent="0" marL="0">
+              <a:buNone/>
+            </a:pPr>
+            <a:r>
+              <a:rPr lang="en-US" sz="900" b="1" dirty="0">
                 <a:solidFill>
                   <a:srgbClr val="FF5F6D"/>
                 </a:solidFill>
@@ -5950,50 +7306,97 @@
               </a:rPr>
               <a:t>Files by Google — 最後才殺，與 BR#1 完全一致</a:t>
             </a:r>
-            <a:endParaRPr lang="en-US" sz="1000" dirty="0"/>
-          </a:p>
-        </p:txBody>
-      </p:sp>
-      <p:sp>
-        <p:nvSpPr>
-          <p:cNvPr id="46" name="Text 44"/>
-          <p:cNvSpPr/>
-          <p:nvPr/>
-        </p:nvSpPr>
-        <p:spPr>
-          <a:xfrm>
-            <a:off x="731520" y="5760720"/>
-            <a:ext cx="10515600" cy="274320"/>
-          </a:xfrm>
-          <a:prstGeom prst="rect">
-            <a:avLst/>
-          </a:prstGeom>
-          <a:noFill/>
-          <a:ln/>
-        </p:spPr>
-        <p:txBody>
-          <a:bodyPr wrap="square" rtlCol="0" anchor="ctr"/>
-          <a:lstStyle/>
-          <a:p>
-            <a:pPr indent="0" marL="0">
-              <a:buNone/>
-            </a:pPr>
-            <a:r>
-              <a:rPr lang="en-US" sz="1000" b="1" dirty="0">
-                <a:solidFill>
-                  <a:srgbClr val="8B8FA3"/>
+            <a:endParaRPr lang="en-US" sz="900" dirty="0"/>
+          </a:p>
+        </p:txBody>
+      </p:sp>
+      <p:sp>
+        <p:nvSpPr>
+          <p:cNvPr id="51" name="Shape 49"/>
+          <p:cNvSpPr/>
+          <p:nvPr/>
+        </p:nvSpPr>
+        <p:spPr>
+          <a:xfrm>
+            <a:off x="594360" y="4261104"/>
+            <a:ext cx="10972800" cy="329184"/>
+          </a:xfrm>
+          <a:prstGeom prst="roundRect">
+            <a:avLst>
+              <a:gd name="adj" fmla="val 8333"/>
+            </a:avLst>
+          </a:prstGeom>
+          <a:solidFill>
+            <a:srgbClr val="351515"/>
+          </a:solidFill>
+          <a:ln/>
+        </p:spPr>
+      </p:sp>
+      <p:sp>
+        <p:nvSpPr>
+          <p:cNvPr id="52" name="Text 50"/>
+          <p:cNvSpPr/>
+          <p:nvPr/>
+        </p:nvSpPr>
+        <p:spPr>
+          <a:xfrm>
+            <a:off x="731520" y="4288536"/>
+            <a:ext cx="640080" cy="274320"/>
+          </a:xfrm>
+          <a:prstGeom prst="rect">
+            <a:avLst/>
+          </a:prstGeom>
+          <a:noFill/>
+          <a:ln/>
+        </p:spPr>
+        <p:txBody>
+          <a:bodyPr wrap="square" rtlCol="0" anchor="ctr"/>
+          <a:lstStyle/>
+          <a:p>
+            <a:pPr indent="0" marL="0">
+              <a:buNone/>
+            </a:pPr>
+            <a:r>
+              <a:rPr lang="en-US" sz="800" b="1" dirty="0">
+                <a:solidFill>
+                  <a:srgbClr val="FF5F6D"/>
                 </a:solidFill>
                 <a:latin typeface="Consolas" pitchFamily="34" charset="0"/>
                 <a:ea typeface="Consolas" pitchFamily="34" charset="-122"/>
                 <a:cs typeface="Consolas" pitchFamily="34" charset="-120"/>
               </a:rPr>
-              <a:t>行 16385: </a:t>
-            </a:r>
-            <a:pPr indent="0" marL="0">
-              <a:buNone/>
-            </a:pPr>
-            <a:r>
-              <a:rPr lang="en-US" sz="1000" dirty="0">
+              <a:t>16385</a:t>
+            </a:r>
+            <a:endParaRPr lang="en-US" sz="800" dirty="0"/>
+          </a:p>
+        </p:txBody>
+      </p:sp>
+      <p:sp>
+        <p:nvSpPr>
+          <p:cNvPr id="53" name="Text 51"/>
+          <p:cNvSpPr/>
+          <p:nvPr/>
+        </p:nvSpPr>
+        <p:spPr>
+          <a:xfrm>
+            <a:off x="1371600" y="4288536"/>
+            <a:ext cx="1371600" cy="274320"/>
+          </a:xfrm>
+          <a:prstGeom prst="rect">
+            <a:avLst/>
+          </a:prstGeom>
+          <a:noFill/>
+          <a:ln/>
+        </p:spPr>
+        <p:txBody>
+          <a:bodyPr wrap="square" rtlCol="0" anchor="ctr"/>
+          <a:lstStyle/>
+          <a:p>
+            <a:pPr indent="0" marL="0">
+              <a:buNone/>
+            </a:pPr>
+            <a:r>
+              <a:rPr lang="en-US" sz="800" b="1" dirty="0">
                 <a:solidFill>
                   <a:srgbClr val="FF5F6D"/>
                 </a:solidFill>
@@ -6001,9 +7404,733 @@
                 <a:ea typeface="Consolas" pitchFamily="34" charset="-122"/>
                 <a:cs typeface="Consolas" pitchFamily="34" charset="-120"/>
               </a:rPr>
-              <a:t>ActivityManager: Process com.google.android.apps.nbu.files (pid 5170) has died: fg  TOP</a:t>
-            </a:r>
-            <a:endParaRPr lang="en-US" sz="1000" dirty="0"/>
+              <a:t>has died</a:t>
+            </a:r>
+            <a:endParaRPr lang="en-US" sz="800" dirty="0"/>
+          </a:p>
+        </p:txBody>
+      </p:sp>
+      <p:sp>
+        <p:nvSpPr>
+          <p:cNvPr id="54" name="Text 52"/>
+          <p:cNvSpPr/>
+          <p:nvPr/>
+        </p:nvSpPr>
+        <p:spPr>
+          <a:xfrm>
+            <a:off x="2743200" y="4288536"/>
+            <a:ext cx="2560320" cy="274320"/>
+          </a:xfrm>
+          <a:prstGeom prst="rect">
+            <a:avLst/>
+          </a:prstGeom>
+          <a:noFill/>
+          <a:ln/>
+        </p:spPr>
+        <p:txBody>
+          <a:bodyPr wrap="square" rtlCol="0" anchor="ctr"/>
+          <a:lstStyle/>
+          <a:p>
+            <a:pPr indent="0" marL="0">
+              <a:buNone/>
+            </a:pPr>
+            <a:r>
+              <a:rPr lang="en-US" sz="800" b="1" dirty="0">
+                <a:solidFill>
+                  <a:srgbClr val="FF5F6D"/>
+                </a:solidFill>
+                <a:latin typeface="Microsoft JhengHei" pitchFamily="34" charset="0"/>
+                <a:ea typeface="Microsoft JhengHei" pitchFamily="34" charset="-122"/>
+                <a:cs typeface="Microsoft JhengHei" pitchFamily="34" charset="-120"/>
+              </a:rPr>
+              <a:t>apps.nbu.files</a:t>
+            </a:r>
+            <a:endParaRPr lang="en-US" sz="800" dirty="0"/>
+          </a:p>
+        </p:txBody>
+      </p:sp>
+      <p:sp>
+        <p:nvSpPr>
+          <p:cNvPr id="55" name="Text 53"/>
+          <p:cNvSpPr/>
+          <p:nvPr/>
+        </p:nvSpPr>
+        <p:spPr>
+          <a:xfrm>
+            <a:off x="5303520" y="4288536"/>
+            <a:ext cx="914400" cy="274320"/>
+          </a:xfrm>
+          <a:prstGeom prst="rect">
+            <a:avLst/>
+          </a:prstGeom>
+          <a:noFill/>
+          <a:ln/>
+        </p:spPr>
+        <p:txBody>
+          <a:bodyPr wrap="square" rtlCol="0" anchor="ctr"/>
+          <a:lstStyle/>
+          <a:p>
+            <a:pPr indent="0" marL="0">
+              <a:buNone/>
+            </a:pPr>
+            <a:r>
+              <a:rPr lang="en-US" sz="800" b="1" dirty="0">
+                <a:solidFill>
+                  <a:srgbClr val="FF5F6D"/>
+                </a:solidFill>
+                <a:latin typeface="Consolas" pitchFamily="34" charset="0"/>
+                <a:ea typeface="Consolas" pitchFamily="34" charset="-122"/>
+                <a:cs typeface="Consolas" pitchFamily="34" charset="-120"/>
+              </a:rPr>
+              <a:t>fg TOP</a:t>
+            </a:r>
+            <a:endParaRPr lang="en-US" sz="800" dirty="0"/>
+          </a:p>
+        </p:txBody>
+      </p:sp>
+      <p:sp>
+        <p:nvSpPr>
+          <p:cNvPr id="56" name="Text 54"/>
+          <p:cNvSpPr/>
+          <p:nvPr/>
+        </p:nvSpPr>
+        <p:spPr>
+          <a:xfrm>
+            <a:off x="6309360" y="4288536"/>
+            <a:ext cx="5212080" cy="274320"/>
+          </a:xfrm>
+          <a:prstGeom prst="rect">
+            <a:avLst/>
+          </a:prstGeom>
+          <a:noFill/>
+          <a:ln/>
+        </p:spPr>
+        <p:txBody>
+          <a:bodyPr wrap="square" rtlCol="0" anchor="ctr"/>
+          <a:lstStyle/>
+          <a:p>
+            <a:pPr indent="0" marL="0">
+              <a:buNone/>
+            </a:pPr>
+            <a:r>
+              <a:rPr lang="en-US" sz="900" b="1" dirty="0">
+                <a:solidFill>
+                  <a:srgbClr val="FF5F6D"/>
+                </a:solidFill>
+                <a:latin typeface="Microsoft JhengHei" pitchFamily="34" charset="0"/>
+                <a:ea typeface="Microsoft JhengHei" pitchFamily="34" charset="-122"/>
+                <a:cs typeface="Microsoft JhengHei" pitchFamily="34" charset="-120"/>
+              </a:rPr>
+              <a:t>ActivityManager 確認前景 App 死亡</a:t>
+            </a:r>
+            <a:endParaRPr lang="en-US" sz="900" dirty="0"/>
+          </a:p>
+        </p:txBody>
+      </p:sp>
+      <p:sp>
+        <p:nvSpPr>
+          <p:cNvPr id="57" name="Text 55"/>
+          <p:cNvSpPr/>
+          <p:nvPr/>
+        </p:nvSpPr>
+        <p:spPr>
+          <a:xfrm>
+            <a:off x="731520" y="4636008"/>
+            <a:ext cx="640080" cy="274320"/>
+          </a:xfrm>
+          <a:prstGeom prst="rect">
+            <a:avLst/>
+          </a:prstGeom>
+          <a:noFill/>
+          <a:ln/>
+        </p:spPr>
+        <p:txBody>
+          <a:bodyPr wrap="square" rtlCol="0" anchor="ctr"/>
+          <a:lstStyle/>
+          <a:p>
+            <a:pPr indent="0" marL="0">
+              <a:buNone/>
+            </a:pPr>
+            <a:r>
+              <a:rPr lang="en-US" sz="800" dirty="0">
+                <a:solidFill>
+                  <a:srgbClr val="8B8FA3"/>
+                </a:solidFill>
+                <a:latin typeface="Consolas" pitchFamily="34" charset="0"/>
+                <a:ea typeface="Consolas" pitchFamily="34" charset="-122"/>
+                <a:cs typeface="Consolas" pitchFamily="34" charset="-120"/>
+              </a:rPr>
+              <a:t>16386-87</a:t>
+            </a:r>
+            <a:endParaRPr lang="en-US" sz="800" dirty="0"/>
+          </a:p>
+        </p:txBody>
+      </p:sp>
+      <p:sp>
+        <p:nvSpPr>
+          <p:cNvPr id="58" name="Text 56"/>
+          <p:cNvSpPr/>
+          <p:nvPr/>
+        </p:nvSpPr>
+        <p:spPr>
+          <a:xfrm>
+            <a:off x="1371600" y="4636008"/>
+            <a:ext cx="1371600" cy="274320"/>
+          </a:xfrm>
+          <a:prstGeom prst="rect">
+            <a:avLst/>
+          </a:prstGeom>
+          <a:noFill/>
+          <a:ln/>
+        </p:spPr>
+        <p:txBody>
+          <a:bodyPr wrap="square" rtlCol="0" anchor="ctr"/>
+          <a:lstStyle/>
+          <a:p>
+            <a:pPr indent="0" marL="0">
+              <a:buNone/>
+            </a:pPr>
+            <a:r>
+              <a:rPr lang="en-US" sz="800" dirty="0">
+                <a:solidFill>
+                  <a:srgbClr val="8B8FA3"/>
+                </a:solidFill>
+                <a:latin typeface="Consolas" pitchFamily="34" charset="0"/>
+                <a:ea typeface="Consolas" pitchFamily="34" charset="-122"/>
+                <a:cs typeface="Consolas" pitchFamily="34" charset="-120"/>
+              </a:rPr>
+              <a:t>WIN DEATH</a:t>
+            </a:r>
+            <a:endParaRPr lang="en-US" sz="800" dirty="0"/>
+          </a:p>
+        </p:txBody>
+      </p:sp>
+      <p:sp>
+        <p:nvSpPr>
+          <p:cNvPr id="59" name="Text 57"/>
+          <p:cNvSpPr/>
+          <p:nvPr/>
+        </p:nvSpPr>
+        <p:spPr>
+          <a:xfrm>
+            <a:off x="2743200" y="4636008"/>
+            <a:ext cx="2560320" cy="274320"/>
+          </a:xfrm>
+          <a:prstGeom prst="rect">
+            <a:avLst/>
+          </a:prstGeom>
+          <a:noFill/>
+          <a:ln/>
+        </p:spPr>
+        <p:txBody>
+          <a:bodyPr wrap="square" rtlCol="0" anchor="ctr"/>
+          <a:lstStyle/>
+          <a:p>
+            <a:pPr indent="0" marL="0">
+              <a:buNone/>
+            </a:pPr>
+            <a:r>
+              <a:rPr lang="en-US" sz="800" dirty="0">
+                <a:solidFill>
+                  <a:srgbClr val="8B8FA3"/>
+                </a:solidFill>
+                <a:latin typeface="Microsoft JhengHei" pitchFamily="34" charset="0"/>
+                <a:ea typeface="Microsoft JhengHei" pitchFamily="34" charset="-122"/>
+                <a:cs typeface="Microsoft JhengHei" pitchFamily="34" charset="-120"/>
+              </a:rPr>
+              <a:t>apps.nbu.files</a:t>
+            </a:r>
+            <a:endParaRPr lang="en-US" sz="800" dirty="0"/>
+          </a:p>
+        </p:txBody>
+      </p:sp>
+      <p:sp>
+        <p:nvSpPr>
+          <p:cNvPr id="60" name="Text 58"/>
+          <p:cNvSpPr/>
+          <p:nvPr/>
+        </p:nvSpPr>
+        <p:spPr>
+          <a:xfrm>
+            <a:off x="5303520" y="4636008"/>
+            <a:ext cx="914400" cy="274320"/>
+          </a:xfrm>
+          <a:prstGeom prst="rect">
+            <a:avLst/>
+          </a:prstGeom>
+          <a:noFill/>
+          <a:ln/>
+        </p:spPr>
+        <p:txBody>
+          <a:bodyPr wrap="square" rtlCol="0" anchor="ctr"/>
+          <a:lstStyle/>
+          <a:p>
+            <a:pPr indent="0" marL="0">
+              <a:buNone/>
+            </a:pPr>
+            <a:r>
+              <a:rPr lang="en-US" sz="800" dirty="0">
+                <a:solidFill>
+                  <a:srgbClr val="8B8FA3"/>
+                </a:solidFill>
+                <a:latin typeface="Consolas" pitchFamily="34" charset="0"/>
+                <a:ea typeface="Consolas" pitchFamily="34" charset="-122"/>
+                <a:cs typeface="Consolas" pitchFamily="34" charset="-120"/>
+              </a:rPr>
+              <a:t>-</a:t>
+            </a:r>
+            <a:endParaRPr lang="en-US" sz="800" dirty="0"/>
+          </a:p>
+        </p:txBody>
+      </p:sp>
+      <p:sp>
+        <p:nvSpPr>
+          <p:cNvPr id="61" name="Text 59"/>
+          <p:cNvSpPr/>
+          <p:nvPr/>
+        </p:nvSpPr>
+        <p:spPr>
+          <a:xfrm>
+            <a:off x="6309360" y="4636008"/>
+            <a:ext cx="5212080" cy="274320"/>
+          </a:xfrm>
+          <a:prstGeom prst="rect">
+            <a:avLst/>
+          </a:prstGeom>
+          <a:noFill/>
+          <a:ln/>
+        </p:spPr>
+        <p:txBody>
+          <a:bodyPr wrap="square" rtlCol="0" anchor="ctr"/>
+          <a:lstStyle/>
+          <a:p>
+            <a:pPr indent="0" marL="0">
+              <a:buNone/>
+            </a:pPr>
+            <a:r>
+              <a:rPr lang="en-US" sz="900" dirty="0">
+                <a:solidFill>
+                  <a:srgbClr val="E0E0E6"/>
+                </a:solidFill>
+                <a:latin typeface="Microsoft JhengHei" pitchFamily="34" charset="0"/>
+                <a:ea typeface="Microsoft JhengHei" pitchFamily="34" charset="-122"/>
+                <a:cs typeface="Microsoft JhengHei" pitchFamily="34" charset="-120"/>
+              </a:rPr>
+              <a:t>2 個視窗被清理</a:t>
+            </a:r>
+            <a:endParaRPr lang="en-US" sz="900" dirty="0"/>
+          </a:p>
+        </p:txBody>
+      </p:sp>
+      <p:sp>
+        <p:nvSpPr>
+          <p:cNvPr id="62" name="Text 60"/>
+          <p:cNvSpPr/>
+          <p:nvPr/>
+        </p:nvSpPr>
+        <p:spPr>
+          <a:xfrm>
+            <a:off x="731520" y="4983480"/>
+            <a:ext cx="640080" cy="274320"/>
+          </a:xfrm>
+          <a:prstGeom prst="rect">
+            <a:avLst/>
+          </a:prstGeom>
+          <a:noFill/>
+          <a:ln/>
+        </p:spPr>
+        <p:txBody>
+          <a:bodyPr wrap="square" rtlCol="0" anchor="ctr"/>
+          <a:lstStyle/>
+          <a:p>
+            <a:pPr indent="0" marL="0">
+              <a:buNone/>
+            </a:pPr>
+            <a:r>
+              <a:rPr lang="en-US" sz="800" dirty="0">
+                <a:solidFill>
+                  <a:srgbClr val="8B8FA3"/>
+                </a:solidFill>
+                <a:latin typeface="Consolas" pitchFamily="34" charset="0"/>
+                <a:ea typeface="Consolas" pitchFamily="34" charset="-122"/>
+                <a:cs typeface="Consolas" pitchFamily="34" charset="-120"/>
+              </a:rPr>
+              <a:t>16389</a:t>
+            </a:r>
+            <a:endParaRPr lang="en-US" sz="800" dirty="0"/>
+          </a:p>
+        </p:txBody>
+      </p:sp>
+      <p:sp>
+        <p:nvSpPr>
+          <p:cNvPr id="63" name="Text 61"/>
+          <p:cNvSpPr/>
+          <p:nvPr/>
+        </p:nvSpPr>
+        <p:spPr>
+          <a:xfrm>
+            <a:off x="1371600" y="4983480"/>
+            <a:ext cx="1371600" cy="274320"/>
+          </a:xfrm>
+          <a:prstGeom prst="rect">
+            <a:avLst/>
+          </a:prstGeom>
+          <a:noFill/>
+          <a:ln/>
+        </p:spPr>
+        <p:txBody>
+          <a:bodyPr wrap="square" rtlCol="0" anchor="ctr"/>
+          <a:lstStyle/>
+          <a:p>
+            <a:pPr indent="0" marL="0">
+              <a:buNone/>
+            </a:pPr>
+            <a:r>
+              <a:rPr lang="en-US" sz="800" dirty="0">
+                <a:solidFill>
+                  <a:srgbClr val="FFAA44"/>
+                </a:solidFill>
+                <a:latin typeface="Consolas" pitchFamily="34" charset="0"/>
+                <a:ea typeface="Consolas" pitchFamily="34" charset="-122"/>
+                <a:cs typeface="Consolas" pitchFamily="34" charset="-120"/>
+              </a:rPr>
+              <a:t>Force remove</a:t>
+            </a:r>
+            <a:endParaRPr lang="en-US" sz="800" dirty="0"/>
+          </a:p>
+        </p:txBody>
+      </p:sp>
+      <p:sp>
+        <p:nvSpPr>
+          <p:cNvPr id="64" name="Text 62"/>
+          <p:cNvSpPr/>
+          <p:nvPr/>
+        </p:nvSpPr>
+        <p:spPr>
+          <a:xfrm>
+            <a:off x="2743200" y="4983480"/>
+            <a:ext cx="2560320" cy="274320"/>
+          </a:xfrm>
+          <a:prstGeom prst="rect">
+            <a:avLst/>
+          </a:prstGeom>
+          <a:noFill/>
+          <a:ln/>
+        </p:spPr>
+        <p:txBody>
+          <a:bodyPr wrap="square" rtlCol="0" anchor="ctr"/>
+          <a:lstStyle/>
+          <a:p>
+            <a:pPr indent="0" marL="0">
+              <a:buNone/>
+            </a:pPr>
+            <a:r>
+              <a:rPr lang="en-US" sz="800" dirty="0">
+                <a:solidFill>
+                  <a:srgbClr val="FFAA44"/>
+                </a:solidFill>
+                <a:latin typeface="Microsoft JhengHei" pitchFamily="34" charset="0"/>
+                <a:ea typeface="Microsoft JhengHei" pitchFamily="34" charset="-122"/>
+                <a:cs typeface="Microsoft JhengHei" pitchFamily="34" charset="-120"/>
+              </a:rPr>
+              <a:t>AdvancedBrowsingActivity</a:t>
+            </a:r>
+            <a:endParaRPr lang="en-US" sz="800" dirty="0"/>
+          </a:p>
+        </p:txBody>
+      </p:sp>
+      <p:sp>
+        <p:nvSpPr>
+          <p:cNvPr id="65" name="Text 63"/>
+          <p:cNvSpPr/>
+          <p:nvPr/>
+        </p:nvSpPr>
+        <p:spPr>
+          <a:xfrm>
+            <a:off x="5303520" y="4983480"/>
+            <a:ext cx="914400" cy="274320"/>
+          </a:xfrm>
+          <a:prstGeom prst="rect">
+            <a:avLst/>
+          </a:prstGeom>
+          <a:noFill/>
+          <a:ln/>
+        </p:spPr>
+        <p:txBody>
+          <a:bodyPr wrap="square" rtlCol="0" anchor="ctr"/>
+          <a:lstStyle/>
+          <a:p>
+            <a:pPr indent="0" marL="0">
+              <a:buNone/>
+            </a:pPr>
+            <a:r>
+              <a:rPr lang="en-US" sz="800" dirty="0">
+                <a:solidFill>
+                  <a:srgbClr val="FFAA44"/>
+                </a:solidFill>
+                <a:latin typeface="Consolas" pitchFamily="34" charset="0"/>
+                <a:ea typeface="Consolas" pitchFamily="34" charset="-122"/>
+                <a:cs typeface="Consolas" pitchFamily="34" charset="-120"/>
+              </a:rPr>
+              <a:t>-</a:t>
+            </a:r>
+            <a:endParaRPr lang="en-US" sz="800" dirty="0"/>
+          </a:p>
+        </p:txBody>
+      </p:sp>
+      <p:sp>
+        <p:nvSpPr>
+          <p:cNvPr id="66" name="Text 64"/>
+          <p:cNvSpPr/>
+          <p:nvPr/>
+        </p:nvSpPr>
+        <p:spPr>
+          <a:xfrm>
+            <a:off x="6309360" y="4983480"/>
+            <a:ext cx="5212080" cy="274320"/>
+          </a:xfrm>
+          <a:prstGeom prst="rect">
+            <a:avLst/>
+          </a:prstGeom>
+          <a:noFill/>
+          <a:ln/>
+        </p:spPr>
+        <p:txBody>
+          <a:bodyPr wrap="square" rtlCol="0" anchor="ctr"/>
+          <a:lstStyle/>
+          <a:p>
+            <a:pPr indent="0" marL="0">
+              <a:buNone/>
+            </a:pPr>
+            <a:r>
+              <a:rPr lang="en-US" sz="900" dirty="0">
+                <a:solidFill>
+                  <a:srgbClr val="E0E0E6"/>
+                </a:solidFill>
+                <a:latin typeface="Microsoft JhengHei" pitchFamily="34" charset="0"/>
+                <a:ea typeface="Microsoft JhengHei" pitchFamily="34" charset="-122"/>
+                <a:cs typeface="Microsoft JhengHei" pitchFamily="34" charset="-120"/>
+              </a:rPr>
+              <a:t>強制移除正在顯示的複製畫面</a:t>
+            </a:r>
+            <a:endParaRPr lang="en-US" sz="900" dirty="0"/>
+          </a:p>
+        </p:txBody>
+      </p:sp>
+      <p:sp>
+        <p:nvSpPr>
+          <p:cNvPr id="67" name="Shape 65"/>
+          <p:cNvSpPr/>
+          <p:nvPr/>
+        </p:nvSpPr>
+        <p:spPr>
+          <a:xfrm>
+            <a:off x="594360" y="5303520"/>
+            <a:ext cx="10972800" cy="329184"/>
+          </a:xfrm>
+          <a:prstGeom prst="roundRect">
+            <a:avLst>
+              <a:gd name="adj" fmla="val 8333"/>
+            </a:avLst>
+          </a:prstGeom>
+          <a:solidFill>
+            <a:srgbClr val="351515"/>
+          </a:solidFill>
+          <a:ln/>
+        </p:spPr>
+      </p:sp>
+      <p:sp>
+        <p:nvSpPr>
+          <p:cNvPr id="68" name="Text 66"/>
+          <p:cNvSpPr/>
+          <p:nvPr/>
+        </p:nvSpPr>
+        <p:spPr>
+          <a:xfrm>
+            <a:off x="731520" y="5330952"/>
+            <a:ext cx="640080" cy="274320"/>
+          </a:xfrm>
+          <a:prstGeom prst="rect">
+            <a:avLst/>
+          </a:prstGeom>
+          <a:noFill/>
+          <a:ln/>
+        </p:spPr>
+        <p:txBody>
+          <a:bodyPr wrap="square" rtlCol="0" anchor="ctr"/>
+          <a:lstStyle/>
+          <a:p>
+            <a:pPr indent="0" marL="0">
+              <a:buNone/>
+            </a:pPr>
+            <a:r>
+              <a:rPr lang="en-US" sz="800" b="1" dirty="0">
+                <a:solidFill>
+                  <a:srgbClr val="FF5F6D"/>
+                </a:solidFill>
+                <a:latin typeface="Consolas" pitchFamily="34" charset="0"/>
+                <a:ea typeface="Consolas" pitchFamily="34" charset="-122"/>
+                <a:cs typeface="Consolas" pitchFamily="34" charset="-120"/>
+              </a:rPr>
+              <a:t>154444</a:t>
+            </a:r>
+            <a:endParaRPr lang="en-US" sz="800" dirty="0"/>
+          </a:p>
+        </p:txBody>
+      </p:sp>
+      <p:sp>
+        <p:nvSpPr>
+          <p:cNvPr id="69" name="Text 67"/>
+          <p:cNvSpPr/>
+          <p:nvPr/>
+        </p:nvSpPr>
+        <p:spPr>
+          <a:xfrm>
+            <a:off x="1371600" y="5330952"/>
+            <a:ext cx="1371600" cy="274320"/>
+          </a:xfrm>
+          <a:prstGeom prst="rect">
+            <a:avLst/>
+          </a:prstGeom>
+          <a:noFill/>
+          <a:ln/>
+        </p:spPr>
+        <p:txBody>
+          <a:bodyPr wrap="square" rtlCol="0" anchor="ctr"/>
+          <a:lstStyle/>
+          <a:p>
+            <a:pPr indent="0" marL="0">
+              <a:buNone/>
+            </a:pPr>
+            <a:r>
+              <a:rPr lang="en-US" sz="800" b="1" dirty="0">
+                <a:solidFill>
+                  <a:srgbClr val="FF5F6D"/>
+                </a:solidFill>
+                <a:latin typeface="Consolas" pitchFamily="34" charset="0"/>
+                <a:ea typeface="Consolas" pitchFamily="34" charset="-122"/>
+                <a:cs typeface="Consolas" pitchFamily="34" charset="-120"/>
+              </a:rPr>
+              <a:t>reason=3</a:t>
+            </a:r>
+            <a:endParaRPr lang="en-US" sz="800" dirty="0"/>
+          </a:p>
+        </p:txBody>
+      </p:sp>
+      <p:sp>
+        <p:nvSpPr>
+          <p:cNvPr id="70" name="Text 68"/>
+          <p:cNvSpPr/>
+          <p:nvPr/>
+        </p:nvSpPr>
+        <p:spPr>
+          <a:xfrm>
+            <a:off x="2743200" y="5330952"/>
+            <a:ext cx="2560320" cy="274320"/>
+          </a:xfrm>
+          <a:prstGeom prst="rect">
+            <a:avLst/>
+          </a:prstGeom>
+          <a:noFill/>
+          <a:ln/>
+        </p:spPr>
+        <p:txBody>
+          <a:bodyPr wrap="square" rtlCol="0" anchor="ctr"/>
+          <a:lstStyle/>
+          <a:p>
+            <a:pPr indent="0" marL="0">
+              <a:buNone/>
+            </a:pPr>
+            <a:r>
+              <a:rPr lang="en-US" sz="800" b="1" dirty="0">
+                <a:solidFill>
+                  <a:srgbClr val="FF5F6D"/>
+                </a:solidFill>
+                <a:latin typeface="Microsoft JhengHei" pitchFamily="34" charset="0"/>
+                <a:ea typeface="Microsoft JhengHei" pitchFamily="34" charset="-122"/>
+                <a:cs typeface="Microsoft JhengHei" pitchFamily="34" charset="-120"/>
+              </a:rPr>
+              <a:t>apps.nbu.files</a:t>
+            </a:r>
+            <a:endParaRPr lang="en-US" sz="800" dirty="0"/>
+          </a:p>
+        </p:txBody>
+      </p:sp>
+      <p:sp>
+        <p:nvSpPr>
+          <p:cNvPr id="71" name="Text 69"/>
+          <p:cNvSpPr/>
+          <p:nvPr/>
+        </p:nvSpPr>
+        <p:spPr>
+          <a:xfrm>
+            <a:off x="5303520" y="5330952"/>
+            <a:ext cx="914400" cy="274320"/>
+          </a:xfrm>
+          <a:prstGeom prst="rect">
+            <a:avLst/>
+          </a:prstGeom>
+          <a:noFill/>
+          <a:ln/>
+        </p:spPr>
+        <p:txBody>
+          <a:bodyPr wrap="square" rtlCol="0" anchor="ctr"/>
+          <a:lstStyle/>
+          <a:p>
+            <a:pPr indent="0" marL="0">
+              <a:buNone/>
+            </a:pPr>
+            <a:r>
+              <a:rPr lang="en-US" sz="800" b="1" dirty="0">
+                <a:solidFill>
+                  <a:srgbClr val="FF5F6D"/>
+                </a:solidFill>
+                <a:latin typeface="Consolas" pitchFamily="34" charset="0"/>
+                <a:ea typeface="Consolas" pitchFamily="34" charset="-122"/>
+                <a:cs typeface="Consolas" pitchFamily="34" charset="-120"/>
+              </a:rPr>
+              <a:t>imp=100</a:t>
+            </a:r>
+            <a:endParaRPr lang="en-US" sz="800" dirty="0"/>
+          </a:p>
+        </p:txBody>
+      </p:sp>
+      <p:sp>
+        <p:nvSpPr>
+          <p:cNvPr id="72" name="Text 70"/>
+          <p:cNvSpPr/>
+          <p:nvPr/>
+        </p:nvSpPr>
+        <p:spPr>
+          <a:xfrm>
+            <a:off x="6309360" y="5330952"/>
+            <a:ext cx="5212080" cy="274320"/>
+          </a:xfrm>
+          <a:prstGeom prst="rect">
+            <a:avLst/>
+          </a:prstGeom>
+          <a:noFill/>
+          <a:ln/>
+        </p:spPr>
+        <p:txBody>
+          <a:bodyPr wrap="square" rtlCol="0" anchor="ctr"/>
+          <a:lstStyle/>
+          <a:p>
+            <a:pPr indent="0" marL="0">
+              <a:buNone/>
+            </a:pPr>
+            <a:r>
+              <a:rPr lang="en-US" sz="900" b="1" dirty="0">
+                <a:solidFill>
+                  <a:srgbClr val="FF5F6D"/>
+                </a:solidFill>
+                <a:latin typeface="Microsoft JhengHei" pitchFamily="34" charset="0"/>
+                <a:ea typeface="Microsoft JhengHei" pitchFamily="34" charset="-122"/>
+                <a:cs typeface="Microsoft JhengHei" pitchFamily="34" charset="-120"/>
+              </a:rPr>
+              <a:t>死因：LOW_MEMORY（前景 App）</a:t>
+            </a:r>
+            <a:endParaRPr lang="en-US" sz="900" dirty="0"/>
           </a:p>
         </p:txBody>
       </p:sp>
